--- a/docs/sharing/ai-native-insight-deck.pptx
+++ b/docs/sharing/ai-native-insight-deck.pptx
@@ -60656,7 +60656,7 @@
                 </a:solidFill>
                 <a:latin typeface="Consolas"/>
               </a:rPr>
-              <a:t>A3 · 三条发散曲线（公开数据）</a:t>
+              <a:t>A3 · 三条发散曲线（公开数据 · 二维曲线图）</a:t>
             </a:r>
           </a:p>
         </p:txBody>
@@ -60691,7 +60691,7 @@
                 </a:solidFill>
                 <a:latin typeface="Microsoft YaHei"/>
               </a:rPr>
-              <a:t>模型规模 / 硬件代际 / 算子复杂度——同步加速 (2018→2026)</a:t>
+              <a:t>同一时间轴上的相对增速 — y 轴 = log10(× baseline) (2017→2026)</a:t>
             </a:r>
           </a:p>
         </p:txBody>
@@ -60748,7 +60748,7 @@
         <p:spPr>
           <a:xfrm>
             <a:off x="548640" y="1828800"/>
-            <a:ext cx="11109960" cy="1417320"/>
+            <a:ext cx="7863840" cy="4297680"/>
           </a:xfrm>
           <a:prstGeom prst="roundRect">
             <a:avLst>
@@ -60786,99 +60786,21 @@
           </a:p>
         </p:txBody>
       </p:sp>
-      <p:sp>
-        <p:nvSpPr>
-          <p:cNvPr id="9" name="Rectangle 8"/>
-          <p:cNvSpPr/>
-          <p:nvPr/>
-        </p:nvSpPr>
-        <p:spPr>
-          <a:xfrm>
-            <a:off x="548640" y="1828800"/>
-            <a:ext cx="11109960" cy="54864"/>
-          </a:xfrm>
-          <a:prstGeom prst="rect">
-            <a:avLst/>
-          </a:prstGeom>
-          <a:solidFill>
-            <a:srgbClr val="38D1B8"/>
-          </a:solidFill>
-          <a:ln>
-            <a:noFill/>
-          </a:ln>
-        </p:spPr>
-        <p:style>
-          <a:lnRef idx="1">
-            <a:schemeClr val="accent1"/>
-          </a:lnRef>
-          <a:fillRef idx="3">
-            <a:schemeClr val="accent1"/>
-          </a:fillRef>
-          <a:effectRef idx="2">
-            <a:schemeClr val="accent1"/>
-          </a:effectRef>
-          <a:fontRef idx="minor">
-            <a:schemeClr val="lt1"/>
-          </a:fontRef>
-        </p:style>
-        <p:txBody>
-          <a:bodyPr rtlCol="0" anchor="ctr"/>
-          <a:lstStyle/>
-          <a:p>
-            <a:pPr algn="ctr"/>
-          </a:p>
-        </p:txBody>
-      </p:sp>
-      <p:sp>
-        <p:nvSpPr>
-          <p:cNvPr id="10" name="TextBox 9"/>
-          <p:cNvSpPr txBox="1"/>
-          <p:nvPr/>
-        </p:nvSpPr>
-        <p:spPr>
-          <a:xfrm>
-            <a:off x="731520" y="1938528"/>
-            <a:ext cx="10744200" cy="292608"/>
-          </a:xfrm>
-          <a:prstGeom prst="rect">
-            <a:avLst/>
-          </a:prstGeom>
-          <a:noFill/>
-        </p:spPr>
-        <p:txBody>
-          <a:bodyPr wrap="square" lIns="0" rIns="0" tIns="0" bIns="0" anchor="t">
-            <a:spAutoFit/>
-          </a:bodyPr>
-          <a:lstStyle/>
-          <a:p>
-            <a:pPr algn="l"/>
-            <a:r>
-              <a:rPr sz="1200" b="1" i="0">
-                <a:solidFill>
-                  <a:srgbClr val="38D1B8"/>
-                </a:solidFill>
-                <a:latin typeface="Consolas"/>
-              </a:rPr>
-              <a:t>① 大模型规模 (参数量级)</a:t>
-            </a:r>
-          </a:p>
-        </p:txBody>
-      </p:sp>
       <p:cxnSp>
         <p:nvCxnSpPr>
-          <p:cNvPr id="11" name="Connector 10"/>
+          <p:cNvPr id="9" name="Connector 8"/>
           <p:cNvCxnSpPr/>
           <p:nvPr/>
         </p:nvCxnSpPr>
         <p:spPr>
           <a:xfrm>
-            <a:off x="1051560" y="2377440"/>
-            <a:ext cx="10378440" cy="0"/>
+            <a:off x="1325880" y="5257800"/>
+            <a:ext cx="6812280" cy="0"/>
           </a:xfrm>
           <a:prstGeom prst="line">
             <a:avLst/>
           </a:prstGeom>
-          <a:ln w="12700">
+          <a:ln w="17780">
             <a:solidFill>
               <a:srgbClr val="9FB5C9"/>
             </a:solidFill>
@@ -60901,19 +60823,19 @@
       </p:cxnSp>
       <p:cxnSp>
         <p:nvCxnSpPr>
-          <p:cNvPr id="12" name="Connector 11"/>
+          <p:cNvPr id="10" name="Connector 9"/>
           <p:cNvCxnSpPr/>
           <p:nvPr/>
         </p:nvCxnSpPr>
         <p:spPr>
           <a:xfrm>
-            <a:off x="1051560" y="2331720"/>
-            <a:ext cx="0" cy="45720"/>
+            <a:off x="1325880" y="2331720"/>
+            <a:ext cx="0" cy="2926080"/>
           </a:xfrm>
           <a:prstGeom prst="line">
             <a:avLst/>
           </a:prstGeom>
-          <a:ln w="10160">
+          <a:ln w="17780">
             <a:solidFill>
               <a:srgbClr val="9FB5C9"/>
             </a:solidFill>
@@ -60936,14 +60858,14 @@
       </p:cxnSp>
       <p:cxnSp>
         <p:nvCxnSpPr>
-          <p:cNvPr id="13" name="Connector 12"/>
+          <p:cNvPr id="11" name="Connector 10"/>
           <p:cNvCxnSpPr/>
           <p:nvPr/>
         </p:nvCxnSpPr>
         <p:spPr>
           <a:xfrm>
-            <a:off x="1051560" y="2366010"/>
-            <a:ext cx="10378440" cy="0"/>
+            <a:off x="1325880" y="2331720"/>
+            <a:ext cx="0" cy="2926080"/>
           </a:xfrm>
           <a:prstGeom prst="line">
             <a:avLst/>
@@ -60951,6 +60873,1196 @@
           <a:ln w="5080">
             <a:solidFill>
               <a:srgbClr val="244466"/>
+            </a:solidFill>
+          </a:ln>
+        </p:spPr>
+        <p:style>
+          <a:lnRef idx="2">
+            <a:schemeClr val="accent1"/>
+          </a:lnRef>
+          <a:fillRef idx="0">
+            <a:schemeClr val="accent1"/>
+          </a:fillRef>
+          <a:effectRef idx="1">
+            <a:schemeClr val="accent1"/>
+          </a:effectRef>
+          <a:fontRef idx="minor">
+            <a:schemeClr val="tx1"/>
+          </a:fontRef>
+        </p:style>
+      </p:cxnSp>
+      <p:sp>
+        <p:nvSpPr>
+          <p:cNvPr id="12" name="TextBox 11"/>
+          <p:cNvSpPr txBox="1"/>
+          <p:nvPr/>
+        </p:nvSpPr>
+        <p:spPr>
+          <a:xfrm>
+            <a:off x="1097280" y="5312664"/>
+            <a:ext cx="457200" cy="256032"/>
+          </a:xfrm>
+          <a:prstGeom prst="rect">
+            <a:avLst/>
+          </a:prstGeom>
+          <a:noFill/>
+        </p:spPr>
+        <p:txBody>
+          <a:bodyPr wrap="square" lIns="0" rIns="0" tIns="0" bIns="0" anchor="t">
+            <a:spAutoFit/>
+          </a:bodyPr>
+          <a:lstStyle/>
+          <a:p>
+            <a:pPr algn="ctr"/>
+            <a:r>
+              <a:rPr sz="900" b="0" i="0">
+                <a:solidFill>
+                  <a:srgbClr val="9FB5C9"/>
+                </a:solidFill>
+                <a:latin typeface="Consolas"/>
+              </a:rPr>
+              <a:t>2017</a:t>
+            </a:r>
+          </a:p>
+        </p:txBody>
+      </p:sp>
+      <p:cxnSp>
+        <p:nvCxnSpPr>
+          <p:cNvPr id="13" name="Connector 12"/>
+          <p:cNvCxnSpPr/>
+          <p:nvPr/>
+        </p:nvCxnSpPr>
+        <p:spPr>
+          <a:xfrm>
+            <a:off x="2082800" y="2331720"/>
+            <a:ext cx="0" cy="2926080"/>
+          </a:xfrm>
+          <a:prstGeom prst="line">
+            <a:avLst/>
+          </a:prstGeom>
+          <a:ln w="5080">
+            <a:solidFill>
+              <a:srgbClr val="244466"/>
+            </a:solidFill>
+          </a:ln>
+        </p:spPr>
+        <p:style>
+          <a:lnRef idx="2">
+            <a:schemeClr val="accent1"/>
+          </a:lnRef>
+          <a:fillRef idx="0">
+            <a:schemeClr val="accent1"/>
+          </a:fillRef>
+          <a:effectRef idx="1">
+            <a:schemeClr val="accent1"/>
+          </a:effectRef>
+          <a:fontRef idx="minor">
+            <a:schemeClr val="tx1"/>
+          </a:fontRef>
+        </p:style>
+      </p:cxnSp>
+      <p:sp>
+        <p:nvSpPr>
+          <p:cNvPr id="14" name="TextBox 13"/>
+          <p:cNvSpPr txBox="1"/>
+          <p:nvPr/>
+        </p:nvSpPr>
+        <p:spPr>
+          <a:xfrm>
+            <a:off x="1854200" y="5312664"/>
+            <a:ext cx="457200" cy="256032"/>
+          </a:xfrm>
+          <a:prstGeom prst="rect">
+            <a:avLst/>
+          </a:prstGeom>
+          <a:noFill/>
+        </p:spPr>
+        <p:txBody>
+          <a:bodyPr wrap="square" lIns="0" rIns="0" tIns="0" bIns="0" anchor="t">
+            <a:spAutoFit/>
+          </a:bodyPr>
+          <a:lstStyle/>
+          <a:p>
+            <a:pPr algn="ctr"/>
+            <a:r>
+              <a:rPr sz="900" b="0" i="0">
+                <a:solidFill>
+                  <a:srgbClr val="9FB5C9"/>
+                </a:solidFill>
+                <a:latin typeface="Consolas"/>
+              </a:rPr>
+              <a:t>2018</a:t>
+            </a:r>
+          </a:p>
+        </p:txBody>
+      </p:sp>
+      <p:cxnSp>
+        <p:nvCxnSpPr>
+          <p:cNvPr id="15" name="Connector 14"/>
+          <p:cNvCxnSpPr/>
+          <p:nvPr/>
+        </p:nvCxnSpPr>
+        <p:spPr>
+          <a:xfrm>
+            <a:off x="2839720" y="2331720"/>
+            <a:ext cx="0" cy="2926080"/>
+          </a:xfrm>
+          <a:prstGeom prst="line">
+            <a:avLst/>
+          </a:prstGeom>
+          <a:ln w="5080">
+            <a:solidFill>
+              <a:srgbClr val="244466"/>
+            </a:solidFill>
+          </a:ln>
+        </p:spPr>
+        <p:style>
+          <a:lnRef idx="2">
+            <a:schemeClr val="accent1"/>
+          </a:lnRef>
+          <a:fillRef idx="0">
+            <a:schemeClr val="accent1"/>
+          </a:fillRef>
+          <a:effectRef idx="1">
+            <a:schemeClr val="accent1"/>
+          </a:effectRef>
+          <a:fontRef idx="minor">
+            <a:schemeClr val="tx1"/>
+          </a:fontRef>
+        </p:style>
+      </p:cxnSp>
+      <p:sp>
+        <p:nvSpPr>
+          <p:cNvPr id="16" name="TextBox 15"/>
+          <p:cNvSpPr txBox="1"/>
+          <p:nvPr/>
+        </p:nvSpPr>
+        <p:spPr>
+          <a:xfrm>
+            <a:off x="2611120" y="5312664"/>
+            <a:ext cx="457200" cy="256032"/>
+          </a:xfrm>
+          <a:prstGeom prst="rect">
+            <a:avLst/>
+          </a:prstGeom>
+          <a:noFill/>
+        </p:spPr>
+        <p:txBody>
+          <a:bodyPr wrap="square" lIns="0" rIns="0" tIns="0" bIns="0" anchor="t">
+            <a:spAutoFit/>
+          </a:bodyPr>
+          <a:lstStyle/>
+          <a:p>
+            <a:pPr algn="ctr"/>
+            <a:r>
+              <a:rPr sz="900" b="0" i="0">
+                <a:solidFill>
+                  <a:srgbClr val="9FB5C9"/>
+                </a:solidFill>
+                <a:latin typeface="Consolas"/>
+              </a:rPr>
+              <a:t>2019</a:t>
+            </a:r>
+          </a:p>
+        </p:txBody>
+      </p:sp>
+      <p:cxnSp>
+        <p:nvCxnSpPr>
+          <p:cNvPr id="17" name="Connector 16"/>
+          <p:cNvCxnSpPr/>
+          <p:nvPr/>
+        </p:nvCxnSpPr>
+        <p:spPr>
+          <a:xfrm>
+            <a:off x="3596640" y="2331720"/>
+            <a:ext cx="0" cy="2926080"/>
+          </a:xfrm>
+          <a:prstGeom prst="line">
+            <a:avLst/>
+          </a:prstGeom>
+          <a:ln w="5080">
+            <a:solidFill>
+              <a:srgbClr val="244466"/>
+            </a:solidFill>
+          </a:ln>
+        </p:spPr>
+        <p:style>
+          <a:lnRef idx="2">
+            <a:schemeClr val="accent1"/>
+          </a:lnRef>
+          <a:fillRef idx="0">
+            <a:schemeClr val="accent1"/>
+          </a:fillRef>
+          <a:effectRef idx="1">
+            <a:schemeClr val="accent1"/>
+          </a:effectRef>
+          <a:fontRef idx="minor">
+            <a:schemeClr val="tx1"/>
+          </a:fontRef>
+        </p:style>
+      </p:cxnSp>
+      <p:sp>
+        <p:nvSpPr>
+          <p:cNvPr id="18" name="TextBox 17"/>
+          <p:cNvSpPr txBox="1"/>
+          <p:nvPr/>
+        </p:nvSpPr>
+        <p:spPr>
+          <a:xfrm>
+            <a:off x="3368040" y="5312664"/>
+            <a:ext cx="457200" cy="256032"/>
+          </a:xfrm>
+          <a:prstGeom prst="rect">
+            <a:avLst/>
+          </a:prstGeom>
+          <a:noFill/>
+        </p:spPr>
+        <p:txBody>
+          <a:bodyPr wrap="square" lIns="0" rIns="0" tIns="0" bIns="0" anchor="t">
+            <a:spAutoFit/>
+          </a:bodyPr>
+          <a:lstStyle/>
+          <a:p>
+            <a:pPr algn="ctr"/>
+            <a:r>
+              <a:rPr sz="900" b="0" i="0">
+                <a:solidFill>
+                  <a:srgbClr val="9FB5C9"/>
+                </a:solidFill>
+                <a:latin typeface="Consolas"/>
+              </a:rPr>
+              <a:t>2020</a:t>
+            </a:r>
+          </a:p>
+        </p:txBody>
+      </p:sp>
+      <p:cxnSp>
+        <p:nvCxnSpPr>
+          <p:cNvPr id="19" name="Connector 18"/>
+          <p:cNvCxnSpPr/>
+          <p:nvPr/>
+        </p:nvCxnSpPr>
+        <p:spPr>
+          <a:xfrm>
+            <a:off x="4353560" y="2331720"/>
+            <a:ext cx="0" cy="2926080"/>
+          </a:xfrm>
+          <a:prstGeom prst="line">
+            <a:avLst/>
+          </a:prstGeom>
+          <a:ln w="5080">
+            <a:solidFill>
+              <a:srgbClr val="244466"/>
+            </a:solidFill>
+          </a:ln>
+        </p:spPr>
+        <p:style>
+          <a:lnRef idx="2">
+            <a:schemeClr val="accent1"/>
+          </a:lnRef>
+          <a:fillRef idx="0">
+            <a:schemeClr val="accent1"/>
+          </a:fillRef>
+          <a:effectRef idx="1">
+            <a:schemeClr val="accent1"/>
+          </a:effectRef>
+          <a:fontRef idx="minor">
+            <a:schemeClr val="tx1"/>
+          </a:fontRef>
+        </p:style>
+      </p:cxnSp>
+      <p:sp>
+        <p:nvSpPr>
+          <p:cNvPr id="20" name="TextBox 19"/>
+          <p:cNvSpPr txBox="1"/>
+          <p:nvPr/>
+        </p:nvSpPr>
+        <p:spPr>
+          <a:xfrm>
+            <a:off x="4124960" y="5312664"/>
+            <a:ext cx="457200" cy="256032"/>
+          </a:xfrm>
+          <a:prstGeom prst="rect">
+            <a:avLst/>
+          </a:prstGeom>
+          <a:noFill/>
+        </p:spPr>
+        <p:txBody>
+          <a:bodyPr wrap="square" lIns="0" rIns="0" tIns="0" bIns="0" anchor="t">
+            <a:spAutoFit/>
+          </a:bodyPr>
+          <a:lstStyle/>
+          <a:p>
+            <a:pPr algn="ctr"/>
+            <a:r>
+              <a:rPr sz="900" b="0" i="0">
+                <a:solidFill>
+                  <a:srgbClr val="9FB5C9"/>
+                </a:solidFill>
+                <a:latin typeface="Consolas"/>
+              </a:rPr>
+              <a:t>2021</a:t>
+            </a:r>
+          </a:p>
+        </p:txBody>
+      </p:sp>
+      <p:cxnSp>
+        <p:nvCxnSpPr>
+          <p:cNvPr id="21" name="Connector 20"/>
+          <p:cNvCxnSpPr/>
+          <p:nvPr/>
+        </p:nvCxnSpPr>
+        <p:spPr>
+          <a:xfrm>
+            <a:off x="5110480" y="2331720"/>
+            <a:ext cx="0" cy="2926080"/>
+          </a:xfrm>
+          <a:prstGeom prst="line">
+            <a:avLst/>
+          </a:prstGeom>
+          <a:ln w="5080">
+            <a:solidFill>
+              <a:srgbClr val="244466"/>
+            </a:solidFill>
+          </a:ln>
+        </p:spPr>
+        <p:style>
+          <a:lnRef idx="2">
+            <a:schemeClr val="accent1"/>
+          </a:lnRef>
+          <a:fillRef idx="0">
+            <a:schemeClr val="accent1"/>
+          </a:fillRef>
+          <a:effectRef idx="1">
+            <a:schemeClr val="accent1"/>
+          </a:effectRef>
+          <a:fontRef idx="minor">
+            <a:schemeClr val="tx1"/>
+          </a:fontRef>
+        </p:style>
+      </p:cxnSp>
+      <p:sp>
+        <p:nvSpPr>
+          <p:cNvPr id="22" name="TextBox 21"/>
+          <p:cNvSpPr txBox="1"/>
+          <p:nvPr/>
+        </p:nvSpPr>
+        <p:spPr>
+          <a:xfrm>
+            <a:off x="4881880" y="5312664"/>
+            <a:ext cx="457200" cy="256032"/>
+          </a:xfrm>
+          <a:prstGeom prst="rect">
+            <a:avLst/>
+          </a:prstGeom>
+          <a:noFill/>
+        </p:spPr>
+        <p:txBody>
+          <a:bodyPr wrap="square" lIns="0" rIns="0" tIns="0" bIns="0" anchor="t">
+            <a:spAutoFit/>
+          </a:bodyPr>
+          <a:lstStyle/>
+          <a:p>
+            <a:pPr algn="ctr"/>
+            <a:r>
+              <a:rPr sz="900" b="0" i="0">
+                <a:solidFill>
+                  <a:srgbClr val="9FB5C9"/>
+                </a:solidFill>
+                <a:latin typeface="Consolas"/>
+              </a:rPr>
+              <a:t>2022</a:t>
+            </a:r>
+          </a:p>
+        </p:txBody>
+      </p:sp>
+      <p:cxnSp>
+        <p:nvCxnSpPr>
+          <p:cNvPr id="23" name="Connector 22"/>
+          <p:cNvCxnSpPr/>
+          <p:nvPr/>
+        </p:nvCxnSpPr>
+        <p:spPr>
+          <a:xfrm>
+            <a:off x="5867400" y="2331720"/>
+            <a:ext cx="0" cy="2926080"/>
+          </a:xfrm>
+          <a:prstGeom prst="line">
+            <a:avLst/>
+          </a:prstGeom>
+          <a:ln w="5080">
+            <a:solidFill>
+              <a:srgbClr val="244466"/>
+            </a:solidFill>
+          </a:ln>
+        </p:spPr>
+        <p:style>
+          <a:lnRef idx="2">
+            <a:schemeClr val="accent1"/>
+          </a:lnRef>
+          <a:fillRef idx="0">
+            <a:schemeClr val="accent1"/>
+          </a:fillRef>
+          <a:effectRef idx="1">
+            <a:schemeClr val="accent1"/>
+          </a:effectRef>
+          <a:fontRef idx="minor">
+            <a:schemeClr val="tx1"/>
+          </a:fontRef>
+        </p:style>
+      </p:cxnSp>
+      <p:sp>
+        <p:nvSpPr>
+          <p:cNvPr id="24" name="TextBox 23"/>
+          <p:cNvSpPr txBox="1"/>
+          <p:nvPr/>
+        </p:nvSpPr>
+        <p:spPr>
+          <a:xfrm>
+            <a:off x="5638800" y="5312664"/>
+            <a:ext cx="457200" cy="256032"/>
+          </a:xfrm>
+          <a:prstGeom prst="rect">
+            <a:avLst/>
+          </a:prstGeom>
+          <a:noFill/>
+        </p:spPr>
+        <p:txBody>
+          <a:bodyPr wrap="square" lIns="0" rIns="0" tIns="0" bIns="0" anchor="t">
+            <a:spAutoFit/>
+          </a:bodyPr>
+          <a:lstStyle/>
+          <a:p>
+            <a:pPr algn="ctr"/>
+            <a:r>
+              <a:rPr sz="900" b="0" i="0">
+                <a:solidFill>
+                  <a:srgbClr val="9FB5C9"/>
+                </a:solidFill>
+                <a:latin typeface="Consolas"/>
+              </a:rPr>
+              <a:t>2023</a:t>
+            </a:r>
+          </a:p>
+        </p:txBody>
+      </p:sp>
+      <p:cxnSp>
+        <p:nvCxnSpPr>
+          <p:cNvPr id="25" name="Connector 24"/>
+          <p:cNvCxnSpPr/>
+          <p:nvPr/>
+        </p:nvCxnSpPr>
+        <p:spPr>
+          <a:xfrm>
+            <a:off x="6624320" y="2331720"/>
+            <a:ext cx="0" cy="2926080"/>
+          </a:xfrm>
+          <a:prstGeom prst="line">
+            <a:avLst/>
+          </a:prstGeom>
+          <a:ln w="5080">
+            <a:solidFill>
+              <a:srgbClr val="244466"/>
+            </a:solidFill>
+          </a:ln>
+        </p:spPr>
+        <p:style>
+          <a:lnRef idx="2">
+            <a:schemeClr val="accent1"/>
+          </a:lnRef>
+          <a:fillRef idx="0">
+            <a:schemeClr val="accent1"/>
+          </a:fillRef>
+          <a:effectRef idx="1">
+            <a:schemeClr val="accent1"/>
+          </a:effectRef>
+          <a:fontRef idx="minor">
+            <a:schemeClr val="tx1"/>
+          </a:fontRef>
+        </p:style>
+      </p:cxnSp>
+      <p:sp>
+        <p:nvSpPr>
+          <p:cNvPr id="26" name="TextBox 25"/>
+          <p:cNvSpPr txBox="1"/>
+          <p:nvPr/>
+        </p:nvSpPr>
+        <p:spPr>
+          <a:xfrm>
+            <a:off x="6395720" y="5312664"/>
+            <a:ext cx="457200" cy="256032"/>
+          </a:xfrm>
+          <a:prstGeom prst="rect">
+            <a:avLst/>
+          </a:prstGeom>
+          <a:noFill/>
+        </p:spPr>
+        <p:txBody>
+          <a:bodyPr wrap="square" lIns="0" rIns="0" tIns="0" bIns="0" anchor="t">
+            <a:spAutoFit/>
+          </a:bodyPr>
+          <a:lstStyle/>
+          <a:p>
+            <a:pPr algn="ctr"/>
+            <a:r>
+              <a:rPr sz="900" b="0" i="0">
+                <a:solidFill>
+                  <a:srgbClr val="9FB5C9"/>
+                </a:solidFill>
+                <a:latin typeface="Consolas"/>
+              </a:rPr>
+              <a:t>2024</a:t>
+            </a:r>
+          </a:p>
+        </p:txBody>
+      </p:sp>
+      <p:cxnSp>
+        <p:nvCxnSpPr>
+          <p:cNvPr id="27" name="Connector 26"/>
+          <p:cNvCxnSpPr/>
+          <p:nvPr/>
+        </p:nvCxnSpPr>
+        <p:spPr>
+          <a:xfrm>
+            <a:off x="7381240" y="2331720"/>
+            <a:ext cx="0" cy="2926080"/>
+          </a:xfrm>
+          <a:prstGeom prst="line">
+            <a:avLst/>
+          </a:prstGeom>
+          <a:ln w="5080">
+            <a:solidFill>
+              <a:srgbClr val="244466"/>
+            </a:solidFill>
+          </a:ln>
+        </p:spPr>
+        <p:style>
+          <a:lnRef idx="2">
+            <a:schemeClr val="accent1"/>
+          </a:lnRef>
+          <a:fillRef idx="0">
+            <a:schemeClr val="accent1"/>
+          </a:fillRef>
+          <a:effectRef idx="1">
+            <a:schemeClr val="accent1"/>
+          </a:effectRef>
+          <a:fontRef idx="minor">
+            <a:schemeClr val="tx1"/>
+          </a:fontRef>
+        </p:style>
+      </p:cxnSp>
+      <p:sp>
+        <p:nvSpPr>
+          <p:cNvPr id="28" name="TextBox 27"/>
+          <p:cNvSpPr txBox="1"/>
+          <p:nvPr/>
+        </p:nvSpPr>
+        <p:spPr>
+          <a:xfrm>
+            <a:off x="7152640" y="5312664"/>
+            <a:ext cx="457200" cy="256032"/>
+          </a:xfrm>
+          <a:prstGeom prst="rect">
+            <a:avLst/>
+          </a:prstGeom>
+          <a:noFill/>
+        </p:spPr>
+        <p:txBody>
+          <a:bodyPr wrap="square" lIns="0" rIns="0" tIns="0" bIns="0" anchor="t">
+            <a:spAutoFit/>
+          </a:bodyPr>
+          <a:lstStyle/>
+          <a:p>
+            <a:pPr algn="ctr"/>
+            <a:r>
+              <a:rPr sz="900" b="0" i="0">
+                <a:solidFill>
+                  <a:srgbClr val="9FB5C9"/>
+                </a:solidFill>
+                <a:latin typeface="Consolas"/>
+              </a:rPr>
+              <a:t>2025</a:t>
+            </a:r>
+          </a:p>
+        </p:txBody>
+      </p:sp>
+      <p:cxnSp>
+        <p:nvCxnSpPr>
+          <p:cNvPr id="29" name="Connector 28"/>
+          <p:cNvCxnSpPr/>
+          <p:nvPr/>
+        </p:nvCxnSpPr>
+        <p:spPr>
+          <a:xfrm>
+            <a:off x="8138160" y="2331720"/>
+            <a:ext cx="0" cy="2926080"/>
+          </a:xfrm>
+          <a:prstGeom prst="line">
+            <a:avLst/>
+          </a:prstGeom>
+          <a:ln w="5080">
+            <a:solidFill>
+              <a:srgbClr val="244466"/>
+            </a:solidFill>
+          </a:ln>
+        </p:spPr>
+        <p:style>
+          <a:lnRef idx="2">
+            <a:schemeClr val="accent1"/>
+          </a:lnRef>
+          <a:fillRef idx="0">
+            <a:schemeClr val="accent1"/>
+          </a:fillRef>
+          <a:effectRef idx="1">
+            <a:schemeClr val="accent1"/>
+          </a:effectRef>
+          <a:fontRef idx="minor">
+            <a:schemeClr val="tx1"/>
+          </a:fontRef>
+        </p:style>
+      </p:cxnSp>
+      <p:sp>
+        <p:nvSpPr>
+          <p:cNvPr id="30" name="TextBox 29"/>
+          <p:cNvSpPr txBox="1"/>
+          <p:nvPr/>
+        </p:nvSpPr>
+        <p:spPr>
+          <a:xfrm>
+            <a:off x="7909560" y="5312664"/>
+            <a:ext cx="457200" cy="256032"/>
+          </a:xfrm>
+          <a:prstGeom prst="rect">
+            <a:avLst/>
+          </a:prstGeom>
+          <a:noFill/>
+        </p:spPr>
+        <p:txBody>
+          <a:bodyPr wrap="square" lIns="0" rIns="0" tIns="0" bIns="0" anchor="t">
+            <a:spAutoFit/>
+          </a:bodyPr>
+          <a:lstStyle/>
+          <a:p>
+            <a:pPr algn="ctr"/>
+            <a:r>
+              <a:rPr sz="900" b="0" i="0">
+                <a:solidFill>
+                  <a:srgbClr val="9FB5C9"/>
+                </a:solidFill>
+                <a:latin typeface="Consolas"/>
+              </a:rPr>
+              <a:t>2026</a:t>
+            </a:r>
+          </a:p>
+        </p:txBody>
+      </p:sp>
+      <p:cxnSp>
+        <p:nvCxnSpPr>
+          <p:cNvPr id="31" name="Connector 30"/>
+          <p:cNvCxnSpPr/>
+          <p:nvPr/>
+        </p:nvCxnSpPr>
+        <p:spPr>
+          <a:xfrm>
+            <a:off x="1325880" y="5257800"/>
+            <a:ext cx="6812280" cy="0"/>
+          </a:xfrm>
+          <a:prstGeom prst="line">
+            <a:avLst/>
+          </a:prstGeom>
+          <a:ln w="5080">
+            <a:solidFill>
+              <a:srgbClr val="244466"/>
+            </a:solidFill>
+          </a:ln>
+        </p:spPr>
+        <p:style>
+          <a:lnRef idx="2">
+            <a:schemeClr val="accent1"/>
+          </a:lnRef>
+          <a:fillRef idx="0">
+            <a:schemeClr val="accent1"/>
+          </a:fillRef>
+          <a:effectRef idx="1">
+            <a:schemeClr val="accent1"/>
+          </a:effectRef>
+          <a:fontRef idx="minor">
+            <a:schemeClr val="tx1"/>
+          </a:fontRef>
+        </p:style>
+      </p:cxnSp>
+      <p:sp>
+        <p:nvSpPr>
+          <p:cNvPr id="32" name="TextBox 31"/>
+          <p:cNvSpPr txBox="1"/>
+          <p:nvPr/>
+        </p:nvSpPr>
+        <p:spPr>
+          <a:xfrm>
+            <a:off x="612648" y="5138928"/>
+            <a:ext cx="640080" cy="256032"/>
+          </a:xfrm>
+          <a:prstGeom prst="rect">
+            <a:avLst/>
+          </a:prstGeom>
+          <a:noFill/>
+        </p:spPr>
+        <p:txBody>
+          <a:bodyPr wrap="square" lIns="0" rIns="0" tIns="0" bIns="0" anchor="t">
+            <a:spAutoFit/>
+          </a:bodyPr>
+          <a:lstStyle/>
+          <a:p>
+            <a:pPr algn="r"/>
+            <a:r>
+              <a:rPr sz="850" b="0" i="0">
+                <a:solidFill>
+                  <a:srgbClr val="9FB5C9"/>
+                </a:solidFill>
+                <a:latin typeface="Consolas"/>
+              </a:rPr>
+              <a:t>1×</a:t>
+            </a:r>
+          </a:p>
+        </p:txBody>
+      </p:sp>
+      <p:cxnSp>
+        <p:nvCxnSpPr>
+          <p:cNvPr id="33" name="Connector 32"/>
+          <p:cNvCxnSpPr/>
+          <p:nvPr/>
+        </p:nvCxnSpPr>
+        <p:spPr>
+          <a:xfrm>
+            <a:off x="1325880" y="4672584"/>
+            <a:ext cx="6812280" cy="0"/>
+          </a:xfrm>
+          <a:prstGeom prst="line">
+            <a:avLst/>
+          </a:prstGeom>
+          <a:ln w="5080">
+            <a:solidFill>
+              <a:srgbClr val="244466"/>
+            </a:solidFill>
+          </a:ln>
+        </p:spPr>
+        <p:style>
+          <a:lnRef idx="2">
+            <a:schemeClr val="accent1"/>
+          </a:lnRef>
+          <a:fillRef idx="0">
+            <a:schemeClr val="accent1"/>
+          </a:fillRef>
+          <a:effectRef idx="1">
+            <a:schemeClr val="accent1"/>
+          </a:effectRef>
+          <a:fontRef idx="minor">
+            <a:schemeClr val="tx1"/>
+          </a:fontRef>
+        </p:style>
+      </p:cxnSp>
+      <p:sp>
+        <p:nvSpPr>
+          <p:cNvPr id="34" name="TextBox 33"/>
+          <p:cNvSpPr txBox="1"/>
+          <p:nvPr/>
+        </p:nvSpPr>
+        <p:spPr>
+          <a:xfrm>
+            <a:off x="612648" y="4553712"/>
+            <a:ext cx="640080" cy="256032"/>
+          </a:xfrm>
+          <a:prstGeom prst="rect">
+            <a:avLst/>
+          </a:prstGeom>
+          <a:noFill/>
+        </p:spPr>
+        <p:txBody>
+          <a:bodyPr wrap="square" lIns="0" rIns="0" tIns="0" bIns="0" anchor="t">
+            <a:spAutoFit/>
+          </a:bodyPr>
+          <a:lstStyle/>
+          <a:p>
+            <a:pPr algn="r"/>
+            <a:r>
+              <a:rPr sz="850" b="0" i="0">
+                <a:solidFill>
+                  <a:srgbClr val="9FB5C9"/>
+                </a:solidFill>
+                <a:latin typeface="Consolas"/>
+              </a:rPr>
+              <a:t>10^1×</a:t>
+            </a:r>
+          </a:p>
+        </p:txBody>
+      </p:sp>
+      <p:cxnSp>
+        <p:nvCxnSpPr>
+          <p:cNvPr id="35" name="Connector 34"/>
+          <p:cNvCxnSpPr/>
+          <p:nvPr/>
+        </p:nvCxnSpPr>
+        <p:spPr>
+          <a:xfrm>
+            <a:off x="1325880" y="4087368"/>
+            <a:ext cx="6812280" cy="0"/>
+          </a:xfrm>
+          <a:prstGeom prst="line">
+            <a:avLst/>
+          </a:prstGeom>
+          <a:ln w="5080">
+            <a:solidFill>
+              <a:srgbClr val="244466"/>
+            </a:solidFill>
+          </a:ln>
+        </p:spPr>
+        <p:style>
+          <a:lnRef idx="2">
+            <a:schemeClr val="accent1"/>
+          </a:lnRef>
+          <a:fillRef idx="0">
+            <a:schemeClr val="accent1"/>
+          </a:fillRef>
+          <a:effectRef idx="1">
+            <a:schemeClr val="accent1"/>
+          </a:effectRef>
+          <a:fontRef idx="minor">
+            <a:schemeClr val="tx1"/>
+          </a:fontRef>
+        </p:style>
+      </p:cxnSp>
+      <p:sp>
+        <p:nvSpPr>
+          <p:cNvPr id="36" name="TextBox 35"/>
+          <p:cNvSpPr txBox="1"/>
+          <p:nvPr/>
+        </p:nvSpPr>
+        <p:spPr>
+          <a:xfrm>
+            <a:off x="612648" y="3968496"/>
+            <a:ext cx="640080" cy="256032"/>
+          </a:xfrm>
+          <a:prstGeom prst="rect">
+            <a:avLst/>
+          </a:prstGeom>
+          <a:noFill/>
+        </p:spPr>
+        <p:txBody>
+          <a:bodyPr wrap="square" lIns="0" rIns="0" tIns="0" bIns="0" anchor="t">
+            <a:spAutoFit/>
+          </a:bodyPr>
+          <a:lstStyle/>
+          <a:p>
+            <a:pPr algn="r"/>
+            <a:r>
+              <a:rPr sz="850" b="0" i="0">
+                <a:solidFill>
+                  <a:srgbClr val="9FB5C9"/>
+                </a:solidFill>
+                <a:latin typeface="Consolas"/>
+              </a:rPr>
+              <a:t>10^2×</a:t>
+            </a:r>
+          </a:p>
+        </p:txBody>
+      </p:sp>
+      <p:cxnSp>
+        <p:nvCxnSpPr>
+          <p:cNvPr id="37" name="Connector 36"/>
+          <p:cNvCxnSpPr/>
+          <p:nvPr/>
+        </p:nvCxnSpPr>
+        <p:spPr>
+          <a:xfrm>
+            <a:off x="1325880" y="3502152"/>
+            <a:ext cx="6812280" cy="0"/>
+          </a:xfrm>
+          <a:prstGeom prst="line">
+            <a:avLst/>
+          </a:prstGeom>
+          <a:ln w="5080">
+            <a:solidFill>
+              <a:srgbClr val="244466"/>
+            </a:solidFill>
+          </a:ln>
+        </p:spPr>
+        <p:style>
+          <a:lnRef idx="2">
+            <a:schemeClr val="accent1"/>
+          </a:lnRef>
+          <a:fillRef idx="0">
+            <a:schemeClr val="accent1"/>
+          </a:fillRef>
+          <a:effectRef idx="1">
+            <a:schemeClr val="accent1"/>
+          </a:effectRef>
+          <a:fontRef idx="minor">
+            <a:schemeClr val="tx1"/>
+          </a:fontRef>
+        </p:style>
+      </p:cxnSp>
+      <p:sp>
+        <p:nvSpPr>
+          <p:cNvPr id="38" name="TextBox 37"/>
+          <p:cNvSpPr txBox="1"/>
+          <p:nvPr/>
+        </p:nvSpPr>
+        <p:spPr>
+          <a:xfrm>
+            <a:off x="612648" y="3383280"/>
+            <a:ext cx="640080" cy="256032"/>
+          </a:xfrm>
+          <a:prstGeom prst="rect">
+            <a:avLst/>
+          </a:prstGeom>
+          <a:noFill/>
+        </p:spPr>
+        <p:txBody>
+          <a:bodyPr wrap="square" lIns="0" rIns="0" tIns="0" bIns="0" anchor="t">
+            <a:spAutoFit/>
+          </a:bodyPr>
+          <a:lstStyle/>
+          <a:p>
+            <a:pPr algn="r"/>
+            <a:r>
+              <a:rPr sz="850" b="0" i="0">
+                <a:solidFill>
+                  <a:srgbClr val="9FB5C9"/>
+                </a:solidFill>
+                <a:latin typeface="Consolas"/>
+              </a:rPr>
+              <a:t>10^3×</a:t>
+            </a:r>
+          </a:p>
+        </p:txBody>
+      </p:sp>
+      <p:cxnSp>
+        <p:nvCxnSpPr>
+          <p:cNvPr id="39" name="Connector 38"/>
+          <p:cNvCxnSpPr/>
+          <p:nvPr/>
+        </p:nvCxnSpPr>
+        <p:spPr>
+          <a:xfrm>
+            <a:off x="1325880" y="2916936"/>
+            <a:ext cx="6812280" cy="0"/>
+          </a:xfrm>
+          <a:prstGeom prst="line">
+            <a:avLst/>
+          </a:prstGeom>
+          <a:ln w="5080">
+            <a:solidFill>
+              <a:srgbClr val="244466"/>
+            </a:solidFill>
+          </a:ln>
+        </p:spPr>
+        <p:style>
+          <a:lnRef idx="2">
+            <a:schemeClr val="accent1"/>
+          </a:lnRef>
+          <a:fillRef idx="0">
+            <a:schemeClr val="accent1"/>
+          </a:fillRef>
+          <a:effectRef idx="1">
+            <a:schemeClr val="accent1"/>
+          </a:effectRef>
+          <a:fontRef idx="minor">
+            <a:schemeClr val="tx1"/>
+          </a:fontRef>
+        </p:style>
+      </p:cxnSp>
+      <p:sp>
+        <p:nvSpPr>
+          <p:cNvPr id="40" name="TextBox 39"/>
+          <p:cNvSpPr txBox="1"/>
+          <p:nvPr/>
+        </p:nvSpPr>
+        <p:spPr>
+          <a:xfrm>
+            <a:off x="612648" y="2798064"/>
+            <a:ext cx="640080" cy="256032"/>
+          </a:xfrm>
+          <a:prstGeom prst="rect">
+            <a:avLst/>
+          </a:prstGeom>
+          <a:noFill/>
+        </p:spPr>
+        <p:txBody>
+          <a:bodyPr wrap="square" lIns="0" rIns="0" tIns="0" bIns="0" anchor="t">
+            <a:spAutoFit/>
+          </a:bodyPr>
+          <a:lstStyle/>
+          <a:p>
+            <a:pPr algn="r"/>
+            <a:r>
+              <a:rPr sz="850" b="0" i="0">
+                <a:solidFill>
+                  <a:srgbClr val="9FB5C9"/>
+                </a:solidFill>
+                <a:latin typeface="Consolas"/>
+              </a:rPr>
+              <a:t>10^4×</a:t>
+            </a:r>
+          </a:p>
+        </p:txBody>
+      </p:sp>
+      <p:cxnSp>
+        <p:nvCxnSpPr>
+          <p:cNvPr id="41" name="Connector 40"/>
+          <p:cNvCxnSpPr/>
+          <p:nvPr/>
+        </p:nvCxnSpPr>
+        <p:spPr>
+          <a:xfrm>
+            <a:off x="1325880" y="2331720"/>
+            <a:ext cx="6812280" cy="0"/>
+          </a:xfrm>
+          <a:prstGeom prst="line">
+            <a:avLst/>
+          </a:prstGeom>
+          <a:ln w="5080">
+            <a:solidFill>
+              <a:srgbClr val="244466"/>
+            </a:solidFill>
+          </a:ln>
+        </p:spPr>
+        <p:style>
+          <a:lnRef idx="2">
+            <a:schemeClr val="accent1"/>
+          </a:lnRef>
+          <a:fillRef idx="0">
+            <a:schemeClr val="accent1"/>
+          </a:fillRef>
+          <a:effectRef idx="1">
+            <a:schemeClr val="accent1"/>
+          </a:effectRef>
+          <a:fontRef idx="minor">
+            <a:schemeClr val="tx1"/>
+          </a:fontRef>
+        </p:style>
+      </p:cxnSp>
+      <p:sp>
+        <p:nvSpPr>
+          <p:cNvPr id="42" name="TextBox 41"/>
+          <p:cNvSpPr txBox="1"/>
+          <p:nvPr/>
+        </p:nvSpPr>
+        <p:spPr>
+          <a:xfrm>
+            <a:off x="612648" y="2212848"/>
+            <a:ext cx="640080" cy="256032"/>
+          </a:xfrm>
+          <a:prstGeom prst="rect">
+            <a:avLst/>
+          </a:prstGeom>
+          <a:noFill/>
+        </p:spPr>
+        <p:txBody>
+          <a:bodyPr wrap="square" lIns="0" rIns="0" tIns="0" bIns="0" anchor="t">
+            <a:spAutoFit/>
+          </a:bodyPr>
+          <a:lstStyle/>
+          <a:p>
+            <a:pPr algn="r"/>
+            <a:r>
+              <a:rPr sz="850" b="0" i="0">
+                <a:solidFill>
+                  <a:srgbClr val="9FB5C9"/>
+                </a:solidFill>
+                <a:latin typeface="Consolas"/>
+              </a:rPr>
+              <a:t>10^5×</a:t>
+            </a:r>
+          </a:p>
+        </p:txBody>
+      </p:sp>
+      <p:sp>
+        <p:nvSpPr>
+          <p:cNvPr id="43" name="TextBox 42"/>
+          <p:cNvSpPr txBox="1"/>
+          <p:nvPr/>
+        </p:nvSpPr>
+        <p:spPr>
+          <a:xfrm>
+            <a:off x="548640" y="1984248"/>
+            <a:ext cx="2377440" cy="274320"/>
+          </a:xfrm>
+          <a:prstGeom prst="rect">
+            <a:avLst/>
+          </a:prstGeom>
+          <a:noFill/>
+        </p:spPr>
+        <p:txBody>
+          <a:bodyPr wrap="square" lIns="0" rIns="0" tIns="0" bIns="0" anchor="t">
+            <a:spAutoFit/>
+          </a:bodyPr>
+          <a:lstStyle/>
+          <a:p>
+            <a:pPr algn="l"/>
+            <a:r>
+              <a:rPr sz="900" b="1" i="0">
+                <a:solidFill>
+                  <a:srgbClr val="9FB5C9"/>
+                </a:solidFill>
+                <a:latin typeface="Consolas"/>
+              </a:rPr>
+              <a:t>log10(× baseline)</a:t>
+            </a:r>
+          </a:p>
+        </p:txBody>
+      </p:sp>
+      <p:sp>
+        <p:nvSpPr>
+          <p:cNvPr id="44" name="TextBox 43"/>
+          <p:cNvSpPr txBox="1"/>
+          <p:nvPr/>
+        </p:nvSpPr>
+        <p:spPr>
+          <a:xfrm>
+            <a:off x="7223760" y="5586984"/>
+            <a:ext cx="914400" cy="274320"/>
+          </a:xfrm>
+          <a:prstGeom prst="rect">
+            <a:avLst/>
+          </a:prstGeom>
+          <a:noFill/>
+        </p:spPr>
+        <p:txBody>
+          <a:bodyPr wrap="square" lIns="0" rIns="0" tIns="0" bIns="0" anchor="t">
+            <a:spAutoFit/>
+          </a:bodyPr>
+          <a:lstStyle/>
+          <a:p>
+            <a:pPr algn="r"/>
+            <a:r>
+              <a:rPr sz="900" b="1" i="0">
+                <a:solidFill>
+                  <a:srgbClr val="9FB5C9"/>
+                </a:solidFill>
+                <a:latin typeface="Consolas"/>
+              </a:rPr>
+              <a:t>year</a:t>
+            </a:r>
+          </a:p>
+        </p:txBody>
+      </p:sp>
+      <p:cxnSp>
+        <p:nvCxnSpPr>
+          <p:cNvPr id="45" name="Connector 44"/>
+          <p:cNvCxnSpPr/>
+          <p:nvPr/>
+        </p:nvCxnSpPr>
+        <p:spPr>
+          <a:xfrm flipV="1">
+            <a:off x="2082800" y="4608211"/>
+            <a:ext cx="756920" cy="649589"/>
+          </a:xfrm>
+          <a:prstGeom prst="line">
+            <a:avLst/>
+          </a:prstGeom>
+          <a:ln w="31750">
+            <a:solidFill>
+              <a:srgbClr val="38D1B8"/>
             </a:solidFill>
           </a:ln>
         </p:spPr>
@@ -60971,21 +62083,21 @@
       </p:cxnSp>
       <p:cxnSp>
         <p:nvCxnSpPr>
-          <p:cNvPr id="14" name="Connector 13"/>
+          <p:cNvPr id="46" name="Connector 45"/>
           <p:cNvCxnSpPr/>
           <p:nvPr/>
         </p:nvCxnSpPr>
         <p:spPr>
-          <a:xfrm>
-            <a:off x="1051560" y="2354580"/>
-            <a:ext cx="10378440" cy="0"/>
+          <a:xfrm flipV="1">
+            <a:off x="2839720" y="3402666"/>
+            <a:ext cx="756920" cy="1205545"/>
           </a:xfrm>
           <a:prstGeom prst="line">
             <a:avLst/>
           </a:prstGeom>
-          <a:ln w="5080">
+          <a:ln w="31750">
             <a:solidFill>
-              <a:srgbClr val="244466"/>
+              <a:srgbClr val="38D1B8"/>
             </a:solidFill>
           </a:ln>
         </p:spPr>
@@ -61006,89 +62118,19 @@
       </p:cxnSp>
       <p:cxnSp>
         <p:nvCxnSpPr>
-          <p:cNvPr id="15" name="Connector 14"/>
+          <p:cNvPr id="47" name="Connector 46"/>
           <p:cNvCxnSpPr/>
           <p:nvPr/>
         </p:nvCxnSpPr>
         <p:spPr>
-          <a:xfrm>
-            <a:off x="1051560" y="2343150"/>
-            <a:ext cx="10378440" cy="0"/>
+          <a:xfrm flipV="1">
+            <a:off x="3596640" y="3115910"/>
+            <a:ext cx="1513840" cy="286756"/>
           </a:xfrm>
           <a:prstGeom prst="line">
             <a:avLst/>
           </a:prstGeom>
-          <a:ln w="5080">
-            <a:solidFill>
-              <a:srgbClr val="244466"/>
-            </a:solidFill>
-          </a:ln>
-        </p:spPr>
-        <p:style>
-          <a:lnRef idx="2">
-            <a:schemeClr val="accent1"/>
-          </a:lnRef>
-          <a:fillRef idx="0">
-            <a:schemeClr val="accent1"/>
-          </a:fillRef>
-          <a:effectRef idx="1">
-            <a:schemeClr val="accent1"/>
-          </a:effectRef>
-          <a:fontRef idx="minor">
-            <a:schemeClr val="tx1"/>
-          </a:fontRef>
-        </p:style>
-      </p:cxnSp>
-      <p:sp>
-        <p:nvSpPr>
-          <p:cNvPr id="16" name="TextBox 15"/>
-          <p:cNvSpPr txBox="1"/>
-          <p:nvPr/>
-        </p:nvSpPr>
-        <p:spPr>
-          <a:xfrm>
-            <a:off x="594360" y="2286000"/>
-            <a:ext cx="2286000" cy="228600"/>
-          </a:xfrm>
-          <a:prstGeom prst="rect">
-            <a:avLst/>
-          </a:prstGeom>
-          <a:noFill/>
-        </p:spPr>
-        <p:txBody>
-          <a:bodyPr wrap="square" lIns="0" rIns="0" tIns="0" bIns="0" anchor="t">
-            <a:spAutoFit/>
-          </a:bodyPr>
-          <a:lstStyle/>
-          <a:p>
-            <a:pPr algn="l"/>
-            <a:r>
-              <a:rPr sz="800" b="0" i="0">
-                <a:solidFill>
-                  <a:srgbClr val="9FB5C9"/>
-                </a:solidFill>
-                <a:latin typeface="Consolas"/>
-              </a:rPr>
-              <a:t>params (log)</a:t>
-            </a:r>
-          </a:p>
-        </p:txBody>
-      </p:sp>
-      <p:cxnSp>
-        <p:nvCxnSpPr>
-          <p:cNvPr id="17" name="Connector 16"/>
-          <p:cNvCxnSpPr/>
-          <p:nvPr/>
-        </p:nvCxnSpPr>
-        <p:spPr>
-          <a:xfrm flipV="1">
-            <a:off x="1051560" y="2372868"/>
-            <a:ext cx="1482634" cy="2744"/>
-          </a:xfrm>
-          <a:prstGeom prst="line">
-            <a:avLst/>
-          </a:prstGeom>
-          <a:ln w="25400">
+          <a:ln w="31750">
             <a:solidFill>
               <a:srgbClr val="38D1B8"/>
             </a:solidFill>
@@ -61111,19 +62153,19 @@
       </p:cxnSp>
       <p:cxnSp>
         <p:nvCxnSpPr>
-          <p:cNvPr id="18" name="Connector 17"/>
+          <p:cNvPr id="48" name="Connector 47"/>
           <p:cNvCxnSpPr/>
           <p:nvPr/>
         </p:nvCxnSpPr>
         <p:spPr>
           <a:xfrm flipV="1">
-            <a:off x="2534194" y="2362810"/>
-            <a:ext cx="1482634" cy="10058"/>
+            <a:off x="5110480" y="2823302"/>
+            <a:ext cx="756920" cy="292608"/>
           </a:xfrm>
           <a:prstGeom prst="line">
             <a:avLst/>
           </a:prstGeom>
-          <a:ln w="25400">
+          <a:ln w="31750">
             <a:solidFill>
               <a:srgbClr val="38D1B8"/>
             </a:solidFill>
@@ -61146,19 +62188,19 @@
       </p:cxnSp>
       <p:cxnSp>
         <p:nvCxnSpPr>
-          <p:cNvPr id="19" name="Connector 18"/>
+          <p:cNvPr id="49" name="Connector 48"/>
           <p:cNvCxnSpPr/>
           <p:nvPr/>
         </p:nvCxnSpPr>
         <p:spPr>
-          <a:xfrm flipV="1">
-            <a:off x="4016828" y="2358238"/>
-            <a:ext cx="1482634" cy="4572"/>
+          <a:xfrm>
+            <a:off x="5867400" y="2823302"/>
+            <a:ext cx="756920" cy="234086"/>
           </a:xfrm>
           <a:prstGeom prst="line">
             <a:avLst/>
           </a:prstGeom>
-          <a:ln w="25400">
+          <a:ln w="31750">
             <a:solidFill>
               <a:srgbClr val="38D1B8"/>
             </a:solidFill>
@@ -61181,19 +62223,19 @@
       </p:cxnSp>
       <p:cxnSp>
         <p:nvCxnSpPr>
-          <p:cNvPr id="20" name="Connector 19"/>
+          <p:cNvPr id="50" name="Connector 49"/>
           <p:cNvCxnSpPr/>
           <p:nvPr/>
         </p:nvCxnSpPr>
         <p:spPr>
           <a:xfrm flipV="1">
-            <a:off x="5499462" y="2349094"/>
-            <a:ext cx="1482635" cy="9144"/>
+            <a:off x="6624320" y="2782337"/>
+            <a:ext cx="756920" cy="275051"/>
           </a:xfrm>
           <a:prstGeom prst="line">
             <a:avLst/>
           </a:prstGeom>
-          <a:ln w="25400">
+          <a:ln w="31750">
             <a:solidFill>
               <a:srgbClr val="38D1B8"/>
             </a:solidFill>
@@ -61214,121 +62256,16 @@
           </a:fontRef>
         </p:style>
       </p:cxnSp>
-      <p:cxnSp>
-        <p:nvCxnSpPr>
-          <p:cNvPr id="21" name="Connector 20"/>
-          <p:cNvCxnSpPr/>
-          <p:nvPr/>
-        </p:nvCxnSpPr>
-        <p:spPr>
-          <a:xfrm>
-            <a:off x="6982097" y="2349094"/>
-            <a:ext cx="1482634" cy="3200"/>
-          </a:xfrm>
-          <a:prstGeom prst="line">
-            <a:avLst/>
-          </a:prstGeom>
-          <a:ln w="25400">
-            <a:solidFill>
-              <a:srgbClr val="38D1B8"/>
-            </a:solidFill>
-          </a:ln>
-        </p:spPr>
-        <p:style>
-          <a:lnRef idx="2">
-            <a:schemeClr val="accent1"/>
-          </a:lnRef>
-          <a:fillRef idx="0">
-            <a:schemeClr val="accent1"/>
-          </a:fillRef>
-          <a:effectRef idx="1">
-            <a:schemeClr val="accent1"/>
-          </a:effectRef>
-          <a:fontRef idx="minor">
-            <a:schemeClr val="tx1"/>
-          </a:fontRef>
-        </p:style>
-      </p:cxnSp>
-      <p:cxnSp>
-        <p:nvCxnSpPr>
-          <p:cNvPr id="22" name="Connector 21"/>
-          <p:cNvCxnSpPr/>
-          <p:nvPr/>
-        </p:nvCxnSpPr>
-        <p:spPr>
-          <a:xfrm flipV="1">
-            <a:off x="8464731" y="2344522"/>
-            <a:ext cx="1482634" cy="7772"/>
-          </a:xfrm>
-          <a:prstGeom prst="line">
-            <a:avLst/>
-          </a:prstGeom>
-          <a:ln w="25400">
-            <a:solidFill>
-              <a:srgbClr val="38D1B8"/>
-            </a:solidFill>
-          </a:ln>
-        </p:spPr>
-        <p:style>
-          <a:lnRef idx="2">
-            <a:schemeClr val="accent1"/>
-          </a:lnRef>
-          <a:fillRef idx="0">
-            <a:schemeClr val="accent1"/>
-          </a:fillRef>
-          <a:effectRef idx="1">
-            <a:schemeClr val="accent1"/>
-          </a:effectRef>
-          <a:fontRef idx="minor">
-            <a:schemeClr val="tx1"/>
-          </a:fontRef>
-        </p:style>
-      </p:cxnSp>
-      <p:cxnSp>
-        <p:nvCxnSpPr>
-          <p:cNvPr id="23" name="Connector 22"/>
-          <p:cNvCxnSpPr/>
-          <p:nvPr/>
-        </p:nvCxnSpPr>
-        <p:spPr>
-          <a:xfrm flipV="1">
-            <a:off x="9947365" y="2338578"/>
-            <a:ext cx="1482635" cy="5944"/>
-          </a:xfrm>
-          <a:prstGeom prst="line">
-            <a:avLst/>
-          </a:prstGeom>
-          <a:ln w="25400">
-            <a:solidFill>
-              <a:srgbClr val="38D1B8"/>
-            </a:solidFill>
-          </a:ln>
-        </p:spPr>
-        <p:style>
-          <a:lnRef idx="2">
-            <a:schemeClr val="accent1"/>
-          </a:lnRef>
-          <a:fillRef idx="0">
-            <a:schemeClr val="accent1"/>
-          </a:fillRef>
-          <a:effectRef idx="1">
-            <a:schemeClr val="accent1"/>
-          </a:effectRef>
-          <a:fontRef idx="minor">
-            <a:schemeClr val="tx1"/>
-          </a:fontRef>
-        </p:style>
-      </p:cxnSp>
-      <p:sp>
-        <p:nvSpPr>
-          <p:cNvPr id="24" name="Oval 23"/>
+      <p:sp>
+        <p:nvSpPr>
+          <p:cNvPr id="51" name="Oval 50"/>
           <p:cNvSpPr/>
           <p:nvPr/>
         </p:nvSpPr>
         <p:spPr>
           <a:xfrm>
-            <a:off x="996696" y="2320748"/>
-            <a:ext cx="109728" cy="109728"/>
+            <a:off x="2014220" y="5189220"/>
+            <a:ext cx="137160" cy="137160"/>
           </a:xfrm>
           <a:prstGeom prst="ellipse">
             <a:avLst/>
@@ -61364,85 +62301,14 @@
       </p:sp>
       <p:sp>
         <p:nvSpPr>
-          <p:cNvPr id="25" name="TextBox 24"/>
-          <p:cNvSpPr txBox="1"/>
-          <p:nvPr/>
-        </p:nvSpPr>
-        <p:spPr>
-          <a:xfrm>
-            <a:off x="411480" y="1991564"/>
-            <a:ext cx="1280160" cy="228600"/>
-          </a:xfrm>
-          <a:prstGeom prst="rect">
-            <a:avLst/>
-          </a:prstGeom>
-          <a:noFill/>
-        </p:spPr>
-        <p:txBody>
-          <a:bodyPr wrap="square" lIns="0" rIns="0" tIns="0" bIns="0" anchor="t">
-            <a:spAutoFit/>
-          </a:bodyPr>
-          <a:lstStyle/>
-          <a:p>
-            <a:pPr algn="ctr"/>
-            <a:r>
-              <a:rPr sz="850" b="1" i="0">
-                <a:solidFill>
-                  <a:srgbClr val="EAF2FA"/>
-                </a:solidFill>
-                <a:latin typeface="Consolas"/>
-              </a:rPr>
-              <a:t>117M</a:t>
-            </a:r>
-          </a:p>
-        </p:txBody>
-      </p:sp>
-      <p:sp>
-        <p:nvSpPr>
-          <p:cNvPr id="26" name="TextBox 25"/>
-          <p:cNvSpPr txBox="1"/>
-          <p:nvPr/>
-        </p:nvSpPr>
-        <p:spPr>
-          <a:xfrm>
-            <a:off x="594360" y="2423160"/>
-            <a:ext cx="914400" cy="365760"/>
-          </a:xfrm>
-          <a:prstGeom prst="rect">
-            <a:avLst/>
-          </a:prstGeom>
-          <a:noFill/>
-        </p:spPr>
-        <p:txBody>
-          <a:bodyPr wrap="square" lIns="0" rIns="0" tIns="0" bIns="0" anchor="t">
-            <a:spAutoFit/>
-          </a:bodyPr>
-          <a:lstStyle/>
-          <a:p>
-            <a:pPr algn="ctr"/>
-            <a:r>
-              <a:rPr sz="900" b="0" i="0">
-                <a:solidFill>
-                  <a:srgbClr val="9FB5C9"/>
-                </a:solidFill>
-                <a:latin typeface="Consolas"/>
-              </a:rPr>
-              <a:t>2018
-GPT-1</a:t>
-            </a:r>
-          </a:p>
-        </p:txBody>
-      </p:sp>
-      <p:sp>
-        <p:nvSpPr>
-          <p:cNvPr id="27" name="Oval 26"/>
+          <p:cNvPr id="52" name="Oval 51"/>
           <p:cNvSpPr/>
           <p:nvPr/>
         </p:nvSpPr>
         <p:spPr>
           <a:xfrm>
-            <a:off x="2479330" y="2318004"/>
-            <a:ext cx="109728" cy="109728"/>
+            <a:off x="2771140" y="4539631"/>
+            <a:ext cx="137160" cy="137160"/>
           </a:xfrm>
           <a:prstGeom prst="ellipse">
             <a:avLst/>
@@ -61478,85 +62344,14 @@
       </p:sp>
       <p:sp>
         <p:nvSpPr>
-          <p:cNvPr id="28" name="TextBox 27"/>
-          <p:cNvSpPr txBox="1"/>
-          <p:nvPr/>
-        </p:nvSpPr>
-        <p:spPr>
-          <a:xfrm>
-            <a:off x="1894114" y="1988820"/>
-            <a:ext cx="1280160" cy="228600"/>
-          </a:xfrm>
-          <a:prstGeom prst="rect">
-            <a:avLst/>
-          </a:prstGeom>
-          <a:noFill/>
-        </p:spPr>
-        <p:txBody>
-          <a:bodyPr wrap="square" lIns="0" rIns="0" tIns="0" bIns="0" anchor="t">
-            <a:spAutoFit/>
-          </a:bodyPr>
-          <a:lstStyle/>
-          <a:p>
-            <a:pPr algn="ctr"/>
-            <a:r>
-              <a:rPr sz="850" b="1" i="0">
-                <a:solidFill>
-                  <a:srgbClr val="EAF2FA"/>
-                </a:solidFill>
-                <a:latin typeface="Consolas"/>
-              </a:rPr>
-              <a:t>1.5B</a:t>
-            </a:r>
-          </a:p>
-        </p:txBody>
-      </p:sp>
-      <p:sp>
-        <p:nvSpPr>
-          <p:cNvPr id="29" name="TextBox 28"/>
-          <p:cNvSpPr txBox="1"/>
-          <p:nvPr/>
-        </p:nvSpPr>
-        <p:spPr>
-          <a:xfrm>
-            <a:off x="2076994" y="2423160"/>
-            <a:ext cx="914400" cy="365760"/>
-          </a:xfrm>
-          <a:prstGeom prst="rect">
-            <a:avLst/>
-          </a:prstGeom>
-          <a:noFill/>
-        </p:spPr>
-        <p:txBody>
-          <a:bodyPr wrap="square" lIns="0" rIns="0" tIns="0" bIns="0" anchor="t">
-            <a:spAutoFit/>
-          </a:bodyPr>
-          <a:lstStyle/>
-          <a:p>
-            <a:pPr algn="ctr"/>
-            <a:r>
-              <a:rPr sz="900" b="0" i="0">
-                <a:solidFill>
-                  <a:srgbClr val="9FB5C9"/>
-                </a:solidFill>
-                <a:latin typeface="Consolas"/>
-              </a:rPr>
-              <a:t>2019
-GPT-2</a:t>
-            </a:r>
-          </a:p>
-        </p:txBody>
-      </p:sp>
-      <p:sp>
-        <p:nvSpPr>
-          <p:cNvPr id="30" name="Oval 29"/>
+          <p:cNvPr id="53" name="Oval 52"/>
           <p:cNvSpPr/>
           <p:nvPr/>
         </p:nvSpPr>
         <p:spPr>
           <a:xfrm>
-            <a:off x="3961964" y="2307946"/>
-            <a:ext cx="109728" cy="109728"/>
+            <a:off x="3528060" y="3334086"/>
+            <a:ext cx="137160" cy="137160"/>
           </a:xfrm>
           <a:prstGeom prst="ellipse">
             <a:avLst/>
@@ -61592,85 +62387,14 @@
       </p:sp>
       <p:sp>
         <p:nvSpPr>
-          <p:cNvPr id="31" name="TextBox 30"/>
-          <p:cNvSpPr txBox="1"/>
-          <p:nvPr/>
-        </p:nvSpPr>
-        <p:spPr>
-          <a:xfrm>
-            <a:off x="3376748" y="1978762"/>
-            <a:ext cx="1280160" cy="228600"/>
-          </a:xfrm>
-          <a:prstGeom prst="rect">
-            <a:avLst/>
-          </a:prstGeom>
-          <a:noFill/>
-        </p:spPr>
-        <p:txBody>
-          <a:bodyPr wrap="square" lIns="0" rIns="0" tIns="0" bIns="0" anchor="t">
-            <a:spAutoFit/>
-          </a:bodyPr>
-          <a:lstStyle/>
-          <a:p>
-            <a:pPr algn="ctr"/>
-            <a:r>
-              <a:rPr sz="850" b="1" i="0">
-                <a:solidFill>
-                  <a:srgbClr val="EAF2FA"/>
-                </a:solidFill>
-                <a:latin typeface="Consolas"/>
-              </a:rPr>
-              <a:t>175B</a:t>
-            </a:r>
-          </a:p>
-        </p:txBody>
-      </p:sp>
-      <p:sp>
-        <p:nvSpPr>
-          <p:cNvPr id="32" name="TextBox 31"/>
-          <p:cNvSpPr txBox="1"/>
-          <p:nvPr/>
-        </p:nvSpPr>
-        <p:spPr>
-          <a:xfrm>
-            <a:off x="3559628" y="2423160"/>
-            <a:ext cx="914400" cy="365760"/>
-          </a:xfrm>
-          <a:prstGeom prst="rect">
-            <a:avLst/>
-          </a:prstGeom>
-          <a:noFill/>
-        </p:spPr>
-        <p:txBody>
-          <a:bodyPr wrap="square" lIns="0" rIns="0" tIns="0" bIns="0" anchor="t">
-            <a:spAutoFit/>
-          </a:bodyPr>
-          <a:lstStyle/>
-          <a:p>
-            <a:pPr algn="ctr"/>
-            <a:r>
-              <a:rPr sz="900" b="0" i="0">
-                <a:solidFill>
-                  <a:srgbClr val="9FB5C9"/>
-                </a:solidFill>
-                <a:latin typeface="Consolas"/>
-              </a:rPr>
-              <a:t>2020
-GPT-3</a:t>
-            </a:r>
-          </a:p>
-        </p:txBody>
-      </p:sp>
-      <p:sp>
-        <p:nvSpPr>
-          <p:cNvPr id="33" name="Oval 32"/>
+          <p:cNvPr id="54" name="Oval 53"/>
           <p:cNvSpPr/>
           <p:nvPr/>
         </p:nvSpPr>
         <p:spPr>
           <a:xfrm>
-            <a:off x="5444598" y="2303374"/>
-            <a:ext cx="109728" cy="109728"/>
+            <a:off x="5041900" y="3047330"/>
+            <a:ext cx="137160" cy="137160"/>
           </a:xfrm>
           <a:prstGeom prst="ellipse">
             <a:avLst/>
@@ -61706,85 +62430,14 @@
       </p:sp>
       <p:sp>
         <p:nvSpPr>
-          <p:cNvPr id="34" name="TextBox 33"/>
-          <p:cNvSpPr txBox="1"/>
-          <p:nvPr/>
-        </p:nvSpPr>
-        <p:spPr>
-          <a:xfrm>
-            <a:off x="4859382" y="1974190"/>
-            <a:ext cx="1280160" cy="228600"/>
-          </a:xfrm>
-          <a:prstGeom prst="rect">
-            <a:avLst/>
-          </a:prstGeom>
-          <a:noFill/>
-        </p:spPr>
-        <p:txBody>
-          <a:bodyPr wrap="square" lIns="0" rIns="0" tIns="0" bIns="0" anchor="t">
-            <a:spAutoFit/>
-          </a:bodyPr>
-          <a:lstStyle/>
-          <a:p>
-            <a:pPr algn="ctr"/>
-            <a:r>
-              <a:rPr sz="850" b="1" i="0">
-                <a:solidFill>
-                  <a:srgbClr val="EAF2FA"/>
-                </a:solidFill>
-                <a:latin typeface="Consolas"/>
-              </a:rPr>
-              <a:t>540B</a:t>
-            </a:r>
-          </a:p>
-        </p:txBody>
-      </p:sp>
-      <p:sp>
-        <p:nvSpPr>
-          <p:cNvPr id="35" name="TextBox 34"/>
-          <p:cNvSpPr txBox="1"/>
-          <p:nvPr/>
-        </p:nvSpPr>
-        <p:spPr>
-          <a:xfrm>
-            <a:off x="5042262" y="2423160"/>
-            <a:ext cx="914400" cy="365760"/>
-          </a:xfrm>
-          <a:prstGeom prst="rect">
-            <a:avLst/>
-          </a:prstGeom>
-          <a:noFill/>
-        </p:spPr>
-        <p:txBody>
-          <a:bodyPr wrap="square" lIns="0" rIns="0" tIns="0" bIns="0" anchor="t">
-            <a:spAutoFit/>
-          </a:bodyPr>
-          <a:lstStyle/>
-          <a:p>
-            <a:pPr algn="ctr"/>
-            <a:r>
-              <a:rPr sz="900" b="0" i="0">
-                <a:solidFill>
-                  <a:srgbClr val="9FB5C9"/>
-                </a:solidFill>
-                <a:latin typeface="Consolas"/>
-              </a:rPr>
-              <a:t>2022
-PaLM</a:t>
-            </a:r>
-          </a:p>
-        </p:txBody>
-      </p:sp>
-      <p:sp>
-        <p:nvSpPr>
-          <p:cNvPr id="36" name="Oval 35"/>
+          <p:cNvPr id="55" name="Oval 54"/>
           <p:cNvSpPr/>
           <p:nvPr/>
         </p:nvSpPr>
         <p:spPr>
           <a:xfrm>
-            <a:off x="6927233" y="2294230"/>
-            <a:ext cx="109728" cy="109728"/>
+            <a:off x="5798820" y="2754722"/>
+            <a:ext cx="137160" cy="137160"/>
           </a:xfrm>
           <a:prstGeom prst="ellipse">
             <a:avLst/>
@@ -61820,85 +62473,14 @@
       </p:sp>
       <p:sp>
         <p:nvSpPr>
-          <p:cNvPr id="37" name="TextBox 36"/>
-          <p:cNvSpPr txBox="1"/>
-          <p:nvPr/>
-        </p:nvSpPr>
-        <p:spPr>
-          <a:xfrm>
-            <a:off x="6342017" y="1965046"/>
-            <a:ext cx="1280160" cy="228600"/>
-          </a:xfrm>
-          <a:prstGeom prst="rect">
-            <a:avLst/>
-          </a:prstGeom>
-          <a:noFill/>
-        </p:spPr>
-        <p:txBody>
-          <a:bodyPr wrap="square" lIns="0" rIns="0" tIns="0" bIns="0" anchor="t">
-            <a:spAutoFit/>
-          </a:bodyPr>
-          <a:lstStyle/>
-          <a:p>
-            <a:pPr algn="ctr"/>
-            <a:r>
-              <a:rPr sz="850" b="1" i="0">
-                <a:solidFill>
-                  <a:srgbClr val="EAF2FA"/>
-                </a:solidFill>
-                <a:latin typeface="Consolas"/>
-              </a:rPr>
-              <a:t>≈1.7T*</a:t>
-            </a:r>
-          </a:p>
-        </p:txBody>
-      </p:sp>
-      <p:sp>
-        <p:nvSpPr>
-          <p:cNvPr id="38" name="TextBox 37"/>
-          <p:cNvSpPr txBox="1"/>
-          <p:nvPr/>
-        </p:nvSpPr>
-        <p:spPr>
-          <a:xfrm>
-            <a:off x="6524897" y="2423160"/>
-            <a:ext cx="914400" cy="365760"/>
-          </a:xfrm>
-          <a:prstGeom prst="rect">
-            <a:avLst/>
-          </a:prstGeom>
-          <a:noFill/>
-        </p:spPr>
-        <p:txBody>
-          <a:bodyPr wrap="square" lIns="0" rIns="0" tIns="0" bIns="0" anchor="t">
-            <a:spAutoFit/>
-          </a:bodyPr>
-          <a:lstStyle/>
-          <a:p>
-            <a:pPr algn="ctr"/>
-            <a:r>
-              <a:rPr sz="900" b="0" i="0">
-                <a:solidFill>
-                  <a:srgbClr val="9FB5C9"/>
-                </a:solidFill>
-                <a:latin typeface="Consolas"/>
-              </a:rPr>
-              <a:t>2023
-GPT-4</a:t>
-            </a:r>
-          </a:p>
-        </p:txBody>
-      </p:sp>
-      <p:sp>
-        <p:nvSpPr>
-          <p:cNvPr id="39" name="Oval 38"/>
+          <p:cNvPr id="56" name="Oval 55"/>
           <p:cNvSpPr/>
           <p:nvPr/>
         </p:nvSpPr>
         <p:spPr>
           <a:xfrm>
-            <a:off x="8409867" y="2297430"/>
-            <a:ext cx="109728" cy="109728"/>
+            <a:off x="6555740" y="2988808"/>
+            <a:ext cx="137160" cy="137160"/>
           </a:xfrm>
           <a:prstGeom prst="ellipse">
             <a:avLst/>
@@ -61934,85 +62516,14 @@
       </p:sp>
       <p:sp>
         <p:nvSpPr>
-          <p:cNvPr id="40" name="TextBox 39"/>
-          <p:cNvSpPr txBox="1"/>
-          <p:nvPr/>
-        </p:nvSpPr>
-        <p:spPr>
-          <a:xfrm>
-            <a:off x="7824651" y="1968246"/>
-            <a:ext cx="1280160" cy="228600"/>
-          </a:xfrm>
-          <a:prstGeom prst="rect">
-            <a:avLst/>
-          </a:prstGeom>
-          <a:noFill/>
-        </p:spPr>
-        <p:txBody>
-          <a:bodyPr wrap="square" lIns="0" rIns="0" tIns="0" bIns="0" anchor="t">
-            <a:spAutoFit/>
-          </a:bodyPr>
-          <a:lstStyle/>
-          <a:p>
-            <a:pPr algn="ctr"/>
-            <a:r>
-              <a:rPr sz="850" b="1" i="0">
-                <a:solidFill>
-                  <a:srgbClr val="EAF2FA"/>
-                </a:solidFill>
-                <a:latin typeface="Consolas"/>
-              </a:rPr>
-              <a:t>405B</a:t>
-            </a:r>
-          </a:p>
-        </p:txBody>
-      </p:sp>
-      <p:sp>
-        <p:nvSpPr>
-          <p:cNvPr id="41" name="TextBox 40"/>
-          <p:cNvSpPr txBox="1"/>
-          <p:nvPr/>
-        </p:nvSpPr>
-        <p:spPr>
-          <a:xfrm>
-            <a:off x="8007531" y="2423160"/>
-            <a:ext cx="914400" cy="365760"/>
-          </a:xfrm>
-          <a:prstGeom prst="rect">
-            <a:avLst/>
-          </a:prstGeom>
-          <a:noFill/>
-        </p:spPr>
-        <p:txBody>
-          <a:bodyPr wrap="square" lIns="0" rIns="0" tIns="0" bIns="0" anchor="t">
-            <a:spAutoFit/>
-          </a:bodyPr>
-          <a:lstStyle/>
-          <a:p>
-            <a:pPr algn="ctr"/>
-            <a:r>
-              <a:rPr sz="900" b="0" i="0">
-                <a:solidFill>
-                  <a:srgbClr val="9FB5C9"/>
-                </a:solidFill>
-                <a:latin typeface="Consolas"/>
-              </a:rPr>
-              <a:t>2024
-LLaMA-3 405B</a:t>
-            </a:r>
-          </a:p>
-        </p:txBody>
-      </p:sp>
-      <p:sp>
-        <p:nvSpPr>
-          <p:cNvPr id="42" name="Oval 41"/>
+          <p:cNvPr id="57" name="Oval 56"/>
           <p:cNvSpPr/>
           <p:nvPr/>
         </p:nvSpPr>
         <p:spPr>
           <a:xfrm>
-            <a:off x="9892501" y="2289658"/>
-            <a:ext cx="109728" cy="109728"/>
+            <a:off x="7312660" y="2713757"/>
+            <a:ext cx="137160" cy="137160"/>
           </a:xfrm>
           <a:prstGeom prst="ellipse">
             <a:avLst/>
@@ -62046,561 +62557,6 @@
           </a:p>
         </p:txBody>
       </p:sp>
-      <p:sp>
-        <p:nvSpPr>
-          <p:cNvPr id="43" name="TextBox 42"/>
-          <p:cNvSpPr txBox="1"/>
-          <p:nvPr/>
-        </p:nvSpPr>
-        <p:spPr>
-          <a:xfrm>
-            <a:off x="9307285" y="1960474"/>
-            <a:ext cx="1280160" cy="228600"/>
-          </a:xfrm>
-          <a:prstGeom prst="rect">
-            <a:avLst/>
-          </a:prstGeom>
-          <a:noFill/>
-        </p:spPr>
-        <p:txBody>
-          <a:bodyPr wrap="square" lIns="0" rIns="0" tIns="0" bIns="0" anchor="t">
-            <a:spAutoFit/>
-          </a:bodyPr>
-          <a:lstStyle/>
-          <a:p>
-            <a:pPr algn="ctr"/>
-            <a:r>
-              <a:rPr sz="850" b="1" i="0">
-                <a:solidFill>
-                  <a:srgbClr val="EAF2FA"/>
-                </a:solidFill>
-                <a:latin typeface="Consolas"/>
-              </a:rPr>
-              <a:t>671B-A37B</a:t>
-            </a:r>
-          </a:p>
-        </p:txBody>
-      </p:sp>
-      <p:sp>
-        <p:nvSpPr>
-          <p:cNvPr id="44" name="TextBox 43"/>
-          <p:cNvSpPr txBox="1"/>
-          <p:nvPr/>
-        </p:nvSpPr>
-        <p:spPr>
-          <a:xfrm>
-            <a:off x="9490165" y="2423160"/>
-            <a:ext cx="914400" cy="365760"/>
-          </a:xfrm>
-          <a:prstGeom prst="rect">
-            <a:avLst/>
-          </a:prstGeom>
-          <a:noFill/>
-        </p:spPr>
-        <p:txBody>
-          <a:bodyPr wrap="square" lIns="0" rIns="0" tIns="0" bIns="0" anchor="t">
-            <a:spAutoFit/>
-          </a:bodyPr>
-          <a:lstStyle/>
-          <a:p>
-            <a:pPr algn="ctr"/>
-            <a:r>
-              <a:rPr sz="900" b="0" i="0">
-                <a:solidFill>
-                  <a:srgbClr val="9FB5C9"/>
-                </a:solidFill>
-                <a:latin typeface="Consolas"/>
-              </a:rPr>
-              <a:t>2024
-DeepSeek V3</a:t>
-            </a:r>
-          </a:p>
-        </p:txBody>
-      </p:sp>
-      <p:sp>
-        <p:nvSpPr>
-          <p:cNvPr id="45" name="Oval 44"/>
-          <p:cNvSpPr/>
-          <p:nvPr/>
-        </p:nvSpPr>
-        <p:spPr>
-          <a:xfrm>
-            <a:off x="11375136" y="2283714"/>
-            <a:ext cx="109728" cy="109728"/>
-          </a:xfrm>
-          <a:prstGeom prst="ellipse">
-            <a:avLst/>
-          </a:prstGeom>
-          <a:solidFill>
-            <a:srgbClr val="38D1B8"/>
-          </a:solidFill>
-          <a:ln>
-            <a:noFill/>
-          </a:ln>
-        </p:spPr>
-        <p:style>
-          <a:lnRef idx="1">
-            <a:schemeClr val="accent1"/>
-          </a:lnRef>
-          <a:fillRef idx="3">
-            <a:schemeClr val="accent1"/>
-          </a:fillRef>
-          <a:effectRef idx="2">
-            <a:schemeClr val="accent1"/>
-          </a:effectRef>
-          <a:fontRef idx="minor">
-            <a:schemeClr val="lt1"/>
-          </a:fontRef>
-        </p:style>
-        <p:txBody>
-          <a:bodyPr rtlCol="0" anchor="ctr"/>
-          <a:lstStyle/>
-          <a:p>
-            <a:pPr algn="ctr"/>
-          </a:p>
-        </p:txBody>
-      </p:sp>
-      <p:sp>
-        <p:nvSpPr>
-          <p:cNvPr id="46" name="TextBox 45"/>
-          <p:cNvSpPr txBox="1"/>
-          <p:nvPr/>
-        </p:nvSpPr>
-        <p:spPr>
-          <a:xfrm>
-            <a:off x="10789920" y="1954530"/>
-            <a:ext cx="1280160" cy="228600"/>
-          </a:xfrm>
-          <a:prstGeom prst="rect">
-            <a:avLst/>
-          </a:prstGeom>
-          <a:noFill/>
-        </p:spPr>
-        <p:txBody>
-          <a:bodyPr wrap="square" lIns="0" rIns="0" tIns="0" bIns="0" anchor="t">
-            <a:spAutoFit/>
-          </a:bodyPr>
-          <a:lstStyle/>
-          <a:p>
-            <a:pPr algn="ctr"/>
-            <a:r>
-              <a:rPr sz="850" b="1" i="0">
-                <a:solidFill>
-                  <a:srgbClr val="EAF2FA"/>
-                </a:solidFill>
-                <a:latin typeface="Consolas"/>
-              </a:rPr>
-              <a:t>MoE 2T*</a:t>
-            </a:r>
-          </a:p>
-        </p:txBody>
-      </p:sp>
-      <p:sp>
-        <p:nvSpPr>
-          <p:cNvPr id="47" name="TextBox 46"/>
-          <p:cNvSpPr txBox="1"/>
-          <p:nvPr/>
-        </p:nvSpPr>
-        <p:spPr>
-          <a:xfrm>
-            <a:off x="10972800" y="2423160"/>
-            <a:ext cx="914400" cy="365760"/>
-          </a:xfrm>
-          <a:prstGeom prst="rect">
-            <a:avLst/>
-          </a:prstGeom>
-          <a:noFill/>
-        </p:spPr>
-        <p:txBody>
-          <a:bodyPr wrap="square" lIns="0" rIns="0" tIns="0" bIns="0" anchor="t">
-            <a:spAutoFit/>
-          </a:bodyPr>
-          <a:lstStyle/>
-          <a:p>
-            <a:pPr algn="ctr"/>
-            <a:r>
-              <a:rPr sz="900" b="0" i="0">
-                <a:solidFill>
-                  <a:srgbClr val="9FB5C9"/>
-                </a:solidFill>
-                <a:latin typeface="Consolas"/>
-              </a:rPr>
-              <a:t>2025
-LLaMA-4</a:t>
-            </a:r>
-          </a:p>
-        </p:txBody>
-      </p:sp>
-      <p:sp>
-        <p:nvSpPr>
-          <p:cNvPr id="48" name="TextBox 47"/>
-          <p:cNvSpPr txBox="1"/>
-          <p:nvPr/>
-        </p:nvSpPr>
-        <p:spPr>
-          <a:xfrm>
-            <a:off x="731520" y="2862072"/>
-            <a:ext cx="10744200" cy="329184"/>
-          </a:xfrm>
-          <a:prstGeom prst="rect">
-            <a:avLst/>
-          </a:prstGeom>
-          <a:noFill/>
-        </p:spPr>
-        <p:txBody>
-          <a:bodyPr wrap="square" lIns="0" rIns="0" tIns="0" bIns="0" anchor="t">
-            <a:spAutoFit/>
-          </a:bodyPr>
-          <a:lstStyle/>
-          <a:p>
-            <a:pPr algn="l"/>
-            <a:r>
-              <a:rPr sz="750" b="0" i="1">
-                <a:solidFill>
-                  <a:srgbClr val="6E869F"/>
-                </a:solidFill>
-                <a:latin typeface="Microsoft YaHei"/>
-              </a:rPr>
-              <a:t>Source: 各模型公开 paper / blog（* GPT-4 与 LLaMA-4 为 SemiAnalysis 等公开估算，非官方）</a:t>
-            </a:r>
-          </a:p>
-        </p:txBody>
-      </p:sp>
-      <p:sp>
-        <p:nvSpPr>
-          <p:cNvPr id="49" name="Rounded Rectangle 48"/>
-          <p:cNvSpPr/>
-          <p:nvPr/>
-        </p:nvSpPr>
-        <p:spPr>
-          <a:xfrm>
-            <a:off x="548640" y="3355848"/>
-            <a:ext cx="11109960" cy="1417320"/>
-          </a:xfrm>
-          <a:prstGeom prst="roundRect">
-            <a:avLst>
-              <a:gd name="adj" fmla="val 6000"/>
-            </a:avLst>
-          </a:prstGeom>
-          <a:solidFill>
-            <a:srgbClr val="0E2136"/>
-          </a:solidFill>
-          <a:ln w="9525">
-            <a:solidFill>
-              <a:srgbClr val="244466"/>
-            </a:solidFill>
-          </a:ln>
-        </p:spPr>
-        <p:style>
-          <a:lnRef idx="1">
-            <a:schemeClr val="accent1"/>
-          </a:lnRef>
-          <a:fillRef idx="3">
-            <a:schemeClr val="accent1"/>
-          </a:fillRef>
-          <a:effectRef idx="2">
-            <a:schemeClr val="accent1"/>
-          </a:effectRef>
-          <a:fontRef idx="minor">
-            <a:schemeClr val="lt1"/>
-          </a:fontRef>
-        </p:style>
-        <p:txBody>
-          <a:bodyPr rtlCol="0" anchor="ctr"/>
-          <a:lstStyle/>
-          <a:p>
-            <a:pPr algn="ctr"/>
-          </a:p>
-        </p:txBody>
-      </p:sp>
-      <p:sp>
-        <p:nvSpPr>
-          <p:cNvPr id="50" name="Rectangle 49"/>
-          <p:cNvSpPr/>
-          <p:nvPr/>
-        </p:nvSpPr>
-        <p:spPr>
-          <a:xfrm>
-            <a:off x="548640" y="3355848"/>
-            <a:ext cx="11109960" cy="54864"/>
-          </a:xfrm>
-          <a:prstGeom prst="rect">
-            <a:avLst/>
-          </a:prstGeom>
-          <a:solidFill>
-            <a:srgbClr val="EF6E6E"/>
-          </a:solidFill>
-          <a:ln>
-            <a:noFill/>
-          </a:ln>
-        </p:spPr>
-        <p:style>
-          <a:lnRef idx="1">
-            <a:schemeClr val="accent1"/>
-          </a:lnRef>
-          <a:fillRef idx="3">
-            <a:schemeClr val="accent1"/>
-          </a:fillRef>
-          <a:effectRef idx="2">
-            <a:schemeClr val="accent1"/>
-          </a:effectRef>
-          <a:fontRef idx="minor">
-            <a:schemeClr val="lt1"/>
-          </a:fontRef>
-        </p:style>
-        <p:txBody>
-          <a:bodyPr rtlCol="0" anchor="ctr"/>
-          <a:lstStyle/>
-          <a:p>
-            <a:pPr algn="ctr"/>
-          </a:p>
-        </p:txBody>
-      </p:sp>
-      <p:sp>
-        <p:nvSpPr>
-          <p:cNvPr id="51" name="TextBox 50"/>
-          <p:cNvSpPr txBox="1"/>
-          <p:nvPr/>
-        </p:nvSpPr>
-        <p:spPr>
-          <a:xfrm>
-            <a:off x="731520" y="3465576"/>
-            <a:ext cx="10744200" cy="292608"/>
-          </a:xfrm>
-          <a:prstGeom prst="rect">
-            <a:avLst/>
-          </a:prstGeom>
-          <a:noFill/>
-        </p:spPr>
-        <p:txBody>
-          <a:bodyPr wrap="square" lIns="0" rIns="0" tIns="0" bIns="0" anchor="t">
-            <a:spAutoFit/>
-          </a:bodyPr>
-          <a:lstStyle/>
-          <a:p>
-            <a:pPr algn="l"/>
-            <a:r>
-              <a:rPr sz="1200" b="1" i="0">
-                <a:solidFill>
-                  <a:srgbClr val="EF6E6E"/>
-                </a:solidFill>
-                <a:latin typeface="Consolas"/>
-              </a:rPr>
-              <a:t>② NVIDIA 数据中心 GPU 代际 · BF16 算力</a:t>
-            </a:r>
-          </a:p>
-        </p:txBody>
-      </p:sp>
-      <p:cxnSp>
-        <p:nvCxnSpPr>
-          <p:cNvPr id="52" name="Connector 51"/>
-          <p:cNvCxnSpPr/>
-          <p:nvPr/>
-        </p:nvCxnSpPr>
-        <p:spPr>
-          <a:xfrm>
-            <a:off x="1051560" y="3904488"/>
-            <a:ext cx="10378440" cy="0"/>
-          </a:xfrm>
-          <a:prstGeom prst="line">
-            <a:avLst/>
-          </a:prstGeom>
-          <a:ln w="12700">
-            <a:solidFill>
-              <a:srgbClr val="9FB5C9"/>
-            </a:solidFill>
-          </a:ln>
-        </p:spPr>
-        <p:style>
-          <a:lnRef idx="2">
-            <a:schemeClr val="accent1"/>
-          </a:lnRef>
-          <a:fillRef idx="0">
-            <a:schemeClr val="accent1"/>
-          </a:fillRef>
-          <a:effectRef idx="1">
-            <a:schemeClr val="accent1"/>
-          </a:effectRef>
-          <a:fontRef idx="minor">
-            <a:schemeClr val="tx1"/>
-          </a:fontRef>
-        </p:style>
-      </p:cxnSp>
-      <p:cxnSp>
-        <p:nvCxnSpPr>
-          <p:cNvPr id="53" name="Connector 52"/>
-          <p:cNvCxnSpPr/>
-          <p:nvPr/>
-        </p:nvCxnSpPr>
-        <p:spPr>
-          <a:xfrm>
-            <a:off x="1051560" y="3858768"/>
-            <a:ext cx="0" cy="45720"/>
-          </a:xfrm>
-          <a:prstGeom prst="line">
-            <a:avLst/>
-          </a:prstGeom>
-          <a:ln w="10160">
-            <a:solidFill>
-              <a:srgbClr val="9FB5C9"/>
-            </a:solidFill>
-          </a:ln>
-        </p:spPr>
-        <p:style>
-          <a:lnRef idx="2">
-            <a:schemeClr val="accent1"/>
-          </a:lnRef>
-          <a:fillRef idx="0">
-            <a:schemeClr val="accent1"/>
-          </a:fillRef>
-          <a:effectRef idx="1">
-            <a:schemeClr val="accent1"/>
-          </a:effectRef>
-          <a:fontRef idx="minor">
-            <a:schemeClr val="tx1"/>
-          </a:fontRef>
-        </p:style>
-      </p:cxnSp>
-      <p:cxnSp>
-        <p:nvCxnSpPr>
-          <p:cNvPr id="54" name="Connector 53"/>
-          <p:cNvCxnSpPr/>
-          <p:nvPr/>
-        </p:nvCxnSpPr>
-        <p:spPr>
-          <a:xfrm>
-            <a:off x="1051560" y="3893058"/>
-            <a:ext cx="10378440" cy="0"/>
-          </a:xfrm>
-          <a:prstGeom prst="line">
-            <a:avLst/>
-          </a:prstGeom>
-          <a:ln w="5080">
-            <a:solidFill>
-              <a:srgbClr val="244466"/>
-            </a:solidFill>
-          </a:ln>
-        </p:spPr>
-        <p:style>
-          <a:lnRef idx="2">
-            <a:schemeClr val="accent1"/>
-          </a:lnRef>
-          <a:fillRef idx="0">
-            <a:schemeClr val="accent1"/>
-          </a:fillRef>
-          <a:effectRef idx="1">
-            <a:schemeClr val="accent1"/>
-          </a:effectRef>
-          <a:fontRef idx="minor">
-            <a:schemeClr val="tx1"/>
-          </a:fontRef>
-        </p:style>
-      </p:cxnSp>
-      <p:cxnSp>
-        <p:nvCxnSpPr>
-          <p:cNvPr id="55" name="Connector 54"/>
-          <p:cNvCxnSpPr/>
-          <p:nvPr/>
-        </p:nvCxnSpPr>
-        <p:spPr>
-          <a:xfrm>
-            <a:off x="1051560" y="3881628"/>
-            <a:ext cx="10378440" cy="0"/>
-          </a:xfrm>
-          <a:prstGeom prst="line">
-            <a:avLst/>
-          </a:prstGeom>
-          <a:ln w="5080">
-            <a:solidFill>
-              <a:srgbClr val="244466"/>
-            </a:solidFill>
-          </a:ln>
-        </p:spPr>
-        <p:style>
-          <a:lnRef idx="2">
-            <a:schemeClr val="accent1"/>
-          </a:lnRef>
-          <a:fillRef idx="0">
-            <a:schemeClr val="accent1"/>
-          </a:fillRef>
-          <a:effectRef idx="1">
-            <a:schemeClr val="accent1"/>
-          </a:effectRef>
-          <a:fontRef idx="minor">
-            <a:schemeClr val="tx1"/>
-          </a:fontRef>
-        </p:style>
-      </p:cxnSp>
-      <p:cxnSp>
-        <p:nvCxnSpPr>
-          <p:cNvPr id="56" name="Connector 55"/>
-          <p:cNvCxnSpPr/>
-          <p:nvPr/>
-        </p:nvCxnSpPr>
-        <p:spPr>
-          <a:xfrm>
-            <a:off x="1051560" y="3870198"/>
-            <a:ext cx="10378440" cy="0"/>
-          </a:xfrm>
-          <a:prstGeom prst="line">
-            <a:avLst/>
-          </a:prstGeom>
-          <a:ln w="5080">
-            <a:solidFill>
-              <a:srgbClr val="244466"/>
-            </a:solidFill>
-          </a:ln>
-        </p:spPr>
-        <p:style>
-          <a:lnRef idx="2">
-            <a:schemeClr val="accent1"/>
-          </a:lnRef>
-          <a:fillRef idx="0">
-            <a:schemeClr val="accent1"/>
-          </a:fillRef>
-          <a:effectRef idx="1">
-            <a:schemeClr val="accent1"/>
-          </a:effectRef>
-          <a:fontRef idx="minor">
-            <a:schemeClr val="tx1"/>
-          </a:fontRef>
-        </p:style>
-      </p:cxnSp>
-      <p:sp>
-        <p:nvSpPr>
-          <p:cNvPr id="57" name="TextBox 56"/>
-          <p:cNvSpPr txBox="1"/>
-          <p:nvPr/>
-        </p:nvSpPr>
-        <p:spPr>
-          <a:xfrm>
-            <a:off x="594360" y="3813048"/>
-            <a:ext cx="2286000" cy="228600"/>
-          </a:xfrm>
-          <a:prstGeom prst="rect">
-            <a:avLst/>
-          </a:prstGeom>
-          <a:noFill/>
-        </p:spPr>
-        <p:txBody>
-          <a:bodyPr wrap="square" lIns="0" rIns="0" tIns="0" bIns="0" anchor="t">
-            <a:spAutoFit/>
-          </a:bodyPr>
-          <a:lstStyle/>
-          <a:p>
-            <a:pPr algn="l"/>
-            <a:r>
-              <a:rPr sz="800" b="0" i="0">
-                <a:solidFill>
-                  <a:srgbClr val="9FB5C9"/>
-                </a:solidFill>
-                <a:latin typeface="Consolas"/>
-              </a:rPr>
-              <a:t>TF (BF16, log)</a:t>
-            </a:r>
-          </a:p>
-        </p:txBody>
-      </p:sp>
       <p:cxnSp>
         <p:nvCxnSpPr>
           <p:cNvPr id="58" name="Connector 57"/>
@@ -62609,13 +62565,13 @@
         </p:nvCxnSpPr>
         <p:spPr>
           <a:xfrm flipV="1">
-            <a:off x="1051560" y="3895344"/>
-            <a:ext cx="1729740" cy="5487"/>
+            <a:off x="1325880" y="5023714"/>
+            <a:ext cx="2270760" cy="234086"/>
           </a:xfrm>
           <a:prstGeom prst="line">
             <a:avLst/>
           </a:prstGeom>
-          <a:ln w="25400">
+          <a:ln w="31750">
             <a:solidFill>
               <a:srgbClr val="EF6E6E"/>
             </a:solidFill>
@@ -62644,13 +62600,13 @@
         </p:nvCxnSpPr>
         <p:spPr>
           <a:xfrm flipV="1">
-            <a:off x="2781300" y="3883914"/>
-            <a:ext cx="1729740" cy="11430"/>
+            <a:off x="3596640" y="4731106"/>
+            <a:ext cx="1513840" cy="292608"/>
           </a:xfrm>
           <a:prstGeom prst="line">
             <a:avLst/>
           </a:prstGeom>
-          <a:ln w="25400">
+          <a:ln w="31750">
             <a:solidFill>
               <a:srgbClr val="EF6E6E"/>
             </a:solidFill>
@@ -62678,14 +62634,14 @@
           <p:nvPr/>
         </p:nvCxnSpPr>
         <p:spPr>
-          <a:xfrm>
-            <a:off x="4511040" y="3883914"/>
-            <a:ext cx="1729740" cy="0"/>
+          <a:xfrm flipV="1">
+            <a:off x="5110480" y="4578950"/>
+            <a:ext cx="1513840" cy="152156"/>
           </a:xfrm>
           <a:prstGeom prst="line">
             <a:avLst/>
           </a:prstGeom>
-          <a:ln w="25400">
+          <a:ln w="31750">
             <a:solidFill>
               <a:srgbClr val="EF6E6E"/>
             </a:solidFill>
@@ -62714,13 +62670,13 @@
         </p:nvCxnSpPr>
         <p:spPr>
           <a:xfrm flipV="1">
-            <a:off x="6240780" y="3870198"/>
-            <a:ext cx="1729740" cy="13716"/>
+            <a:off x="6624320" y="4520428"/>
+            <a:ext cx="756920" cy="58522"/>
           </a:xfrm>
           <a:prstGeom prst="line">
             <a:avLst/>
           </a:prstGeom>
-          <a:ln w="25400">
+          <a:ln w="31750">
             <a:solidFill>
               <a:srgbClr val="EF6E6E"/>
             </a:solidFill>
@@ -62749,15 +62705,308 @@
         </p:nvCxnSpPr>
         <p:spPr>
           <a:xfrm flipV="1">
-            <a:off x="7970520" y="3862426"/>
-            <a:ext cx="1729740" cy="7772"/>
+            <a:off x="7381240" y="4497020"/>
+            <a:ext cx="756920" cy="23408"/>
           </a:xfrm>
           <a:prstGeom prst="line">
             <a:avLst/>
           </a:prstGeom>
-          <a:ln w="25400">
+          <a:ln w="31750">
             <a:solidFill>
               <a:srgbClr val="EF6E6E"/>
+            </a:solidFill>
+          </a:ln>
+        </p:spPr>
+        <p:style>
+          <a:lnRef idx="2">
+            <a:schemeClr val="accent1"/>
+          </a:lnRef>
+          <a:fillRef idx="0">
+            <a:schemeClr val="accent1"/>
+          </a:fillRef>
+          <a:effectRef idx="1">
+            <a:schemeClr val="accent1"/>
+          </a:effectRef>
+          <a:fontRef idx="minor">
+            <a:schemeClr val="tx1"/>
+          </a:fontRef>
+        </p:style>
+      </p:cxnSp>
+      <p:sp>
+        <p:nvSpPr>
+          <p:cNvPr id="63" name="Oval 62"/>
+          <p:cNvSpPr/>
+          <p:nvPr/>
+        </p:nvSpPr>
+        <p:spPr>
+          <a:xfrm>
+            <a:off x="1257300" y="5189220"/>
+            <a:ext cx="137160" cy="137160"/>
+          </a:xfrm>
+          <a:prstGeom prst="ellipse">
+            <a:avLst/>
+          </a:prstGeom>
+          <a:solidFill>
+            <a:srgbClr val="EF6E6E"/>
+          </a:solidFill>
+          <a:ln>
+            <a:noFill/>
+          </a:ln>
+        </p:spPr>
+        <p:style>
+          <a:lnRef idx="1">
+            <a:schemeClr val="accent1"/>
+          </a:lnRef>
+          <a:fillRef idx="3">
+            <a:schemeClr val="accent1"/>
+          </a:fillRef>
+          <a:effectRef idx="2">
+            <a:schemeClr val="accent1"/>
+          </a:effectRef>
+          <a:fontRef idx="minor">
+            <a:schemeClr val="lt1"/>
+          </a:fontRef>
+        </p:style>
+        <p:txBody>
+          <a:bodyPr rtlCol="0" anchor="ctr"/>
+          <a:lstStyle/>
+          <a:p>
+            <a:pPr algn="ctr"/>
+          </a:p>
+        </p:txBody>
+      </p:sp>
+      <p:sp>
+        <p:nvSpPr>
+          <p:cNvPr id="64" name="Oval 63"/>
+          <p:cNvSpPr/>
+          <p:nvPr/>
+        </p:nvSpPr>
+        <p:spPr>
+          <a:xfrm>
+            <a:off x="3528060" y="4955134"/>
+            <a:ext cx="137160" cy="137160"/>
+          </a:xfrm>
+          <a:prstGeom prst="ellipse">
+            <a:avLst/>
+          </a:prstGeom>
+          <a:solidFill>
+            <a:srgbClr val="EF6E6E"/>
+          </a:solidFill>
+          <a:ln>
+            <a:noFill/>
+          </a:ln>
+        </p:spPr>
+        <p:style>
+          <a:lnRef idx="1">
+            <a:schemeClr val="accent1"/>
+          </a:lnRef>
+          <a:fillRef idx="3">
+            <a:schemeClr val="accent1"/>
+          </a:fillRef>
+          <a:effectRef idx="2">
+            <a:schemeClr val="accent1"/>
+          </a:effectRef>
+          <a:fontRef idx="minor">
+            <a:schemeClr val="lt1"/>
+          </a:fontRef>
+        </p:style>
+        <p:txBody>
+          <a:bodyPr rtlCol="0" anchor="ctr"/>
+          <a:lstStyle/>
+          <a:p>
+            <a:pPr algn="ctr"/>
+          </a:p>
+        </p:txBody>
+      </p:sp>
+      <p:sp>
+        <p:nvSpPr>
+          <p:cNvPr id="65" name="Oval 64"/>
+          <p:cNvSpPr/>
+          <p:nvPr/>
+        </p:nvSpPr>
+        <p:spPr>
+          <a:xfrm>
+            <a:off x="5041900" y="4662526"/>
+            <a:ext cx="137160" cy="137160"/>
+          </a:xfrm>
+          <a:prstGeom prst="ellipse">
+            <a:avLst/>
+          </a:prstGeom>
+          <a:solidFill>
+            <a:srgbClr val="EF6E6E"/>
+          </a:solidFill>
+          <a:ln>
+            <a:noFill/>
+          </a:ln>
+        </p:spPr>
+        <p:style>
+          <a:lnRef idx="1">
+            <a:schemeClr val="accent1"/>
+          </a:lnRef>
+          <a:fillRef idx="3">
+            <a:schemeClr val="accent1"/>
+          </a:fillRef>
+          <a:effectRef idx="2">
+            <a:schemeClr val="accent1"/>
+          </a:effectRef>
+          <a:fontRef idx="minor">
+            <a:schemeClr val="lt1"/>
+          </a:fontRef>
+        </p:style>
+        <p:txBody>
+          <a:bodyPr rtlCol="0" anchor="ctr"/>
+          <a:lstStyle/>
+          <a:p>
+            <a:pPr algn="ctr"/>
+          </a:p>
+        </p:txBody>
+      </p:sp>
+      <p:sp>
+        <p:nvSpPr>
+          <p:cNvPr id="66" name="Oval 65"/>
+          <p:cNvSpPr/>
+          <p:nvPr/>
+        </p:nvSpPr>
+        <p:spPr>
+          <a:xfrm>
+            <a:off x="6555740" y="4510370"/>
+            <a:ext cx="137160" cy="137160"/>
+          </a:xfrm>
+          <a:prstGeom prst="ellipse">
+            <a:avLst/>
+          </a:prstGeom>
+          <a:solidFill>
+            <a:srgbClr val="EF6E6E"/>
+          </a:solidFill>
+          <a:ln>
+            <a:noFill/>
+          </a:ln>
+        </p:spPr>
+        <p:style>
+          <a:lnRef idx="1">
+            <a:schemeClr val="accent1"/>
+          </a:lnRef>
+          <a:fillRef idx="3">
+            <a:schemeClr val="accent1"/>
+          </a:fillRef>
+          <a:effectRef idx="2">
+            <a:schemeClr val="accent1"/>
+          </a:effectRef>
+          <a:fontRef idx="minor">
+            <a:schemeClr val="lt1"/>
+          </a:fontRef>
+        </p:style>
+        <p:txBody>
+          <a:bodyPr rtlCol="0" anchor="ctr"/>
+          <a:lstStyle/>
+          <a:p>
+            <a:pPr algn="ctr"/>
+          </a:p>
+        </p:txBody>
+      </p:sp>
+      <p:sp>
+        <p:nvSpPr>
+          <p:cNvPr id="67" name="Oval 66"/>
+          <p:cNvSpPr/>
+          <p:nvPr/>
+        </p:nvSpPr>
+        <p:spPr>
+          <a:xfrm>
+            <a:off x="7312660" y="4451848"/>
+            <a:ext cx="137160" cy="137160"/>
+          </a:xfrm>
+          <a:prstGeom prst="ellipse">
+            <a:avLst/>
+          </a:prstGeom>
+          <a:solidFill>
+            <a:srgbClr val="EF6E6E"/>
+          </a:solidFill>
+          <a:ln>
+            <a:noFill/>
+          </a:ln>
+        </p:spPr>
+        <p:style>
+          <a:lnRef idx="1">
+            <a:schemeClr val="accent1"/>
+          </a:lnRef>
+          <a:fillRef idx="3">
+            <a:schemeClr val="accent1"/>
+          </a:fillRef>
+          <a:effectRef idx="2">
+            <a:schemeClr val="accent1"/>
+          </a:effectRef>
+          <a:fontRef idx="minor">
+            <a:schemeClr val="lt1"/>
+          </a:fontRef>
+        </p:style>
+        <p:txBody>
+          <a:bodyPr rtlCol="0" anchor="ctr"/>
+          <a:lstStyle/>
+          <a:p>
+            <a:pPr algn="ctr"/>
+          </a:p>
+        </p:txBody>
+      </p:sp>
+      <p:sp>
+        <p:nvSpPr>
+          <p:cNvPr id="68" name="Oval 67"/>
+          <p:cNvSpPr/>
+          <p:nvPr/>
+        </p:nvSpPr>
+        <p:spPr>
+          <a:xfrm>
+            <a:off x="8069580" y="4428440"/>
+            <a:ext cx="137160" cy="137160"/>
+          </a:xfrm>
+          <a:prstGeom prst="ellipse">
+            <a:avLst/>
+          </a:prstGeom>
+          <a:solidFill>
+            <a:srgbClr val="EF6E6E"/>
+          </a:solidFill>
+          <a:ln>
+            <a:noFill/>
+          </a:ln>
+        </p:spPr>
+        <p:style>
+          <a:lnRef idx="1">
+            <a:schemeClr val="accent1"/>
+          </a:lnRef>
+          <a:fillRef idx="3">
+            <a:schemeClr val="accent1"/>
+          </a:fillRef>
+          <a:effectRef idx="2">
+            <a:schemeClr val="accent1"/>
+          </a:effectRef>
+          <a:fontRef idx="minor">
+            <a:schemeClr val="lt1"/>
+          </a:fontRef>
+        </p:style>
+        <p:txBody>
+          <a:bodyPr rtlCol="0" anchor="ctr"/>
+          <a:lstStyle/>
+          <a:p>
+            <a:pPr algn="ctr"/>
+          </a:p>
+        </p:txBody>
+      </p:sp>
+      <p:cxnSp>
+        <p:nvCxnSpPr>
+          <p:cNvPr id="69" name="Connector 68"/>
+          <p:cNvCxnSpPr/>
+          <p:nvPr/>
+        </p:nvCxnSpPr>
+        <p:spPr>
+          <a:xfrm flipV="1">
+            <a:off x="2082800" y="5047123"/>
+            <a:ext cx="1513840" cy="210677"/>
+          </a:xfrm>
+          <a:prstGeom prst="line">
+            <a:avLst/>
+          </a:prstGeom>
+          <a:ln w="31750">
+            <a:solidFill>
+              <a:srgbClr val="F2C55C"/>
             </a:solidFill>
           </a:ln>
         </p:spPr>
@@ -62778,1014 +63027,21 @@
       </p:cxnSp>
       <p:cxnSp>
         <p:nvCxnSpPr>
-          <p:cNvPr id="63" name="Connector 62"/>
+          <p:cNvPr id="70" name="Connector 69"/>
           <p:cNvCxnSpPr/>
           <p:nvPr/>
         </p:nvCxnSpPr>
         <p:spPr>
           <a:xfrm flipV="1">
-            <a:off x="9700260" y="3859683"/>
-            <a:ext cx="1729740" cy="2743"/>
+            <a:off x="3596640" y="4965192"/>
+            <a:ext cx="1513840" cy="81931"/>
           </a:xfrm>
           <a:prstGeom prst="line">
             <a:avLst/>
           </a:prstGeom>
-          <a:ln w="25400">
+          <a:ln w="31750">
             <a:solidFill>
-              <a:srgbClr val="EF6E6E"/>
-            </a:solidFill>
-          </a:ln>
-        </p:spPr>
-        <p:style>
-          <a:lnRef idx="2">
-            <a:schemeClr val="accent1"/>
-          </a:lnRef>
-          <a:fillRef idx="0">
-            <a:schemeClr val="accent1"/>
-          </a:fillRef>
-          <a:effectRef idx="1">
-            <a:schemeClr val="accent1"/>
-          </a:effectRef>
-          <a:fontRef idx="minor">
-            <a:schemeClr val="tx1"/>
-          </a:fontRef>
-        </p:style>
-      </p:cxnSp>
-      <p:sp>
-        <p:nvSpPr>
-          <p:cNvPr id="64" name="Oval 63"/>
-          <p:cNvSpPr/>
-          <p:nvPr/>
-        </p:nvSpPr>
-        <p:spPr>
-          <a:xfrm>
-            <a:off x="996696" y="3845967"/>
-            <a:ext cx="109728" cy="109728"/>
-          </a:xfrm>
-          <a:prstGeom prst="ellipse">
-            <a:avLst/>
-          </a:prstGeom>
-          <a:solidFill>
-            <a:srgbClr val="EF6E6E"/>
-          </a:solidFill>
-          <a:ln>
-            <a:noFill/>
-          </a:ln>
-        </p:spPr>
-        <p:style>
-          <a:lnRef idx="1">
-            <a:schemeClr val="accent1"/>
-          </a:lnRef>
-          <a:fillRef idx="3">
-            <a:schemeClr val="accent1"/>
-          </a:fillRef>
-          <a:effectRef idx="2">
-            <a:schemeClr val="accent1"/>
-          </a:effectRef>
-          <a:fontRef idx="minor">
-            <a:schemeClr val="lt1"/>
-          </a:fontRef>
-        </p:style>
-        <p:txBody>
-          <a:bodyPr rtlCol="0" anchor="ctr"/>
-          <a:lstStyle/>
-          <a:p>
-            <a:pPr algn="ctr"/>
-          </a:p>
-        </p:txBody>
-      </p:sp>
-      <p:sp>
-        <p:nvSpPr>
-          <p:cNvPr id="65" name="TextBox 64"/>
-          <p:cNvSpPr txBox="1"/>
-          <p:nvPr/>
-        </p:nvSpPr>
-        <p:spPr>
-          <a:xfrm>
-            <a:off x="411480" y="3516783"/>
-            <a:ext cx="1280160" cy="228600"/>
-          </a:xfrm>
-          <a:prstGeom prst="rect">
-            <a:avLst/>
-          </a:prstGeom>
-          <a:noFill/>
-        </p:spPr>
-        <p:txBody>
-          <a:bodyPr wrap="square" lIns="0" rIns="0" tIns="0" bIns="0" anchor="t">
-            <a:spAutoFit/>
-          </a:bodyPr>
-          <a:lstStyle/>
-          <a:p>
-            <a:pPr algn="ctr"/>
-            <a:r>
-              <a:rPr sz="850" b="1" i="0">
-                <a:solidFill>
-                  <a:srgbClr val="EAF2FA"/>
-                </a:solidFill>
-                <a:latin typeface="Consolas"/>
-              </a:rPr>
-              <a:t>125 TF</a:t>
-            </a:r>
-          </a:p>
-        </p:txBody>
-      </p:sp>
-      <p:sp>
-        <p:nvSpPr>
-          <p:cNvPr id="66" name="TextBox 65"/>
-          <p:cNvSpPr txBox="1"/>
-          <p:nvPr/>
-        </p:nvSpPr>
-        <p:spPr>
-          <a:xfrm>
-            <a:off x="594360" y="3950208"/>
-            <a:ext cx="914400" cy="365760"/>
-          </a:xfrm>
-          <a:prstGeom prst="rect">
-            <a:avLst/>
-          </a:prstGeom>
-          <a:noFill/>
-        </p:spPr>
-        <p:txBody>
-          <a:bodyPr wrap="square" lIns="0" rIns="0" tIns="0" bIns="0" anchor="t">
-            <a:spAutoFit/>
-          </a:bodyPr>
-          <a:lstStyle/>
-          <a:p>
-            <a:pPr algn="ctr"/>
-            <a:r>
-              <a:rPr sz="900" b="0" i="0">
-                <a:solidFill>
-                  <a:srgbClr val="9FB5C9"/>
-                </a:solidFill>
-                <a:latin typeface="Consolas"/>
-              </a:rPr>
-              <a:t>2017
-V100</a:t>
-            </a:r>
-          </a:p>
-        </p:txBody>
-      </p:sp>
-      <p:sp>
-        <p:nvSpPr>
-          <p:cNvPr id="67" name="Oval 66"/>
-          <p:cNvSpPr/>
-          <p:nvPr/>
-        </p:nvSpPr>
-        <p:spPr>
-          <a:xfrm>
-            <a:off x="2726436" y="3840480"/>
-            <a:ext cx="109728" cy="109728"/>
-          </a:xfrm>
-          <a:prstGeom prst="ellipse">
-            <a:avLst/>
-          </a:prstGeom>
-          <a:solidFill>
-            <a:srgbClr val="EF6E6E"/>
-          </a:solidFill>
-          <a:ln>
-            <a:noFill/>
-          </a:ln>
-        </p:spPr>
-        <p:style>
-          <a:lnRef idx="1">
-            <a:schemeClr val="accent1"/>
-          </a:lnRef>
-          <a:fillRef idx="3">
-            <a:schemeClr val="accent1"/>
-          </a:fillRef>
-          <a:effectRef idx="2">
-            <a:schemeClr val="accent1"/>
-          </a:effectRef>
-          <a:fontRef idx="minor">
-            <a:schemeClr val="lt1"/>
-          </a:fontRef>
-        </p:style>
-        <p:txBody>
-          <a:bodyPr rtlCol="0" anchor="ctr"/>
-          <a:lstStyle/>
-          <a:p>
-            <a:pPr algn="ctr"/>
-          </a:p>
-        </p:txBody>
-      </p:sp>
-      <p:sp>
-        <p:nvSpPr>
-          <p:cNvPr id="68" name="TextBox 67"/>
-          <p:cNvSpPr txBox="1"/>
-          <p:nvPr/>
-        </p:nvSpPr>
-        <p:spPr>
-          <a:xfrm>
-            <a:off x="2141220" y="3511296"/>
-            <a:ext cx="1280160" cy="228600"/>
-          </a:xfrm>
-          <a:prstGeom prst="rect">
-            <a:avLst/>
-          </a:prstGeom>
-          <a:noFill/>
-        </p:spPr>
-        <p:txBody>
-          <a:bodyPr wrap="square" lIns="0" rIns="0" tIns="0" bIns="0" anchor="t">
-            <a:spAutoFit/>
-          </a:bodyPr>
-          <a:lstStyle/>
-          <a:p>
-            <a:pPr algn="ctr"/>
-            <a:r>
-              <a:rPr sz="850" b="1" i="0">
-                <a:solidFill>
-                  <a:srgbClr val="EAF2FA"/>
-                </a:solidFill>
-                <a:latin typeface="Consolas"/>
-              </a:rPr>
-              <a:t>312 TF</a:t>
-            </a:r>
-          </a:p>
-        </p:txBody>
-      </p:sp>
-      <p:sp>
-        <p:nvSpPr>
-          <p:cNvPr id="69" name="TextBox 68"/>
-          <p:cNvSpPr txBox="1"/>
-          <p:nvPr/>
-        </p:nvSpPr>
-        <p:spPr>
-          <a:xfrm>
-            <a:off x="2324100" y="3950208"/>
-            <a:ext cx="914400" cy="365760"/>
-          </a:xfrm>
-          <a:prstGeom prst="rect">
-            <a:avLst/>
-          </a:prstGeom>
-          <a:noFill/>
-        </p:spPr>
-        <p:txBody>
-          <a:bodyPr wrap="square" lIns="0" rIns="0" tIns="0" bIns="0" anchor="t">
-            <a:spAutoFit/>
-          </a:bodyPr>
-          <a:lstStyle/>
-          <a:p>
-            <a:pPr algn="ctr"/>
-            <a:r>
-              <a:rPr sz="900" b="0" i="0">
-                <a:solidFill>
-                  <a:srgbClr val="9FB5C9"/>
-                </a:solidFill>
-                <a:latin typeface="Consolas"/>
-              </a:rPr>
-              <a:t>2020
-A100</a:t>
-            </a:r>
-          </a:p>
-        </p:txBody>
-      </p:sp>
-      <p:sp>
-        <p:nvSpPr>
-          <p:cNvPr id="70" name="Oval 69"/>
-          <p:cNvSpPr/>
-          <p:nvPr/>
-        </p:nvSpPr>
-        <p:spPr>
-          <a:xfrm>
-            <a:off x="4456176" y="3829050"/>
-            <a:ext cx="109728" cy="109728"/>
-          </a:xfrm>
-          <a:prstGeom prst="ellipse">
-            <a:avLst/>
-          </a:prstGeom>
-          <a:solidFill>
-            <a:srgbClr val="EF6E6E"/>
-          </a:solidFill>
-          <a:ln>
-            <a:noFill/>
-          </a:ln>
-        </p:spPr>
-        <p:style>
-          <a:lnRef idx="1">
-            <a:schemeClr val="accent1"/>
-          </a:lnRef>
-          <a:fillRef idx="3">
-            <a:schemeClr val="accent1"/>
-          </a:fillRef>
-          <a:effectRef idx="2">
-            <a:schemeClr val="accent1"/>
-          </a:effectRef>
-          <a:fontRef idx="minor">
-            <a:schemeClr val="lt1"/>
-          </a:fontRef>
-        </p:style>
-        <p:txBody>
-          <a:bodyPr rtlCol="0" anchor="ctr"/>
-          <a:lstStyle/>
-          <a:p>
-            <a:pPr algn="ctr"/>
-          </a:p>
-        </p:txBody>
-      </p:sp>
-      <p:sp>
-        <p:nvSpPr>
-          <p:cNvPr id="71" name="TextBox 70"/>
-          <p:cNvSpPr txBox="1"/>
-          <p:nvPr/>
-        </p:nvSpPr>
-        <p:spPr>
-          <a:xfrm>
-            <a:off x="3870960" y="3499866"/>
-            <a:ext cx="1280160" cy="228600"/>
-          </a:xfrm>
-          <a:prstGeom prst="rect">
-            <a:avLst/>
-          </a:prstGeom>
-          <a:noFill/>
-        </p:spPr>
-        <p:txBody>
-          <a:bodyPr wrap="square" lIns="0" rIns="0" tIns="0" bIns="0" anchor="t">
-            <a:spAutoFit/>
-          </a:bodyPr>
-          <a:lstStyle/>
-          <a:p>
-            <a:pPr algn="ctr"/>
-            <a:r>
-              <a:rPr sz="850" b="1" i="0">
-                <a:solidFill>
-                  <a:srgbClr val="EAF2FA"/>
-                </a:solidFill>
-                <a:latin typeface="Consolas"/>
-              </a:rPr>
-              <a:t>989 TF</a:t>
-            </a:r>
-          </a:p>
-        </p:txBody>
-      </p:sp>
-      <p:sp>
-        <p:nvSpPr>
-          <p:cNvPr id="72" name="TextBox 71"/>
-          <p:cNvSpPr txBox="1"/>
-          <p:nvPr/>
-        </p:nvSpPr>
-        <p:spPr>
-          <a:xfrm>
-            <a:off x="4053840" y="3950208"/>
-            <a:ext cx="914400" cy="365760"/>
-          </a:xfrm>
-          <a:prstGeom prst="rect">
-            <a:avLst/>
-          </a:prstGeom>
-          <a:noFill/>
-        </p:spPr>
-        <p:txBody>
-          <a:bodyPr wrap="square" lIns="0" rIns="0" tIns="0" bIns="0" anchor="t">
-            <a:spAutoFit/>
-          </a:bodyPr>
-          <a:lstStyle/>
-          <a:p>
-            <a:pPr algn="ctr"/>
-            <a:r>
-              <a:rPr sz="900" b="0" i="0">
-                <a:solidFill>
-                  <a:srgbClr val="9FB5C9"/>
-                </a:solidFill>
-                <a:latin typeface="Consolas"/>
-              </a:rPr>
-              <a:t>2022
-H100</a:t>
-            </a:r>
-          </a:p>
-        </p:txBody>
-      </p:sp>
-      <p:sp>
-        <p:nvSpPr>
-          <p:cNvPr id="73" name="Oval 72"/>
-          <p:cNvSpPr/>
-          <p:nvPr/>
-        </p:nvSpPr>
-        <p:spPr>
-          <a:xfrm>
-            <a:off x="6185916" y="3829050"/>
-            <a:ext cx="109728" cy="109728"/>
-          </a:xfrm>
-          <a:prstGeom prst="ellipse">
-            <a:avLst/>
-          </a:prstGeom>
-          <a:solidFill>
-            <a:srgbClr val="EF6E6E"/>
-          </a:solidFill>
-          <a:ln>
-            <a:noFill/>
-          </a:ln>
-        </p:spPr>
-        <p:style>
-          <a:lnRef idx="1">
-            <a:schemeClr val="accent1"/>
-          </a:lnRef>
-          <a:fillRef idx="3">
-            <a:schemeClr val="accent1"/>
-          </a:fillRef>
-          <a:effectRef idx="2">
-            <a:schemeClr val="accent1"/>
-          </a:effectRef>
-          <a:fontRef idx="minor">
-            <a:schemeClr val="lt1"/>
-          </a:fontRef>
-        </p:style>
-        <p:txBody>
-          <a:bodyPr rtlCol="0" anchor="ctr"/>
-          <a:lstStyle/>
-          <a:p>
-            <a:pPr algn="ctr"/>
-          </a:p>
-        </p:txBody>
-      </p:sp>
-      <p:sp>
-        <p:nvSpPr>
-          <p:cNvPr id="74" name="TextBox 73"/>
-          <p:cNvSpPr txBox="1"/>
-          <p:nvPr/>
-        </p:nvSpPr>
-        <p:spPr>
-          <a:xfrm>
-            <a:off x="5600700" y="3499866"/>
-            <a:ext cx="1280160" cy="228600"/>
-          </a:xfrm>
-          <a:prstGeom prst="rect">
-            <a:avLst/>
-          </a:prstGeom>
-          <a:noFill/>
-        </p:spPr>
-        <p:txBody>
-          <a:bodyPr wrap="square" lIns="0" rIns="0" tIns="0" bIns="0" anchor="t">
-            <a:spAutoFit/>
-          </a:bodyPr>
-          <a:lstStyle/>
-          <a:p>
-            <a:pPr algn="ctr"/>
-            <a:r>
-              <a:rPr sz="850" b="1" i="0">
-                <a:solidFill>
-                  <a:srgbClr val="EAF2FA"/>
-                </a:solidFill>
-                <a:latin typeface="Consolas"/>
-              </a:rPr>
-              <a:t>989 TF</a:t>
-            </a:r>
-          </a:p>
-        </p:txBody>
-      </p:sp>
-      <p:sp>
-        <p:nvSpPr>
-          <p:cNvPr id="75" name="TextBox 74"/>
-          <p:cNvSpPr txBox="1"/>
-          <p:nvPr/>
-        </p:nvSpPr>
-        <p:spPr>
-          <a:xfrm>
-            <a:off x="5783580" y="3950208"/>
-            <a:ext cx="914400" cy="365760"/>
-          </a:xfrm>
-          <a:prstGeom prst="rect">
-            <a:avLst/>
-          </a:prstGeom>
-          <a:noFill/>
-        </p:spPr>
-        <p:txBody>
-          <a:bodyPr wrap="square" lIns="0" rIns="0" tIns="0" bIns="0" anchor="t">
-            <a:spAutoFit/>
-          </a:bodyPr>
-          <a:lstStyle/>
-          <a:p>
-            <a:pPr algn="ctr"/>
-            <a:r>
-              <a:rPr sz="900" b="0" i="0">
-                <a:solidFill>
-                  <a:srgbClr val="9FB5C9"/>
-                </a:solidFill>
-                <a:latin typeface="Consolas"/>
-              </a:rPr>
-              <a:t>2024
-H200</a:t>
-            </a:r>
-          </a:p>
-        </p:txBody>
-      </p:sp>
-      <p:sp>
-        <p:nvSpPr>
-          <p:cNvPr id="76" name="Oval 75"/>
-          <p:cNvSpPr/>
-          <p:nvPr/>
-        </p:nvSpPr>
-        <p:spPr>
-          <a:xfrm>
-            <a:off x="7915656" y="3815334"/>
-            <a:ext cx="109728" cy="109728"/>
-          </a:xfrm>
-          <a:prstGeom prst="ellipse">
-            <a:avLst/>
-          </a:prstGeom>
-          <a:solidFill>
-            <a:srgbClr val="EF6E6E"/>
-          </a:solidFill>
-          <a:ln>
-            <a:noFill/>
-          </a:ln>
-        </p:spPr>
-        <p:style>
-          <a:lnRef idx="1">
-            <a:schemeClr val="accent1"/>
-          </a:lnRef>
-          <a:fillRef idx="3">
-            <a:schemeClr val="accent1"/>
-          </a:fillRef>
-          <a:effectRef idx="2">
-            <a:schemeClr val="accent1"/>
-          </a:effectRef>
-          <a:fontRef idx="minor">
-            <a:schemeClr val="lt1"/>
-          </a:fontRef>
-        </p:style>
-        <p:txBody>
-          <a:bodyPr rtlCol="0" anchor="ctr"/>
-          <a:lstStyle/>
-          <a:p>
-            <a:pPr algn="ctr"/>
-          </a:p>
-        </p:txBody>
-      </p:sp>
-      <p:sp>
-        <p:nvSpPr>
-          <p:cNvPr id="77" name="TextBox 76"/>
-          <p:cNvSpPr txBox="1"/>
-          <p:nvPr/>
-        </p:nvSpPr>
-        <p:spPr>
-          <a:xfrm>
-            <a:off x="7330440" y="3486150"/>
-            <a:ext cx="1280160" cy="228600"/>
-          </a:xfrm>
-          <a:prstGeom prst="rect">
-            <a:avLst/>
-          </a:prstGeom>
-          <a:noFill/>
-        </p:spPr>
-        <p:txBody>
-          <a:bodyPr wrap="square" lIns="0" rIns="0" tIns="0" bIns="0" anchor="t">
-            <a:spAutoFit/>
-          </a:bodyPr>
-          <a:lstStyle/>
-          <a:p>
-            <a:pPr algn="ctr"/>
-            <a:r>
-              <a:rPr sz="850" b="1" i="0">
-                <a:solidFill>
-                  <a:srgbClr val="EAF2FA"/>
-                </a:solidFill>
-                <a:latin typeface="Consolas"/>
-              </a:rPr>
-              <a:t>1.8 PF</a:t>
-            </a:r>
-          </a:p>
-        </p:txBody>
-      </p:sp>
-      <p:sp>
-        <p:nvSpPr>
-          <p:cNvPr id="78" name="TextBox 77"/>
-          <p:cNvSpPr txBox="1"/>
-          <p:nvPr/>
-        </p:nvSpPr>
-        <p:spPr>
-          <a:xfrm>
-            <a:off x="7513320" y="3950208"/>
-            <a:ext cx="914400" cy="365760"/>
-          </a:xfrm>
-          <a:prstGeom prst="rect">
-            <a:avLst/>
-          </a:prstGeom>
-          <a:noFill/>
-        </p:spPr>
-        <p:txBody>
-          <a:bodyPr wrap="square" lIns="0" rIns="0" tIns="0" bIns="0" anchor="t">
-            <a:spAutoFit/>
-          </a:bodyPr>
-          <a:lstStyle/>
-          <a:p>
-            <a:pPr algn="ctr"/>
-            <a:r>
-              <a:rPr sz="900" b="0" i="0">
-                <a:solidFill>
-                  <a:srgbClr val="9FB5C9"/>
-                </a:solidFill>
-                <a:latin typeface="Consolas"/>
-              </a:rPr>
-              <a:t>2024
-B100</a:t>
-            </a:r>
-          </a:p>
-        </p:txBody>
-      </p:sp>
-      <p:sp>
-        <p:nvSpPr>
-          <p:cNvPr id="79" name="Oval 78"/>
-          <p:cNvSpPr/>
-          <p:nvPr/>
-        </p:nvSpPr>
-        <p:spPr>
-          <a:xfrm>
-            <a:off x="9645396" y="3807562"/>
-            <a:ext cx="109728" cy="109728"/>
-          </a:xfrm>
-          <a:prstGeom prst="ellipse">
-            <a:avLst/>
-          </a:prstGeom>
-          <a:solidFill>
-            <a:srgbClr val="EF6E6E"/>
-          </a:solidFill>
-          <a:ln>
-            <a:noFill/>
-          </a:ln>
-        </p:spPr>
-        <p:style>
-          <a:lnRef idx="1">
-            <a:schemeClr val="accent1"/>
-          </a:lnRef>
-          <a:fillRef idx="3">
-            <a:schemeClr val="accent1"/>
-          </a:fillRef>
-          <a:effectRef idx="2">
-            <a:schemeClr val="accent1"/>
-          </a:effectRef>
-          <a:fontRef idx="minor">
-            <a:schemeClr val="lt1"/>
-          </a:fontRef>
-        </p:style>
-        <p:txBody>
-          <a:bodyPr rtlCol="0" anchor="ctr"/>
-          <a:lstStyle/>
-          <a:p>
-            <a:pPr algn="ctr"/>
-          </a:p>
-        </p:txBody>
-      </p:sp>
-      <p:sp>
-        <p:nvSpPr>
-          <p:cNvPr id="80" name="TextBox 79"/>
-          <p:cNvSpPr txBox="1"/>
-          <p:nvPr/>
-        </p:nvSpPr>
-        <p:spPr>
-          <a:xfrm>
-            <a:off x="9060180" y="3478378"/>
-            <a:ext cx="1280160" cy="228600"/>
-          </a:xfrm>
-          <a:prstGeom prst="rect">
-            <a:avLst/>
-          </a:prstGeom>
-          <a:noFill/>
-        </p:spPr>
-        <p:txBody>
-          <a:bodyPr wrap="square" lIns="0" rIns="0" tIns="0" bIns="0" anchor="t">
-            <a:spAutoFit/>
-          </a:bodyPr>
-          <a:lstStyle/>
-          <a:p>
-            <a:pPr algn="ctr"/>
-            <a:r>
-              <a:rPr sz="850" b="1" i="0">
-                <a:solidFill>
-                  <a:srgbClr val="EAF2FA"/>
-                </a:solidFill>
-                <a:latin typeface="Consolas"/>
-              </a:rPr>
-              <a:t>2.25 PF</a:t>
-            </a:r>
-          </a:p>
-        </p:txBody>
-      </p:sp>
-      <p:sp>
-        <p:nvSpPr>
-          <p:cNvPr id="81" name="TextBox 80"/>
-          <p:cNvSpPr txBox="1"/>
-          <p:nvPr/>
-        </p:nvSpPr>
-        <p:spPr>
-          <a:xfrm>
-            <a:off x="9243060" y="3950208"/>
-            <a:ext cx="914400" cy="365760"/>
-          </a:xfrm>
-          <a:prstGeom prst="rect">
-            <a:avLst/>
-          </a:prstGeom>
-          <a:noFill/>
-        </p:spPr>
-        <p:txBody>
-          <a:bodyPr wrap="square" lIns="0" rIns="0" tIns="0" bIns="0" anchor="t">
-            <a:spAutoFit/>
-          </a:bodyPr>
-          <a:lstStyle/>
-          <a:p>
-            <a:pPr algn="ctr"/>
-            <a:r>
-              <a:rPr sz="900" b="0" i="0">
-                <a:solidFill>
-                  <a:srgbClr val="9FB5C9"/>
-                </a:solidFill>
-                <a:latin typeface="Consolas"/>
-              </a:rPr>
-              <a:t>2025
-B200</a:t>
-            </a:r>
-          </a:p>
-        </p:txBody>
-      </p:sp>
-      <p:sp>
-        <p:nvSpPr>
-          <p:cNvPr id="82" name="Oval 81"/>
-          <p:cNvSpPr/>
-          <p:nvPr/>
-        </p:nvSpPr>
-        <p:spPr>
-          <a:xfrm>
-            <a:off x="11375136" y="3804819"/>
-            <a:ext cx="109728" cy="109728"/>
-          </a:xfrm>
-          <a:prstGeom prst="ellipse">
-            <a:avLst/>
-          </a:prstGeom>
-          <a:solidFill>
-            <a:srgbClr val="EF6E6E"/>
-          </a:solidFill>
-          <a:ln>
-            <a:noFill/>
-          </a:ln>
-        </p:spPr>
-        <p:style>
-          <a:lnRef idx="1">
-            <a:schemeClr val="accent1"/>
-          </a:lnRef>
-          <a:fillRef idx="3">
-            <a:schemeClr val="accent1"/>
-          </a:fillRef>
-          <a:effectRef idx="2">
-            <a:schemeClr val="accent1"/>
-          </a:effectRef>
-          <a:fontRef idx="minor">
-            <a:schemeClr val="lt1"/>
-          </a:fontRef>
-        </p:style>
-        <p:txBody>
-          <a:bodyPr rtlCol="0" anchor="ctr"/>
-          <a:lstStyle/>
-          <a:p>
-            <a:pPr algn="ctr"/>
-          </a:p>
-        </p:txBody>
-      </p:sp>
-      <p:sp>
-        <p:nvSpPr>
-          <p:cNvPr id="83" name="TextBox 82"/>
-          <p:cNvSpPr txBox="1"/>
-          <p:nvPr/>
-        </p:nvSpPr>
-        <p:spPr>
-          <a:xfrm>
-            <a:off x="10789920" y="3475635"/>
-            <a:ext cx="1280160" cy="228600"/>
-          </a:xfrm>
-          <a:prstGeom prst="rect">
-            <a:avLst/>
-          </a:prstGeom>
-          <a:noFill/>
-        </p:spPr>
-        <p:txBody>
-          <a:bodyPr wrap="square" lIns="0" rIns="0" tIns="0" bIns="0" anchor="t">
-            <a:spAutoFit/>
-          </a:bodyPr>
-          <a:lstStyle/>
-          <a:p>
-            <a:pPr algn="ctr"/>
-            <a:r>
-              <a:rPr sz="850" b="1" i="0">
-                <a:solidFill>
-                  <a:srgbClr val="EAF2FA"/>
-                </a:solidFill>
-                <a:latin typeface="Consolas"/>
-              </a:rPr>
-              <a:t>2.5 PF</a:t>
-            </a:r>
-          </a:p>
-        </p:txBody>
-      </p:sp>
-      <p:sp>
-        <p:nvSpPr>
-          <p:cNvPr id="84" name="TextBox 83"/>
-          <p:cNvSpPr txBox="1"/>
-          <p:nvPr/>
-        </p:nvSpPr>
-        <p:spPr>
-          <a:xfrm>
-            <a:off x="10972800" y="3950208"/>
-            <a:ext cx="914400" cy="365760"/>
-          </a:xfrm>
-          <a:prstGeom prst="rect">
-            <a:avLst/>
-          </a:prstGeom>
-          <a:noFill/>
-        </p:spPr>
-        <p:txBody>
-          <a:bodyPr wrap="square" lIns="0" rIns="0" tIns="0" bIns="0" anchor="t">
-            <a:spAutoFit/>
-          </a:bodyPr>
-          <a:lstStyle/>
-          <a:p>
-            <a:pPr algn="ctr"/>
-            <a:r>
-              <a:rPr sz="900" b="0" i="0">
-                <a:solidFill>
-                  <a:srgbClr val="9FB5C9"/>
-                </a:solidFill>
-                <a:latin typeface="Consolas"/>
-              </a:rPr>
-              <a:t>2026+
-GB200</a:t>
-            </a:r>
-          </a:p>
-        </p:txBody>
-      </p:sp>
-      <p:sp>
-        <p:nvSpPr>
-          <p:cNvPr id="85" name="TextBox 84"/>
-          <p:cNvSpPr txBox="1"/>
-          <p:nvPr/>
-        </p:nvSpPr>
-        <p:spPr>
-          <a:xfrm>
-            <a:off x="731520" y="4389120"/>
-            <a:ext cx="10744200" cy="329184"/>
-          </a:xfrm>
-          <a:prstGeom prst="rect">
-            <a:avLst/>
-          </a:prstGeom>
-          <a:noFill/>
-        </p:spPr>
-        <p:txBody>
-          <a:bodyPr wrap="square" lIns="0" rIns="0" tIns="0" bIns="0" anchor="t">
-            <a:spAutoFit/>
-          </a:bodyPr>
-          <a:lstStyle/>
-          <a:p>
-            <a:pPr algn="l"/>
-            <a:r>
-              <a:rPr sz="750" b="0" i="1">
-                <a:solidFill>
-                  <a:srgbClr val="6E869F"/>
-                </a:solidFill>
-                <a:latin typeface="Microsoft YaHei"/>
-              </a:rPr>
-              <a:t>Source: NVIDIA 官方 datasheet（V100/A100/H100/H200/Blackwell）。Ascend 910B/910C 与 AMD MI300X 形成 SIMD/异构平行路径（未画）。</a:t>
-            </a:r>
-          </a:p>
-        </p:txBody>
-      </p:sp>
-      <p:sp>
-        <p:nvSpPr>
-          <p:cNvPr id="86" name="Rounded Rectangle 85"/>
-          <p:cNvSpPr/>
-          <p:nvPr/>
-        </p:nvSpPr>
-        <p:spPr>
-          <a:xfrm>
-            <a:off x="548640" y="4882896"/>
-            <a:ext cx="11109960" cy="1417320"/>
-          </a:xfrm>
-          <a:prstGeom prst="roundRect">
-            <a:avLst>
-              <a:gd name="adj" fmla="val 6000"/>
-            </a:avLst>
-          </a:prstGeom>
-          <a:solidFill>
-            <a:srgbClr val="0E2136"/>
-          </a:solidFill>
-          <a:ln w="9525">
-            <a:solidFill>
-              <a:srgbClr val="244466"/>
-            </a:solidFill>
-          </a:ln>
-        </p:spPr>
-        <p:style>
-          <a:lnRef idx="1">
-            <a:schemeClr val="accent1"/>
-          </a:lnRef>
-          <a:fillRef idx="3">
-            <a:schemeClr val="accent1"/>
-          </a:fillRef>
-          <a:effectRef idx="2">
-            <a:schemeClr val="accent1"/>
-          </a:effectRef>
-          <a:fontRef idx="minor">
-            <a:schemeClr val="lt1"/>
-          </a:fontRef>
-        </p:style>
-        <p:txBody>
-          <a:bodyPr rtlCol="0" anchor="ctr"/>
-          <a:lstStyle/>
-          <a:p>
-            <a:pPr algn="ctr"/>
-          </a:p>
-        </p:txBody>
-      </p:sp>
-      <p:sp>
-        <p:nvSpPr>
-          <p:cNvPr id="87" name="Rectangle 86"/>
-          <p:cNvSpPr/>
-          <p:nvPr/>
-        </p:nvSpPr>
-        <p:spPr>
-          <a:xfrm>
-            <a:off x="548640" y="4882896"/>
-            <a:ext cx="11109960" cy="54864"/>
-          </a:xfrm>
-          <a:prstGeom prst="rect">
-            <a:avLst/>
-          </a:prstGeom>
-          <a:solidFill>
-            <a:srgbClr val="F2C55C"/>
-          </a:solidFill>
-          <a:ln>
-            <a:noFill/>
-          </a:ln>
-        </p:spPr>
-        <p:style>
-          <a:lnRef idx="1">
-            <a:schemeClr val="accent1"/>
-          </a:lnRef>
-          <a:fillRef idx="3">
-            <a:schemeClr val="accent1"/>
-          </a:fillRef>
-          <a:effectRef idx="2">
-            <a:schemeClr val="accent1"/>
-          </a:effectRef>
-          <a:fontRef idx="minor">
-            <a:schemeClr val="lt1"/>
-          </a:fontRef>
-        </p:style>
-        <p:txBody>
-          <a:bodyPr rtlCol="0" anchor="ctr"/>
-          <a:lstStyle/>
-          <a:p>
-            <a:pPr algn="ctr"/>
-          </a:p>
-        </p:txBody>
-      </p:sp>
-      <p:sp>
-        <p:nvSpPr>
-          <p:cNvPr id="88" name="TextBox 87"/>
-          <p:cNvSpPr txBox="1"/>
-          <p:nvPr/>
-        </p:nvSpPr>
-        <p:spPr>
-          <a:xfrm>
-            <a:off x="731520" y="4992624"/>
-            <a:ext cx="10744200" cy="292608"/>
-          </a:xfrm>
-          <a:prstGeom prst="rect">
-            <a:avLst/>
-          </a:prstGeom>
-          <a:noFill/>
-        </p:spPr>
-        <p:txBody>
-          <a:bodyPr wrap="square" lIns="0" rIns="0" tIns="0" bIns="0" anchor="t">
-            <a:spAutoFit/>
-          </a:bodyPr>
-          <a:lstStyle/>
-          <a:p>
-            <a:pPr algn="l"/>
-            <a:r>
-              <a:rPr sz="1200" b="1" i="0">
-                <a:solidFill>
-                  <a:srgbClr val="F2C55C"/>
-                </a:solidFill>
-                <a:latin typeface="Consolas"/>
-              </a:rPr>
-              <a:t>③ 算子复杂度 · PyTorch ATen 算子数 + Attention 变体演进</a:t>
-            </a:r>
-          </a:p>
-        </p:txBody>
-      </p:sp>
-      <p:cxnSp>
-        <p:nvCxnSpPr>
-          <p:cNvPr id="89" name="Connector 88"/>
-          <p:cNvCxnSpPr/>
-          <p:nvPr/>
-        </p:nvCxnSpPr>
-        <p:spPr>
-          <a:xfrm>
-            <a:off x="1051560" y="5431536"/>
-            <a:ext cx="10378440" cy="0"/>
-          </a:xfrm>
-          <a:prstGeom prst="line">
-            <a:avLst/>
-          </a:prstGeom>
-          <a:ln w="12700">
-            <a:solidFill>
-              <a:srgbClr val="9FB5C9"/>
+              <a:srgbClr val="F2C55C"/>
             </a:solidFill>
           </a:ln>
         </p:spPr>
@@ -63806,21 +63062,21 @@
       </p:cxnSp>
       <p:cxnSp>
         <p:nvCxnSpPr>
-          <p:cNvPr id="90" name="Connector 89"/>
+          <p:cNvPr id="71" name="Connector 70"/>
           <p:cNvCxnSpPr/>
           <p:nvPr/>
         </p:nvCxnSpPr>
         <p:spPr>
-          <a:xfrm>
-            <a:off x="1051560" y="5385816"/>
-            <a:ext cx="0" cy="45720"/>
+          <a:xfrm flipV="1">
+            <a:off x="5110480" y="4848149"/>
+            <a:ext cx="756920" cy="117043"/>
           </a:xfrm>
           <a:prstGeom prst="line">
             <a:avLst/>
           </a:prstGeom>
-          <a:ln w="10160">
+          <a:ln w="31750">
             <a:solidFill>
-              <a:srgbClr val="9FB5C9"/>
+              <a:srgbClr val="F2C55C"/>
             </a:solidFill>
           </a:ln>
         </p:spPr>
@@ -63841,21 +63097,21 @@
       </p:cxnSp>
       <p:cxnSp>
         <p:nvCxnSpPr>
-          <p:cNvPr id="91" name="Connector 90"/>
+          <p:cNvPr id="72" name="Connector 71"/>
           <p:cNvCxnSpPr/>
           <p:nvPr/>
         </p:nvCxnSpPr>
         <p:spPr>
-          <a:xfrm>
-            <a:off x="1051560" y="5420106"/>
-            <a:ext cx="10378440" cy="0"/>
+          <a:xfrm flipV="1">
+            <a:off x="5867400" y="4731106"/>
+            <a:ext cx="756920" cy="117043"/>
           </a:xfrm>
           <a:prstGeom prst="line">
             <a:avLst/>
           </a:prstGeom>
-          <a:ln w="5080">
+          <a:ln w="31750">
             <a:solidFill>
-              <a:srgbClr val="244466"/>
+              <a:srgbClr val="F2C55C"/>
             </a:solidFill>
           </a:ln>
         </p:spPr>
@@ -63876,21 +63132,21 @@
       </p:cxnSp>
       <p:cxnSp>
         <p:nvCxnSpPr>
-          <p:cNvPr id="92" name="Connector 91"/>
+          <p:cNvPr id="73" name="Connector 72"/>
           <p:cNvCxnSpPr/>
           <p:nvPr/>
         </p:nvCxnSpPr>
         <p:spPr>
-          <a:xfrm>
-            <a:off x="1051560" y="5408676"/>
-            <a:ext cx="10378440" cy="0"/>
+          <a:xfrm flipV="1">
+            <a:off x="6624320" y="4614063"/>
+            <a:ext cx="1513840" cy="117043"/>
           </a:xfrm>
           <a:prstGeom prst="line">
             <a:avLst/>
           </a:prstGeom>
-          <a:ln w="5080">
+          <a:ln w="31750">
             <a:solidFill>
-              <a:srgbClr val="244466"/>
+              <a:srgbClr val="F2C55C"/>
             </a:solidFill>
           </a:ln>
         </p:spPr>
@@ -63909,331 +63165,16 @@
           </a:fontRef>
         </p:style>
       </p:cxnSp>
-      <p:cxnSp>
-        <p:nvCxnSpPr>
-          <p:cNvPr id="93" name="Connector 92"/>
-          <p:cNvCxnSpPr/>
-          <p:nvPr/>
-        </p:nvCxnSpPr>
-        <p:spPr>
-          <a:xfrm>
-            <a:off x="1051560" y="5397246"/>
-            <a:ext cx="10378440" cy="0"/>
-          </a:xfrm>
-          <a:prstGeom prst="line">
-            <a:avLst/>
-          </a:prstGeom>
-          <a:ln w="5080">
-            <a:solidFill>
-              <a:srgbClr val="244466"/>
-            </a:solidFill>
-          </a:ln>
-        </p:spPr>
-        <p:style>
-          <a:lnRef idx="2">
-            <a:schemeClr val="accent1"/>
-          </a:lnRef>
-          <a:fillRef idx="0">
-            <a:schemeClr val="accent1"/>
-          </a:fillRef>
-          <a:effectRef idx="1">
-            <a:schemeClr val="accent1"/>
-          </a:effectRef>
-          <a:fontRef idx="minor">
-            <a:schemeClr val="tx1"/>
-          </a:fontRef>
-        </p:style>
-      </p:cxnSp>
-      <p:sp>
-        <p:nvSpPr>
-          <p:cNvPr id="94" name="TextBox 93"/>
-          <p:cNvSpPr txBox="1"/>
-          <p:nvPr/>
-        </p:nvSpPr>
-        <p:spPr>
-          <a:xfrm>
-            <a:off x="594360" y="5340096"/>
-            <a:ext cx="2286000" cy="228600"/>
-          </a:xfrm>
-          <a:prstGeom prst="rect">
-            <a:avLst/>
-          </a:prstGeom>
-          <a:noFill/>
-        </p:spPr>
-        <p:txBody>
-          <a:bodyPr wrap="square" lIns="0" rIns="0" tIns="0" bIns="0" anchor="t">
-            <a:spAutoFit/>
-          </a:bodyPr>
-          <a:lstStyle/>
-          <a:p>
-            <a:pPr algn="l"/>
-            <a:r>
-              <a:rPr sz="800" b="0" i="0">
-                <a:solidFill>
-                  <a:srgbClr val="9FB5C9"/>
-                </a:solidFill>
-                <a:latin typeface="Consolas"/>
-              </a:rPr>
-              <a:t>复杂度 (定性)</a:t>
-            </a:r>
-          </a:p>
-        </p:txBody>
-      </p:sp>
-      <p:cxnSp>
-        <p:nvCxnSpPr>
-          <p:cNvPr id="95" name="Connector 94"/>
-          <p:cNvCxnSpPr/>
-          <p:nvPr/>
-        </p:nvCxnSpPr>
-        <p:spPr>
-          <a:xfrm flipV="1">
-            <a:off x="1051560" y="5422392"/>
-            <a:ext cx="1482634" cy="4572"/>
-          </a:xfrm>
-          <a:prstGeom prst="line">
-            <a:avLst/>
-          </a:prstGeom>
-          <a:ln w="25400">
-            <a:solidFill>
-              <a:srgbClr val="F2C55C"/>
-            </a:solidFill>
-          </a:ln>
-        </p:spPr>
-        <p:style>
-          <a:lnRef idx="2">
-            <a:schemeClr val="accent1"/>
-          </a:lnRef>
-          <a:fillRef idx="0">
-            <a:schemeClr val="accent1"/>
-          </a:fillRef>
-          <a:effectRef idx="1">
-            <a:schemeClr val="accent1"/>
-          </a:effectRef>
-          <a:fontRef idx="minor">
-            <a:schemeClr val="tx1"/>
-          </a:fontRef>
-        </p:style>
-      </p:cxnSp>
-      <p:cxnSp>
-        <p:nvCxnSpPr>
-          <p:cNvPr id="96" name="Connector 95"/>
-          <p:cNvCxnSpPr/>
-          <p:nvPr/>
-        </p:nvCxnSpPr>
-        <p:spPr>
-          <a:xfrm flipV="1">
-            <a:off x="2534194" y="5416906"/>
-            <a:ext cx="1482634" cy="5486"/>
-          </a:xfrm>
-          <a:prstGeom prst="line">
-            <a:avLst/>
-          </a:prstGeom>
-          <a:ln w="25400">
-            <a:solidFill>
-              <a:srgbClr val="F2C55C"/>
-            </a:solidFill>
-          </a:ln>
-        </p:spPr>
-        <p:style>
-          <a:lnRef idx="2">
-            <a:schemeClr val="accent1"/>
-          </a:lnRef>
-          <a:fillRef idx="0">
-            <a:schemeClr val="accent1"/>
-          </a:fillRef>
-          <a:effectRef idx="1">
-            <a:schemeClr val="accent1"/>
-          </a:effectRef>
-          <a:fontRef idx="minor">
-            <a:schemeClr val="tx1"/>
-          </a:fontRef>
-        </p:style>
-      </p:cxnSp>
-      <p:cxnSp>
-        <p:nvCxnSpPr>
-          <p:cNvPr id="97" name="Connector 96"/>
-          <p:cNvCxnSpPr/>
-          <p:nvPr/>
-        </p:nvCxnSpPr>
-        <p:spPr>
-          <a:xfrm flipV="1">
-            <a:off x="4016828" y="5410962"/>
-            <a:ext cx="1482634" cy="5944"/>
-          </a:xfrm>
-          <a:prstGeom prst="line">
-            <a:avLst/>
-          </a:prstGeom>
-          <a:ln w="25400">
-            <a:solidFill>
-              <a:srgbClr val="F2C55C"/>
-            </a:solidFill>
-          </a:ln>
-        </p:spPr>
-        <p:style>
-          <a:lnRef idx="2">
-            <a:schemeClr val="accent1"/>
-          </a:lnRef>
-          <a:fillRef idx="0">
-            <a:schemeClr val="accent1"/>
-          </a:fillRef>
-          <a:effectRef idx="1">
-            <a:schemeClr val="accent1"/>
-          </a:effectRef>
-          <a:fontRef idx="minor">
-            <a:schemeClr val="tx1"/>
-          </a:fontRef>
-        </p:style>
-      </p:cxnSp>
-      <p:cxnSp>
-        <p:nvCxnSpPr>
-          <p:cNvPr id="98" name="Connector 97"/>
-          <p:cNvCxnSpPr/>
-          <p:nvPr/>
-        </p:nvCxnSpPr>
-        <p:spPr>
-          <a:xfrm flipV="1">
-            <a:off x="5499462" y="5406390"/>
-            <a:ext cx="1482635" cy="4572"/>
-          </a:xfrm>
-          <a:prstGeom prst="line">
-            <a:avLst/>
-          </a:prstGeom>
-          <a:ln w="25400">
-            <a:solidFill>
-              <a:srgbClr val="F2C55C"/>
-            </a:solidFill>
-          </a:ln>
-        </p:spPr>
-        <p:style>
-          <a:lnRef idx="2">
-            <a:schemeClr val="accent1"/>
-          </a:lnRef>
-          <a:fillRef idx="0">
-            <a:schemeClr val="accent1"/>
-          </a:fillRef>
-          <a:effectRef idx="1">
-            <a:schemeClr val="accent1"/>
-          </a:effectRef>
-          <a:fontRef idx="minor">
-            <a:schemeClr val="tx1"/>
-          </a:fontRef>
-        </p:style>
-      </p:cxnSp>
-      <p:cxnSp>
-        <p:nvCxnSpPr>
-          <p:cNvPr id="99" name="Connector 98"/>
-          <p:cNvCxnSpPr/>
-          <p:nvPr/>
-        </p:nvCxnSpPr>
-        <p:spPr>
-          <a:xfrm flipV="1">
-            <a:off x="6982097" y="5399533"/>
-            <a:ext cx="1482634" cy="6857"/>
-          </a:xfrm>
-          <a:prstGeom prst="line">
-            <a:avLst/>
-          </a:prstGeom>
-          <a:ln w="25400">
-            <a:solidFill>
-              <a:srgbClr val="F2C55C"/>
-            </a:solidFill>
-          </a:ln>
-        </p:spPr>
-        <p:style>
-          <a:lnRef idx="2">
-            <a:schemeClr val="accent1"/>
-          </a:lnRef>
-          <a:fillRef idx="0">
-            <a:schemeClr val="accent1"/>
-          </a:fillRef>
-          <a:effectRef idx="1">
-            <a:schemeClr val="accent1"/>
-          </a:effectRef>
-          <a:fontRef idx="minor">
-            <a:schemeClr val="tx1"/>
-          </a:fontRef>
-        </p:style>
-      </p:cxnSp>
-      <p:cxnSp>
-        <p:nvCxnSpPr>
-          <p:cNvPr id="100" name="Connector 99"/>
-          <p:cNvCxnSpPr/>
-          <p:nvPr/>
-        </p:nvCxnSpPr>
-        <p:spPr>
-          <a:xfrm flipV="1">
-            <a:off x="8464731" y="5392674"/>
-            <a:ext cx="1482634" cy="6859"/>
-          </a:xfrm>
-          <a:prstGeom prst="line">
-            <a:avLst/>
-          </a:prstGeom>
-          <a:ln w="25400">
-            <a:solidFill>
-              <a:srgbClr val="F2C55C"/>
-            </a:solidFill>
-          </a:ln>
-        </p:spPr>
-        <p:style>
-          <a:lnRef idx="2">
-            <a:schemeClr val="accent1"/>
-          </a:lnRef>
-          <a:fillRef idx="0">
-            <a:schemeClr val="accent1"/>
-          </a:fillRef>
-          <a:effectRef idx="1">
-            <a:schemeClr val="accent1"/>
-          </a:effectRef>
-          <a:fontRef idx="minor">
-            <a:schemeClr val="tx1"/>
-          </a:fontRef>
-        </p:style>
-      </p:cxnSp>
-      <p:cxnSp>
-        <p:nvCxnSpPr>
-          <p:cNvPr id="101" name="Connector 100"/>
-          <p:cNvCxnSpPr/>
-          <p:nvPr/>
-        </p:nvCxnSpPr>
-        <p:spPr>
-          <a:xfrm flipV="1">
-            <a:off x="9947365" y="5386731"/>
-            <a:ext cx="1482635" cy="5943"/>
-          </a:xfrm>
-          <a:prstGeom prst="line">
-            <a:avLst/>
-          </a:prstGeom>
-          <a:ln w="25400">
-            <a:solidFill>
-              <a:srgbClr val="F2C55C"/>
-            </a:solidFill>
-          </a:ln>
-        </p:spPr>
-        <p:style>
-          <a:lnRef idx="2">
-            <a:schemeClr val="accent1"/>
-          </a:lnRef>
-          <a:fillRef idx="0">
-            <a:schemeClr val="accent1"/>
-          </a:fillRef>
-          <a:effectRef idx="1">
-            <a:schemeClr val="accent1"/>
-          </a:effectRef>
-          <a:fontRef idx="minor">
-            <a:schemeClr val="tx1"/>
-          </a:fontRef>
-        </p:style>
-      </p:cxnSp>
-      <p:sp>
-        <p:nvSpPr>
-          <p:cNvPr id="102" name="Oval 101"/>
+      <p:sp>
+        <p:nvSpPr>
+          <p:cNvPr id="74" name="Oval 73"/>
           <p:cNvSpPr/>
           <p:nvPr/>
         </p:nvSpPr>
         <p:spPr>
           <a:xfrm>
-            <a:off x="996696" y="5372100"/>
-            <a:ext cx="109728" cy="109728"/>
+            <a:off x="2014220" y="5189220"/>
+            <a:ext cx="137160" cy="137160"/>
           </a:xfrm>
           <a:prstGeom prst="ellipse">
             <a:avLst/>
@@ -64269,86 +63210,14 @@
       </p:sp>
       <p:sp>
         <p:nvSpPr>
-          <p:cNvPr id="103" name="TextBox 102"/>
-          <p:cNvSpPr txBox="1"/>
-          <p:nvPr/>
-        </p:nvSpPr>
-        <p:spPr>
-          <a:xfrm>
-            <a:off x="411480" y="5042916"/>
-            <a:ext cx="1280160" cy="228600"/>
-          </a:xfrm>
-          <a:prstGeom prst="rect">
-            <a:avLst/>
-          </a:prstGeom>
-          <a:noFill/>
-        </p:spPr>
-        <p:txBody>
-          <a:bodyPr wrap="square" lIns="0" rIns="0" tIns="0" bIns="0" anchor="t">
-            <a:spAutoFit/>
-          </a:bodyPr>
-          <a:lstStyle/>
-          <a:p>
-            <a:pPr algn="ctr"/>
-            <a:r>
-              <a:rPr sz="850" b="1" i="0">
-                <a:solidFill>
-                  <a:srgbClr val="EAF2FA"/>
-                </a:solidFill>
-                <a:latin typeface="Consolas"/>
-              </a:rPr>
-              <a:t>vanilla
-attn</a:t>
-            </a:r>
-          </a:p>
-        </p:txBody>
-      </p:sp>
-      <p:sp>
-        <p:nvSpPr>
-          <p:cNvPr id="104" name="TextBox 103"/>
-          <p:cNvSpPr txBox="1"/>
-          <p:nvPr/>
-        </p:nvSpPr>
-        <p:spPr>
-          <a:xfrm>
-            <a:off x="594360" y="5477256"/>
-            <a:ext cx="914400" cy="365760"/>
-          </a:xfrm>
-          <a:prstGeom prst="rect">
-            <a:avLst/>
-          </a:prstGeom>
-          <a:noFill/>
-        </p:spPr>
-        <p:txBody>
-          <a:bodyPr wrap="square" lIns="0" rIns="0" tIns="0" bIns="0" anchor="t">
-            <a:spAutoFit/>
-          </a:bodyPr>
-          <a:lstStyle/>
-          <a:p>
-            <a:pPr algn="ctr"/>
-            <a:r>
-              <a:rPr sz="900" b="0" i="0">
-                <a:solidFill>
-                  <a:srgbClr val="9FB5C9"/>
-                </a:solidFill>
-                <a:latin typeface="Consolas"/>
-              </a:rPr>
-              <a:t>2018
-ATen ≈350</a:t>
-            </a:r>
-          </a:p>
-        </p:txBody>
-      </p:sp>
-      <p:sp>
-        <p:nvSpPr>
-          <p:cNvPr id="105" name="Oval 104"/>
+          <p:cNvPr id="75" name="Oval 74"/>
           <p:cNvSpPr/>
           <p:nvPr/>
         </p:nvSpPr>
         <p:spPr>
           <a:xfrm>
-            <a:off x="2479330" y="5367528"/>
-            <a:ext cx="109728" cy="109728"/>
+            <a:off x="3528060" y="4978543"/>
+            <a:ext cx="137160" cy="137160"/>
           </a:xfrm>
           <a:prstGeom prst="ellipse">
             <a:avLst/>
@@ -64384,85 +63253,14 @@
       </p:sp>
       <p:sp>
         <p:nvSpPr>
-          <p:cNvPr id="106" name="TextBox 105"/>
-          <p:cNvSpPr txBox="1"/>
-          <p:nvPr/>
-        </p:nvSpPr>
-        <p:spPr>
-          <a:xfrm>
-            <a:off x="1894114" y="5038344"/>
-            <a:ext cx="1280160" cy="228600"/>
-          </a:xfrm>
-          <a:prstGeom prst="rect">
-            <a:avLst/>
-          </a:prstGeom>
-          <a:noFill/>
-        </p:spPr>
-        <p:txBody>
-          <a:bodyPr wrap="square" lIns="0" rIns="0" tIns="0" bIns="0" anchor="t">
-            <a:spAutoFit/>
-          </a:bodyPr>
-          <a:lstStyle/>
-          <a:p>
-            <a:pPr algn="ctr"/>
-            <a:r>
-              <a:rPr sz="850" b="1" i="0">
-                <a:solidFill>
-                  <a:srgbClr val="EAF2FA"/>
-                </a:solidFill>
-                <a:latin typeface="Consolas"/>
-              </a:rPr>
-              <a:t>MHA</a:t>
-            </a:r>
-          </a:p>
-        </p:txBody>
-      </p:sp>
-      <p:sp>
-        <p:nvSpPr>
-          <p:cNvPr id="107" name="TextBox 106"/>
-          <p:cNvSpPr txBox="1"/>
-          <p:nvPr/>
-        </p:nvSpPr>
-        <p:spPr>
-          <a:xfrm>
-            <a:off x="2076994" y="5477256"/>
-            <a:ext cx="914400" cy="365760"/>
-          </a:xfrm>
-          <a:prstGeom prst="rect">
-            <a:avLst/>
-          </a:prstGeom>
-          <a:noFill/>
-        </p:spPr>
-        <p:txBody>
-          <a:bodyPr wrap="square" lIns="0" rIns="0" tIns="0" bIns="0" anchor="t">
-            <a:spAutoFit/>
-          </a:bodyPr>
-          <a:lstStyle/>
-          <a:p>
-            <a:pPr algn="ctr"/>
-            <a:r>
-              <a:rPr sz="900" b="0" i="0">
-                <a:solidFill>
-                  <a:srgbClr val="9FB5C9"/>
-                </a:solidFill>
-                <a:latin typeface="Consolas"/>
-              </a:rPr>
-              <a:t>2020
-ATen 800+</a:t>
-            </a:r>
-          </a:p>
-        </p:txBody>
-      </p:sp>
-      <p:sp>
-        <p:nvSpPr>
-          <p:cNvPr id="108" name="Oval 107"/>
+          <p:cNvPr id="76" name="Oval 75"/>
           <p:cNvSpPr/>
           <p:nvPr/>
         </p:nvSpPr>
         <p:spPr>
           <a:xfrm>
-            <a:off x="3961964" y="5362042"/>
-            <a:ext cx="109728" cy="109728"/>
+            <a:off x="5041900" y="4896612"/>
+            <a:ext cx="137160" cy="137160"/>
           </a:xfrm>
           <a:prstGeom prst="ellipse">
             <a:avLst/>
@@ -64498,85 +63296,14 @@
       </p:sp>
       <p:sp>
         <p:nvSpPr>
-          <p:cNvPr id="109" name="TextBox 108"/>
-          <p:cNvSpPr txBox="1"/>
-          <p:nvPr/>
-        </p:nvSpPr>
-        <p:spPr>
-          <a:xfrm>
-            <a:off x="3376748" y="5032858"/>
-            <a:ext cx="1280160" cy="228600"/>
-          </a:xfrm>
-          <a:prstGeom prst="rect">
-            <a:avLst/>
-          </a:prstGeom>
-          <a:noFill/>
-        </p:spPr>
-        <p:txBody>
-          <a:bodyPr wrap="square" lIns="0" rIns="0" tIns="0" bIns="0" anchor="t">
-            <a:spAutoFit/>
-          </a:bodyPr>
-          <a:lstStyle/>
-          <a:p>
-            <a:pPr algn="ctr"/>
-            <a:r>
-              <a:rPr sz="850" b="1" i="0">
-                <a:solidFill>
-                  <a:srgbClr val="EAF2FA"/>
-                </a:solidFill>
-                <a:latin typeface="Consolas"/>
-              </a:rPr>
-              <a:t>FlashAttn-1</a:t>
-            </a:r>
-          </a:p>
-        </p:txBody>
-      </p:sp>
-      <p:sp>
-        <p:nvSpPr>
-          <p:cNvPr id="110" name="TextBox 109"/>
-          <p:cNvSpPr txBox="1"/>
-          <p:nvPr/>
-        </p:nvSpPr>
-        <p:spPr>
-          <a:xfrm>
-            <a:off x="3559628" y="5477256"/>
-            <a:ext cx="914400" cy="365760"/>
-          </a:xfrm>
-          <a:prstGeom prst="rect">
-            <a:avLst/>
-          </a:prstGeom>
-          <a:noFill/>
-        </p:spPr>
-        <p:txBody>
-          <a:bodyPr wrap="square" lIns="0" rIns="0" tIns="0" bIns="0" anchor="t">
-            <a:spAutoFit/>
-          </a:bodyPr>
-          <a:lstStyle/>
-          <a:p>
-            <a:pPr algn="ctr"/>
-            <a:r>
-              <a:rPr sz="900" b="0" i="0">
-                <a:solidFill>
-                  <a:srgbClr val="9FB5C9"/>
-                </a:solidFill>
-                <a:latin typeface="Consolas"/>
-              </a:rPr>
-              <a:t>2022
-FA-1</a:t>
-            </a:r>
-          </a:p>
-        </p:txBody>
-      </p:sp>
-      <p:sp>
-        <p:nvSpPr>
-          <p:cNvPr id="111" name="Oval 110"/>
+          <p:cNvPr id="77" name="Oval 76"/>
           <p:cNvSpPr/>
           <p:nvPr/>
         </p:nvSpPr>
         <p:spPr>
           <a:xfrm>
-            <a:off x="5444598" y="5356098"/>
-            <a:ext cx="109728" cy="109728"/>
+            <a:off x="5798820" y="4779569"/>
+            <a:ext cx="137160" cy="137160"/>
           </a:xfrm>
           <a:prstGeom prst="ellipse">
             <a:avLst/>
@@ -64612,85 +63339,14 @@
       </p:sp>
       <p:sp>
         <p:nvSpPr>
-          <p:cNvPr id="112" name="TextBox 111"/>
-          <p:cNvSpPr txBox="1"/>
-          <p:nvPr/>
-        </p:nvSpPr>
-        <p:spPr>
-          <a:xfrm>
-            <a:off x="4859382" y="5026914"/>
-            <a:ext cx="1280160" cy="228600"/>
-          </a:xfrm>
-          <a:prstGeom prst="rect">
-            <a:avLst/>
-          </a:prstGeom>
-          <a:noFill/>
-        </p:spPr>
-        <p:txBody>
-          <a:bodyPr wrap="square" lIns="0" rIns="0" tIns="0" bIns="0" anchor="t">
-            <a:spAutoFit/>
-          </a:bodyPr>
-          <a:lstStyle/>
-          <a:p>
-            <a:pPr algn="ctr"/>
-            <a:r>
-              <a:rPr sz="850" b="1" i="0">
-                <a:solidFill>
-                  <a:srgbClr val="EAF2FA"/>
-                </a:solidFill>
-                <a:latin typeface="Consolas"/>
-              </a:rPr>
-              <a:t>FA-2</a:t>
-            </a:r>
-          </a:p>
-        </p:txBody>
-      </p:sp>
-      <p:sp>
-        <p:nvSpPr>
-          <p:cNvPr id="113" name="TextBox 112"/>
-          <p:cNvSpPr txBox="1"/>
-          <p:nvPr/>
-        </p:nvSpPr>
-        <p:spPr>
-          <a:xfrm>
-            <a:off x="5042262" y="5477256"/>
-            <a:ext cx="914400" cy="365760"/>
-          </a:xfrm>
-          <a:prstGeom prst="rect">
-            <a:avLst/>
-          </a:prstGeom>
-          <a:noFill/>
-        </p:spPr>
-        <p:txBody>
-          <a:bodyPr wrap="square" lIns="0" rIns="0" tIns="0" bIns="0" anchor="t">
-            <a:spAutoFit/>
-          </a:bodyPr>
-          <a:lstStyle/>
-          <a:p>
-            <a:pPr algn="ctr"/>
-            <a:r>
-              <a:rPr sz="900" b="0" i="0">
-                <a:solidFill>
-                  <a:srgbClr val="9FB5C9"/>
-                </a:solidFill>
-                <a:latin typeface="Consolas"/>
-              </a:rPr>
-              <a:t>2023
-FA-2</a:t>
-            </a:r>
-          </a:p>
-        </p:txBody>
-      </p:sp>
-      <p:sp>
-        <p:nvSpPr>
-          <p:cNvPr id="114" name="Oval 113"/>
+          <p:cNvPr id="78" name="Oval 77"/>
           <p:cNvSpPr/>
           <p:nvPr/>
         </p:nvSpPr>
         <p:spPr>
           <a:xfrm>
-            <a:off x="6927233" y="5351526"/>
-            <a:ext cx="109728" cy="109728"/>
+            <a:off x="6555740" y="4662526"/>
+            <a:ext cx="137160" cy="137160"/>
           </a:xfrm>
           <a:prstGeom prst="ellipse">
             <a:avLst/>
@@ -64726,85 +63382,14 @@
       </p:sp>
       <p:sp>
         <p:nvSpPr>
-          <p:cNvPr id="115" name="TextBox 114"/>
-          <p:cNvSpPr txBox="1"/>
-          <p:nvPr/>
-        </p:nvSpPr>
-        <p:spPr>
-          <a:xfrm>
-            <a:off x="6342017" y="5022342"/>
-            <a:ext cx="1280160" cy="228600"/>
-          </a:xfrm>
-          <a:prstGeom prst="rect">
-            <a:avLst/>
-          </a:prstGeom>
-          <a:noFill/>
-        </p:spPr>
-        <p:txBody>
-          <a:bodyPr wrap="square" lIns="0" rIns="0" tIns="0" bIns="0" anchor="t">
-            <a:spAutoFit/>
-          </a:bodyPr>
-          <a:lstStyle/>
-          <a:p>
-            <a:pPr algn="ctr"/>
-            <a:r>
-              <a:rPr sz="850" b="1" i="0">
-                <a:solidFill>
-                  <a:srgbClr val="EAF2FA"/>
-                </a:solidFill>
-                <a:latin typeface="Consolas"/>
-              </a:rPr>
-              <a:t>GQA</a:t>
-            </a:r>
-          </a:p>
-        </p:txBody>
-      </p:sp>
-      <p:sp>
-        <p:nvSpPr>
-          <p:cNvPr id="116" name="TextBox 115"/>
-          <p:cNvSpPr txBox="1"/>
-          <p:nvPr/>
-        </p:nvSpPr>
-        <p:spPr>
-          <a:xfrm>
-            <a:off x="6524897" y="5477256"/>
-            <a:ext cx="914400" cy="365760"/>
-          </a:xfrm>
-          <a:prstGeom prst="rect">
-            <a:avLst/>
-          </a:prstGeom>
-          <a:noFill/>
-        </p:spPr>
-        <p:txBody>
-          <a:bodyPr wrap="square" lIns="0" rIns="0" tIns="0" bIns="0" anchor="t">
-            <a:spAutoFit/>
-          </a:bodyPr>
-          <a:lstStyle/>
-          <a:p>
-            <a:pPr algn="ctr"/>
-            <a:r>
-              <a:rPr sz="900" b="0" i="0">
-                <a:solidFill>
-                  <a:srgbClr val="9FB5C9"/>
-                </a:solidFill>
-                <a:latin typeface="Consolas"/>
-              </a:rPr>
-              <a:t>2023
-GQA</a:t>
-            </a:r>
-          </a:p>
-        </p:txBody>
-      </p:sp>
-      <p:sp>
-        <p:nvSpPr>
-          <p:cNvPr id="117" name="Oval 116"/>
+          <p:cNvPr id="79" name="Oval 78"/>
           <p:cNvSpPr/>
           <p:nvPr/>
         </p:nvSpPr>
         <p:spPr>
           <a:xfrm>
-            <a:off x="8409867" y="5344669"/>
-            <a:ext cx="109728" cy="109728"/>
+            <a:off x="8069580" y="4545483"/>
+            <a:ext cx="137160" cy="137160"/>
           </a:xfrm>
           <a:prstGeom prst="ellipse">
             <a:avLst/>
@@ -64840,14 +63425,14 @@
       </p:sp>
       <p:sp>
         <p:nvSpPr>
-          <p:cNvPr id="118" name="TextBox 117"/>
-          <p:cNvSpPr txBox="1"/>
-          <p:nvPr/>
-        </p:nvSpPr>
-        <p:spPr>
-          <a:xfrm>
-            <a:off x="7824651" y="5015485"/>
-            <a:ext cx="1280160" cy="228600"/>
+          <p:cNvPr id="80" name="TextBox 79"/>
+          <p:cNvSpPr txBox="1"/>
+          <p:nvPr/>
+        </p:nvSpPr>
+        <p:spPr>
+          <a:xfrm>
+            <a:off x="7472680" y="2617745"/>
+            <a:ext cx="1828800" cy="292608"/>
           </a:xfrm>
           <a:prstGeom prst="rect">
             <a:avLst/>
@@ -64860,29 +63445,29 @@
           </a:bodyPr>
           <a:lstStyle/>
           <a:p>
-            <a:pPr algn="ctr"/>
-            <a:r>
-              <a:rPr sz="850" b="1" i="0">
-                <a:solidFill>
-                  <a:srgbClr val="EAF2FA"/>
+            <a:pPr algn="l"/>
+            <a:r>
+              <a:rPr sz="900" b="1" i="0">
+                <a:solidFill>
+                  <a:srgbClr val="38D1B8"/>
                 </a:solidFill>
                 <a:latin typeface="Consolas"/>
               </a:rPr>
-              <a:t>MoE+SwiGLU</a:t>
-            </a:r>
-          </a:p>
-        </p:txBody>
-      </p:sp>
-      <p:sp>
-        <p:nvSpPr>
-          <p:cNvPr id="119" name="TextBox 118"/>
-          <p:cNvSpPr txBox="1"/>
-          <p:nvPr/>
-        </p:nvSpPr>
-        <p:spPr>
-          <a:xfrm>
-            <a:off x="8007531" y="5477256"/>
-            <a:ext cx="914400" cy="365760"/>
+              <a:t>① 模型规模</a:t>
+            </a:r>
+          </a:p>
+        </p:txBody>
+      </p:sp>
+      <p:sp>
+        <p:nvSpPr>
+          <p:cNvPr id="81" name="TextBox 80"/>
+          <p:cNvSpPr txBox="1"/>
+          <p:nvPr/>
+        </p:nvSpPr>
+        <p:spPr>
+          <a:xfrm>
+            <a:off x="8229600" y="4332428"/>
+            <a:ext cx="1828800" cy="292608"/>
           </a:xfrm>
           <a:prstGeom prst="rect">
             <a:avLst/>
@@ -64895,32 +63480,372 @@
           </a:bodyPr>
           <a:lstStyle/>
           <a:p>
-            <a:pPr algn="ctr"/>
-            <a:r>
-              <a:rPr sz="900" b="0" i="0">
+            <a:pPr algn="l"/>
+            <a:r>
+              <a:rPr sz="900" b="1" i="0">
+                <a:solidFill>
+                  <a:srgbClr val="EF6E6E"/>
+                </a:solidFill>
+                <a:latin typeface="Consolas"/>
+              </a:rPr>
+              <a:t>② NVIDIA HW</a:t>
+            </a:r>
+          </a:p>
+        </p:txBody>
+      </p:sp>
+      <p:sp>
+        <p:nvSpPr>
+          <p:cNvPr id="82" name="TextBox 81"/>
+          <p:cNvSpPr txBox="1"/>
+          <p:nvPr/>
+        </p:nvSpPr>
+        <p:spPr>
+          <a:xfrm>
+            <a:off x="8229600" y="4449471"/>
+            <a:ext cx="1828800" cy="292608"/>
+          </a:xfrm>
+          <a:prstGeom prst="rect">
+            <a:avLst/>
+          </a:prstGeom>
+          <a:noFill/>
+        </p:spPr>
+        <p:txBody>
+          <a:bodyPr wrap="square" lIns="0" rIns="0" tIns="0" bIns="0" anchor="t">
+            <a:spAutoFit/>
+          </a:bodyPr>
+          <a:lstStyle/>
+          <a:p>
+            <a:pPr algn="l"/>
+            <a:r>
+              <a:rPr sz="900" b="1" i="0">
+                <a:solidFill>
+                  <a:srgbClr val="F2C55C"/>
+                </a:solidFill>
+                <a:latin typeface="Consolas"/>
+              </a:rPr>
+              <a:t>③ 算子复杂度</a:t>
+            </a:r>
+          </a:p>
+        </p:txBody>
+      </p:sp>
+      <p:sp>
+        <p:nvSpPr>
+          <p:cNvPr id="83" name="Rounded Rectangle 82"/>
+          <p:cNvSpPr/>
+          <p:nvPr/>
+        </p:nvSpPr>
+        <p:spPr>
+          <a:xfrm>
+            <a:off x="8595360" y="1828800"/>
+            <a:ext cx="3063240" cy="4297680"/>
+          </a:xfrm>
+          <a:prstGeom prst="roundRect">
+            <a:avLst>
+              <a:gd name="adj" fmla="val 6000"/>
+            </a:avLst>
+          </a:prstGeom>
+          <a:solidFill>
+            <a:srgbClr val="122A43"/>
+          </a:solidFill>
+          <a:ln>
+            <a:noFill/>
+          </a:ln>
+        </p:spPr>
+        <p:style>
+          <a:lnRef idx="1">
+            <a:schemeClr val="accent1"/>
+          </a:lnRef>
+          <a:fillRef idx="3">
+            <a:schemeClr val="accent1"/>
+          </a:fillRef>
+          <a:effectRef idx="2">
+            <a:schemeClr val="accent1"/>
+          </a:effectRef>
+          <a:fontRef idx="minor">
+            <a:schemeClr val="lt1"/>
+          </a:fontRef>
+        </p:style>
+        <p:txBody>
+          <a:bodyPr rtlCol="0" anchor="ctr"/>
+          <a:lstStyle/>
+          <a:p>
+            <a:pPr algn="ctr"/>
+          </a:p>
+        </p:txBody>
+      </p:sp>
+      <p:sp>
+        <p:nvSpPr>
+          <p:cNvPr id="84" name="TextBox 83"/>
+          <p:cNvSpPr txBox="1"/>
+          <p:nvPr/>
+        </p:nvSpPr>
+        <p:spPr>
+          <a:xfrm>
+            <a:off x="8778240" y="1993392"/>
+            <a:ext cx="2697480" cy="329184"/>
+          </a:xfrm>
+          <a:prstGeom prst="rect">
+            <a:avLst/>
+          </a:prstGeom>
+          <a:noFill/>
+        </p:spPr>
+        <p:txBody>
+          <a:bodyPr wrap="square" lIns="0" rIns="0" tIns="0" bIns="0" anchor="t">
+            <a:spAutoFit/>
+          </a:bodyPr>
+          <a:lstStyle/>
+          <a:p>
+            <a:pPr algn="l"/>
+            <a:r>
+              <a:rPr sz="1200" b="1" i="0">
+                <a:solidFill>
+                  <a:srgbClr val="38D1B8"/>
+                </a:solidFill>
+                <a:latin typeface="Consolas"/>
+              </a:rPr>
+              <a:t>曲线图例 · 公开数据</a:t>
+            </a:r>
+          </a:p>
+        </p:txBody>
+      </p:sp>
+      <p:sp>
+        <p:nvSpPr>
+          <p:cNvPr id="85" name="Rectangle 84"/>
+          <p:cNvSpPr/>
+          <p:nvPr/>
+        </p:nvSpPr>
+        <p:spPr>
+          <a:xfrm>
+            <a:off x="8823960" y="2569464"/>
+            <a:ext cx="292608" cy="73152"/>
+          </a:xfrm>
+          <a:prstGeom prst="rect">
+            <a:avLst/>
+          </a:prstGeom>
+          <a:solidFill>
+            <a:srgbClr val="38D1B8"/>
+          </a:solidFill>
+          <a:ln>
+            <a:noFill/>
+          </a:ln>
+        </p:spPr>
+        <p:style>
+          <a:lnRef idx="1">
+            <a:schemeClr val="accent1"/>
+          </a:lnRef>
+          <a:fillRef idx="3">
+            <a:schemeClr val="accent1"/>
+          </a:fillRef>
+          <a:effectRef idx="2">
+            <a:schemeClr val="accent1"/>
+          </a:effectRef>
+          <a:fontRef idx="minor">
+            <a:schemeClr val="lt1"/>
+          </a:fontRef>
+        </p:style>
+        <p:txBody>
+          <a:bodyPr rtlCol="0" anchor="ctr"/>
+          <a:lstStyle/>
+          <a:p>
+            <a:pPr algn="ctr"/>
+          </a:p>
+        </p:txBody>
+      </p:sp>
+      <p:sp>
+        <p:nvSpPr>
+          <p:cNvPr id="86" name="TextBox 85"/>
+          <p:cNvSpPr txBox="1"/>
+          <p:nvPr/>
+        </p:nvSpPr>
+        <p:spPr>
+          <a:xfrm>
+            <a:off x="9189720" y="2423160"/>
+            <a:ext cx="2286000" cy="292608"/>
+          </a:xfrm>
+          <a:prstGeom prst="rect">
+            <a:avLst/>
+          </a:prstGeom>
+          <a:noFill/>
+        </p:spPr>
+        <p:txBody>
+          <a:bodyPr wrap="square" lIns="0" rIns="0" tIns="0" bIns="0" anchor="t">
+            <a:spAutoFit/>
+          </a:bodyPr>
+          <a:lstStyle/>
+          <a:p>
+            <a:pPr algn="l"/>
+            <a:r>
+              <a:rPr sz="1150" b="1" i="0">
+                <a:solidFill>
+                  <a:srgbClr val="38D1B8"/>
+                </a:solidFill>
+                <a:latin typeface="Microsoft YaHei"/>
+              </a:rPr>
+              <a:t>① 模型规模</a:t>
+            </a:r>
+          </a:p>
+        </p:txBody>
+      </p:sp>
+      <p:sp>
+        <p:nvSpPr>
+          <p:cNvPr id="87" name="TextBox 86"/>
+          <p:cNvSpPr txBox="1"/>
+          <p:nvPr/>
+        </p:nvSpPr>
+        <p:spPr>
+          <a:xfrm>
+            <a:off x="9189720" y="2697480"/>
+            <a:ext cx="2286000" cy="457200"/>
+          </a:xfrm>
+          <a:prstGeom prst="rect">
+            <a:avLst/>
+          </a:prstGeom>
+          <a:noFill/>
+        </p:spPr>
+        <p:txBody>
+          <a:bodyPr wrap="square" lIns="0" rIns="0" tIns="0" bIns="0" anchor="t">
+            <a:spAutoFit/>
+          </a:bodyPr>
+          <a:lstStyle/>
+          <a:p>
+            <a:pPr algn="l"/>
+            <a:r>
+              <a:rPr sz="950" b="0" i="0">
                 <a:solidFill>
                   <a:srgbClr val="9FB5C9"/>
                 </a:solidFill>
-                <a:latin typeface="Consolas"/>
-              </a:rPr>
-              <a:t>2024
-MoE 普及</a:t>
-            </a:r>
-          </a:p>
-        </p:txBody>
-      </p:sp>
-      <p:sp>
-        <p:nvSpPr>
-          <p:cNvPr id="120" name="Oval 119"/>
+                <a:latin typeface="Microsoft YaHei"/>
+              </a:rPr>
+              <a:t>GPT-1 → LLaMA-4 / DSV3：~10⁴ 倍</a:t>
+            </a:r>
+          </a:p>
+        </p:txBody>
+      </p:sp>
+      <p:sp>
+        <p:nvSpPr>
+          <p:cNvPr id="88" name="Rectangle 87"/>
           <p:cNvSpPr/>
           <p:nvPr/>
         </p:nvSpPr>
         <p:spPr>
           <a:xfrm>
-            <a:off x="9892501" y="5337810"/>
-            <a:ext cx="109728" cy="109728"/>
-          </a:xfrm>
-          <a:prstGeom prst="ellipse">
+            <a:off x="8823960" y="3282696"/>
+            <a:ext cx="292608" cy="73152"/>
+          </a:xfrm>
+          <a:prstGeom prst="rect">
+            <a:avLst/>
+          </a:prstGeom>
+          <a:solidFill>
+            <a:srgbClr val="EF6E6E"/>
+          </a:solidFill>
+          <a:ln>
+            <a:noFill/>
+          </a:ln>
+        </p:spPr>
+        <p:style>
+          <a:lnRef idx="1">
+            <a:schemeClr val="accent1"/>
+          </a:lnRef>
+          <a:fillRef idx="3">
+            <a:schemeClr val="accent1"/>
+          </a:fillRef>
+          <a:effectRef idx="2">
+            <a:schemeClr val="accent1"/>
+          </a:effectRef>
+          <a:fontRef idx="minor">
+            <a:schemeClr val="lt1"/>
+          </a:fontRef>
+        </p:style>
+        <p:txBody>
+          <a:bodyPr rtlCol="0" anchor="ctr"/>
+          <a:lstStyle/>
+          <a:p>
+            <a:pPr algn="ctr"/>
+          </a:p>
+        </p:txBody>
+      </p:sp>
+      <p:sp>
+        <p:nvSpPr>
+          <p:cNvPr id="89" name="TextBox 88"/>
+          <p:cNvSpPr txBox="1"/>
+          <p:nvPr/>
+        </p:nvSpPr>
+        <p:spPr>
+          <a:xfrm>
+            <a:off x="9189720" y="3136392"/>
+            <a:ext cx="2286000" cy="292608"/>
+          </a:xfrm>
+          <a:prstGeom prst="rect">
+            <a:avLst/>
+          </a:prstGeom>
+          <a:noFill/>
+        </p:spPr>
+        <p:txBody>
+          <a:bodyPr wrap="square" lIns="0" rIns="0" tIns="0" bIns="0" anchor="t">
+            <a:spAutoFit/>
+          </a:bodyPr>
+          <a:lstStyle/>
+          <a:p>
+            <a:pPr algn="l"/>
+            <a:r>
+              <a:rPr sz="1150" b="1" i="0">
+                <a:solidFill>
+                  <a:srgbClr val="EF6E6E"/>
+                </a:solidFill>
+                <a:latin typeface="Microsoft YaHei"/>
+              </a:rPr>
+              <a:t>② NVIDIA HW</a:t>
+            </a:r>
+          </a:p>
+        </p:txBody>
+      </p:sp>
+      <p:sp>
+        <p:nvSpPr>
+          <p:cNvPr id="90" name="TextBox 89"/>
+          <p:cNvSpPr txBox="1"/>
+          <p:nvPr/>
+        </p:nvSpPr>
+        <p:spPr>
+          <a:xfrm>
+            <a:off x="9189720" y="3410712"/>
+            <a:ext cx="2286000" cy="457200"/>
+          </a:xfrm>
+          <a:prstGeom prst="rect">
+            <a:avLst/>
+          </a:prstGeom>
+          <a:noFill/>
+        </p:spPr>
+        <p:txBody>
+          <a:bodyPr wrap="square" lIns="0" rIns="0" tIns="0" bIns="0" anchor="t">
+            <a:spAutoFit/>
+          </a:bodyPr>
+          <a:lstStyle/>
+          <a:p>
+            <a:pPr algn="l"/>
+            <a:r>
+              <a:rPr sz="950" b="0" i="0">
+                <a:solidFill>
+                  <a:srgbClr val="9FB5C9"/>
+                </a:solidFill>
+                <a:latin typeface="Microsoft YaHei"/>
+              </a:rPr>
+              <a:t>V100 → GB200 (BF16)：~20 倍</a:t>
+            </a:r>
+          </a:p>
+        </p:txBody>
+      </p:sp>
+      <p:sp>
+        <p:nvSpPr>
+          <p:cNvPr id="91" name="Rectangle 90"/>
+          <p:cNvSpPr/>
+          <p:nvPr/>
+        </p:nvSpPr>
+        <p:spPr>
+          <a:xfrm>
+            <a:off x="8823960" y="3995928"/>
+            <a:ext cx="292608" cy="73152"/>
+          </a:xfrm>
+          <a:prstGeom prst="rect">
             <a:avLst/>
           </a:prstGeom>
           <a:solidFill>
@@ -64954,14 +63879,14 @@
       </p:sp>
       <p:sp>
         <p:nvSpPr>
-          <p:cNvPr id="121" name="TextBox 120"/>
-          <p:cNvSpPr txBox="1"/>
-          <p:nvPr/>
-        </p:nvSpPr>
-        <p:spPr>
-          <a:xfrm>
-            <a:off x="9307285" y="5008626"/>
-            <a:ext cx="1280160" cy="228600"/>
+          <p:cNvPr id="92" name="TextBox 91"/>
+          <p:cNvSpPr txBox="1"/>
+          <p:nvPr/>
+        </p:nvSpPr>
+        <p:spPr>
+          <a:xfrm>
+            <a:off x="9189720" y="3849624"/>
+            <a:ext cx="2286000" cy="292608"/>
           </a:xfrm>
           <a:prstGeom prst="rect">
             <a:avLst/>
@@ -64974,29 +63899,29 @@
           </a:bodyPr>
           <a:lstStyle/>
           <a:p>
-            <a:pPr algn="ctr"/>
-            <a:r>
-              <a:rPr sz="850" b="1" i="0">
-                <a:solidFill>
-                  <a:srgbClr val="EAF2FA"/>
-                </a:solidFill>
-                <a:latin typeface="Consolas"/>
-              </a:rPr>
-              <a:t>FA-3/MLA</a:t>
-            </a:r>
-          </a:p>
-        </p:txBody>
-      </p:sp>
-      <p:sp>
-        <p:nvSpPr>
-          <p:cNvPr id="122" name="TextBox 121"/>
-          <p:cNvSpPr txBox="1"/>
-          <p:nvPr/>
-        </p:nvSpPr>
-        <p:spPr>
-          <a:xfrm>
-            <a:off x="9490165" y="5477256"/>
-            <a:ext cx="914400" cy="365760"/>
+            <a:pPr algn="l"/>
+            <a:r>
+              <a:rPr sz="1150" b="1" i="0">
+                <a:solidFill>
+                  <a:srgbClr val="F2C55C"/>
+                </a:solidFill>
+                <a:latin typeface="Microsoft YaHei"/>
+              </a:rPr>
+              <a:t>③ 算子复杂度</a:t>
+            </a:r>
+          </a:p>
+        </p:txBody>
+      </p:sp>
+      <p:sp>
+        <p:nvSpPr>
+          <p:cNvPr id="93" name="TextBox 92"/>
+          <p:cNvSpPr txBox="1"/>
+          <p:nvPr/>
+        </p:nvSpPr>
+        <p:spPr>
+          <a:xfrm>
+            <a:off x="9189720" y="4123944"/>
+            <a:ext cx="2286000" cy="457200"/>
           </a:xfrm>
           <a:prstGeom prst="rect">
             <a:avLst/>
@@ -65009,32 +63934,76 @@
           </a:bodyPr>
           <a:lstStyle/>
           <a:p>
-            <a:pPr algn="ctr"/>
-            <a:r>
-              <a:rPr sz="900" b="0" i="0">
+            <a:pPr algn="l"/>
+            <a:r>
+              <a:rPr sz="950" b="0" i="0">
                 <a:solidFill>
                   <a:srgbClr val="9FB5C9"/>
                 </a:solidFill>
-                <a:latin typeface="Consolas"/>
-              </a:rPr>
-              <a:t>2024
-FA-3 + MLA</a:t>
-            </a:r>
-          </a:p>
-        </p:txBody>
-      </p:sp>
-      <p:sp>
-        <p:nvSpPr>
-          <p:cNvPr id="123" name="Oval 122"/>
+                <a:latin typeface="Microsoft YaHei"/>
+              </a:rPr>
+              <a:t>vanilla attn → FA-4：~10 倍 (定性)</a:t>
+            </a:r>
+          </a:p>
+        </p:txBody>
+      </p:sp>
+      <p:sp>
+        <p:nvSpPr>
+          <p:cNvPr id="94" name="Rounded Rectangle 93"/>
           <p:cNvSpPr/>
           <p:nvPr/>
         </p:nvSpPr>
         <p:spPr>
           <a:xfrm>
-            <a:off x="11375136" y="5331867"/>
-            <a:ext cx="109728" cy="109728"/>
-          </a:xfrm>
-          <a:prstGeom prst="ellipse">
+            <a:off x="8732520" y="4663440"/>
+            <a:ext cx="2788920" cy="1325880"/>
+          </a:xfrm>
+          <a:prstGeom prst="roundRect">
+            <a:avLst>
+              <a:gd name="adj" fmla="val 6000"/>
+            </a:avLst>
+          </a:prstGeom>
+          <a:solidFill>
+            <a:srgbClr val="183553"/>
+          </a:solidFill>
+          <a:ln>
+            <a:noFill/>
+          </a:ln>
+        </p:spPr>
+        <p:style>
+          <a:lnRef idx="1">
+            <a:schemeClr val="accent1"/>
+          </a:lnRef>
+          <a:fillRef idx="3">
+            <a:schemeClr val="accent1"/>
+          </a:fillRef>
+          <a:effectRef idx="2">
+            <a:schemeClr val="accent1"/>
+          </a:effectRef>
+          <a:fontRef idx="minor">
+            <a:schemeClr val="lt1"/>
+          </a:fontRef>
+        </p:style>
+        <p:txBody>
+          <a:bodyPr rtlCol="0" anchor="ctr"/>
+          <a:lstStyle/>
+          <a:p>
+            <a:pPr algn="ctr"/>
+          </a:p>
+        </p:txBody>
+      </p:sp>
+      <p:sp>
+        <p:nvSpPr>
+          <p:cNvPr id="95" name="Rectangle 94"/>
+          <p:cNvSpPr/>
+          <p:nvPr/>
+        </p:nvSpPr>
+        <p:spPr>
+          <a:xfrm>
+            <a:off x="8732520" y="4663440"/>
+            <a:ext cx="73152" cy="1325880"/>
+          </a:xfrm>
+          <a:prstGeom prst="rect">
             <a:avLst/>
           </a:prstGeom>
           <a:solidFill>
@@ -65068,14 +64037,14 @@
       </p:sp>
       <p:sp>
         <p:nvSpPr>
-          <p:cNvPr id="124" name="TextBox 123"/>
-          <p:cNvSpPr txBox="1"/>
-          <p:nvPr/>
-        </p:nvSpPr>
-        <p:spPr>
-          <a:xfrm>
-            <a:off x="10789920" y="5002683"/>
-            <a:ext cx="1280160" cy="228600"/>
+          <p:cNvPr id="96" name="TextBox 95"/>
+          <p:cNvSpPr txBox="1"/>
+          <p:nvPr/>
+        </p:nvSpPr>
+        <p:spPr>
+          <a:xfrm>
+            <a:off x="8887968" y="4736592"/>
+            <a:ext cx="2606040" cy="274320"/>
           </a:xfrm>
           <a:prstGeom prst="rect">
             <a:avLst/>
@@ -65088,29 +64057,65 @@
           </a:bodyPr>
           <a:lstStyle/>
           <a:p>
-            <a:pPr algn="ctr"/>
-            <a:r>
-              <a:rPr sz="850" b="1" i="0">
+            <a:pPr algn="l"/>
+            <a:r>
+              <a:rPr sz="1000" b="1" i="0">
+                <a:solidFill>
+                  <a:srgbClr val="F2C55C"/>
+                </a:solidFill>
+                <a:latin typeface="Consolas"/>
+              </a:rPr>
+              <a:t>KEY TAKEAWAY</a:t>
+            </a:r>
+          </a:p>
+        </p:txBody>
+      </p:sp>
+      <p:sp>
+        <p:nvSpPr>
+          <p:cNvPr id="97" name="TextBox 96"/>
+          <p:cNvSpPr txBox="1"/>
+          <p:nvPr/>
+        </p:nvSpPr>
+        <p:spPr>
+          <a:xfrm>
+            <a:off x="8887968" y="5029200"/>
+            <a:ext cx="2606040" cy="914400"/>
+          </a:xfrm>
+          <a:prstGeom prst="rect">
+            <a:avLst/>
+          </a:prstGeom>
+          <a:noFill/>
+        </p:spPr>
+        <p:txBody>
+          <a:bodyPr wrap="square" lIns="0" rIns="0" tIns="0" bIns="0" anchor="t">
+            <a:spAutoFit/>
+          </a:bodyPr>
+          <a:lstStyle/>
+          <a:p>
+            <a:pPr algn="l"/>
+            <a:r>
+              <a:rPr sz="1050" b="0" i="0">
                 <a:solidFill>
                   <a:srgbClr val="EAF2FA"/>
                 </a:solidFill>
-                <a:latin typeface="Consolas"/>
-              </a:rPr>
-              <a:t>FA-4</a:t>
-            </a:r>
-          </a:p>
-        </p:txBody>
-      </p:sp>
-      <p:sp>
-        <p:nvSpPr>
-          <p:cNvPr id="125" name="TextBox 124"/>
-          <p:cNvSpPr txBox="1"/>
-          <p:nvPr/>
-        </p:nvSpPr>
-        <p:spPr>
-          <a:xfrm>
-            <a:off x="10972800" y="5477256"/>
-            <a:ext cx="914400" cy="365760"/>
+                <a:latin typeface="Microsoft YaHei"/>
+              </a:rPr>
+              <a:t>8 年内 · 模型规模 ↑ ~10⁴×，算子复杂度 ↑ ~10×，但硬件 BF16 算力仅 ↑ ~20×。
+缺口必须靠编译 / 调度 / 算法填补——这正是本洞察的主题。</a:t>
+            </a:r>
+          </a:p>
+        </p:txBody>
+      </p:sp>
+      <p:sp>
+        <p:nvSpPr>
+          <p:cNvPr id="98" name="TextBox 97"/>
+          <p:cNvSpPr txBox="1"/>
+          <p:nvPr/>
+        </p:nvSpPr>
+        <p:spPr>
+          <a:xfrm>
+            <a:off x="548640" y="6199632"/>
+            <a:ext cx="7772400" cy="256032"/>
           </a:xfrm>
           <a:prstGeom prst="rect">
             <a:avLst/>
@@ -65123,58 +64128,22 @@
           </a:bodyPr>
           <a:lstStyle/>
           <a:p>
-            <a:pPr algn="ctr"/>
-            <a:r>
-              <a:rPr sz="900" b="0" i="0">
-                <a:solidFill>
-                  <a:srgbClr val="9FB5C9"/>
-                </a:solidFill>
-                <a:latin typeface="Consolas"/>
-              </a:rPr>
-              <a:t>2026
-FA-4 (Blackwell)</a:t>
-            </a:r>
-          </a:p>
-        </p:txBody>
-      </p:sp>
-      <p:sp>
-        <p:nvSpPr>
-          <p:cNvPr id="126" name="TextBox 125"/>
-          <p:cNvSpPr txBox="1"/>
-          <p:nvPr/>
-        </p:nvSpPr>
-        <p:spPr>
-          <a:xfrm>
-            <a:off x="731520" y="5916168"/>
-            <a:ext cx="10744200" cy="329184"/>
-          </a:xfrm>
-          <a:prstGeom prst="rect">
-            <a:avLst/>
-          </a:prstGeom>
-          <a:noFill/>
-        </p:spPr>
-        <p:txBody>
-          <a:bodyPr wrap="square" lIns="0" rIns="0" tIns="0" bIns="0" anchor="t">
-            <a:spAutoFit/>
-          </a:bodyPr>
-          <a:lstStyle/>
-          <a:p>
             <a:pPr algn="l"/>
             <a:r>
-              <a:rPr sz="750" b="0" i="1">
+              <a:rPr sz="900" b="0" i="1">
                 <a:solidFill>
                   <a:srgbClr val="6E869F"/>
                 </a:solidFill>
                 <a:latin typeface="Microsoft YaHei"/>
               </a:rPr>
-              <a:t>Source: PyTorch 官方 ATen 源码计数 + FlashAttention 系列 (Tri Dao et al.) + DeepSeek-V2 MLA paper + cuDNN/CUTLASS release notes。</a:t>
-            </a:r>
-          </a:p>
-        </p:txBody>
-      </p:sp>
-      <p:sp>
-        <p:nvSpPr>
-          <p:cNvPr id="127" name="TextBox 126"/>
+              <a:t>Sources: 各模型公开 paper/blog (GPT-1..4, LLaMA, PaLM, DeepSeek-V3) · NVIDIA 官方 datasheet (V100/A100/H100/H200/Blackwell) · PyTorch ATen 源码计数 · FlashAttention 系列 (Tri Dao et al.)。* GPT-4 / LLaMA-4 参数为 SemiAnalysis 等公开估算。</a:t>
+            </a:r>
+          </a:p>
+        </p:txBody>
+      </p:sp>
+      <p:sp>
+        <p:nvSpPr>
+          <p:cNvPr id="99" name="TextBox 98"/>
           <p:cNvSpPr txBox="1"/>
           <p:nvPr/>
         </p:nvSpPr>
@@ -65202,14 +64171,14 @@
                 </a:solidFill>
                 <a:latin typeface="Consolas"/>
               </a:rPr>
-              <a:t>→ Glossary P03 · 术语 ATen / MLA / GQA / FA-2/3/4</a:t>
-            </a:r>
-          </a:p>
-        </p:txBody>
-      </p:sp>
-      <p:sp>
-        <p:nvSpPr>
-          <p:cNvPr id="128" name="TextBox 127"/>
+              <a:t>→ Glossary P03 · ATen / MLA / GQA / FA-2/3/4</a:t>
+            </a:r>
+          </a:p>
+        </p:txBody>
+      </p:sp>
+      <p:sp>
+        <p:nvSpPr>
+          <p:cNvPr id="100" name="TextBox 99"/>
           <p:cNvSpPr txBox="1"/>
           <p:nvPr/>
         </p:nvSpPr>
@@ -65244,7 +64213,7 @@
       </p:sp>
       <p:sp>
         <p:nvSpPr>
-          <p:cNvPr id="129" name="TextBox 128"/>
+          <p:cNvPr id="101" name="TextBox 100"/>
           <p:cNvSpPr txBox="1"/>
           <p:nvPr/>
         </p:nvSpPr>

--- a/docs/sharing/ai-native-insight-deck.pptx
+++ b/docs/sharing/ai-native-insight-deck.pptx
@@ -31207,7 +31207,7 @@
         <p:spPr>
           <a:xfrm>
             <a:off x="548640" y="1828800"/>
-            <a:ext cx="3657600" cy="2103120"/>
+            <a:ext cx="3657600" cy="1783080"/>
           </a:xfrm>
           <a:prstGeom prst="roundRect">
             <a:avLst>
@@ -31252,7 +31252,7 @@
         <p:spPr>
           <a:xfrm>
             <a:off x="548640" y="1828800"/>
-            <a:ext cx="128016" cy="2103120"/>
+            <a:ext cx="128016" cy="1783080"/>
           </a:xfrm>
           <a:prstGeom prst="rect">
             <a:avLst/>
@@ -31294,8 +31294,8 @@
         </p:nvSpPr>
         <p:spPr>
           <a:xfrm>
-            <a:off x="822960" y="1938528"/>
-            <a:ext cx="777240" cy="365760"/>
+            <a:off x="822960" y="1920240"/>
+            <a:ext cx="777240" cy="329184"/>
           </a:xfrm>
           <a:prstGeom prst="rect">
             <a:avLst/>
@@ -31329,8 +31329,8 @@
         </p:nvSpPr>
         <p:spPr>
           <a:xfrm>
-            <a:off x="1554480" y="1947672"/>
-            <a:ext cx="2560320" cy="365760"/>
+            <a:off x="1554480" y="1929384"/>
+            <a:ext cx="2560320" cy="329184"/>
           </a:xfrm>
           <a:prstGeom prst="rect">
             <a:avLst/>
@@ -31364,8 +31364,8 @@
         </p:nvSpPr>
         <p:spPr>
           <a:xfrm>
-            <a:off x="822960" y="2377440"/>
-            <a:ext cx="3291840" cy="365760"/>
+            <a:off x="822960" y="2331720"/>
+            <a:ext cx="3291840" cy="292608"/>
           </a:xfrm>
           <a:prstGeom prst="rect">
             <a:avLst/>
@@ -31380,42 +31380,42 @@
           <a:p>
             <a:pPr algn="l"/>
             <a:r>
+              <a:rPr sz="1050" b="0" i="0">
+                <a:solidFill>
+                  <a:srgbClr val="F2C55C"/>
+                </a:solidFill>
+                <a:latin typeface="Consolas"/>
+              </a:rPr>
+              <a:t>T4 · T5 / H1</a:t>
+            </a:r>
+          </a:p>
+        </p:txBody>
+      </p:sp>
+      <p:sp>
+        <p:nvSpPr>
+          <p:cNvPr id="13" name="TextBox 12"/>
+          <p:cNvSpPr txBox="1"/>
+          <p:nvPr/>
+        </p:nvSpPr>
+        <p:spPr>
+          <a:xfrm>
+            <a:off x="822960" y="2670048"/>
+            <a:ext cx="3291840" cy="868680"/>
+          </a:xfrm>
+          <a:prstGeom prst="rect">
+            <a:avLst/>
+          </a:prstGeom>
+          <a:noFill/>
+        </p:spPr>
+        <p:txBody>
+          <a:bodyPr wrap="square" lIns="0" rIns="0" tIns="0" bIns="0" anchor="t">
+            <a:spAutoFit/>
+          </a:bodyPr>
+          <a:lstStyle/>
+          <a:p>
+            <a:pPr algn="l"/>
+            <a:r>
               <a:rPr sz="1100" b="0" i="0">
-                <a:solidFill>
-                  <a:srgbClr val="F2C55C"/>
-                </a:solidFill>
-                <a:latin typeface="Consolas"/>
-              </a:rPr>
-              <a:t>T4 · T5 / H1</a:t>
-            </a:r>
-          </a:p>
-        </p:txBody>
-      </p:sp>
-      <p:sp>
-        <p:nvSpPr>
-          <p:cNvPr id="13" name="TextBox 12"/>
-          <p:cNvSpPr txBox="1"/>
-          <p:nvPr/>
-        </p:nvSpPr>
-        <p:spPr>
-          <a:xfrm>
-            <a:off x="822960" y="2743200"/>
-            <a:ext cx="3291840" cy="1143000"/>
-          </a:xfrm>
-          <a:prstGeom prst="rect">
-            <a:avLst/>
-          </a:prstGeom>
-          <a:noFill/>
-        </p:spPr>
-        <p:txBody>
-          <a:bodyPr wrap="square" lIns="0" rIns="0" tIns="0" bIns="0" anchor="t">
-            <a:spAutoFit/>
-          </a:bodyPr>
-          <a:lstStyle/>
-          <a:p>
-            <a:pPr algn="l"/>
-            <a:r>
-              <a:rPr sz="1150" b="0" i="0">
                 <a:solidFill>
                   <a:srgbClr val="9FB5C9"/>
                 </a:solidFill>
@@ -31435,7 +31435,7 @@
         <p:spPr>
           <a:xfrm>
             <a:off x="4297680" y="1828800"/>
-            <a:ext cx="3657600" cy="2103120"/>
+            <a:ext cx="3657600" cy="1783080"/>
           </a:xfrm>
           <a:prstGeom prst="roundRect">
             <a:avLst>
@@ -31480,7 +31480,7 @@
         <p:spPr>
           <a:xfrm>
             <a:off x="4297680" y="1828800"/>
-            <a:ext cx="128016" cy="2103120"/>
+            <a:ext cx="128016" cy="1783080"/>
           </a:xfrm>
           <a:prstGeom prst="rect">
             <a:avLst/>
@@ -31522,8 +31522,8 @@
         </p:nvSpPr>
         <p:spPr>
           <a:xfrm>
-            <a:off x="4572000" y="1938528"/>
-            <a:ext cx="777240" cy="365760"/>
+            <a:off x="4572000" y="1920240"/>
+            <a:ext cx="777240" cy="329184"/>
           </a:xfrm>
           <a:prstGeom prst="rect">
             <a:avLst/>
@@ -31557,8 +31557,8 @@
         </p:nvSpPr>
         <p:spPr>
           <a:xfrm>
-            <a:off x="5303520" y="1947672"/>
-            <a:ext cx="2560320" cy="365760"/>
+            <a:off x="5303520" y="1929384"/>
+            <a:ext cx="2560320" cy="329184"/>
           </a:xfrm>
           <a:prstGeom prst="rect">
             <a:avLst/>
@@ -31592,8 +31592,8 @@
         </p:nvSpPr>
         <p:spPr>
           <a:xfrm>
-            <a:off x="4572000" y="2377440"/>
-            <a:ext cx="3291840" cy="365760"/>
+            <a:off x="4572000" y="2331720"/>
+            <a:ext cx="3291840" cy="292608"/>
           </a:xfrm>
           <a:prstGeom prst="rect">
             <a:avLst/>
@@ -31608,42 +31608,42 @@
           <a:p>
             <a:pPr algn="l"/>
             <a:r>
+              <a:rPr sz="1050" b="0" i="0">
+                <a:solidFill>
+                  <a:srgbClr val="F2C55C"/>
+                </a:solidFill>
+                <a:latin typeface="Consolas"/>
+              </a:rPr>
+              <a:t>T2 / H2 · H6</a:t>
+            </a:r>
+          </a:p>
+        </p:txBody>
+      </p:sp>
+      <p:sp>
+        <p:nvSpPr>
+          <p:cNvPr id="19" name="TextBox 18"/>
+          <p:cNvSpPr txBox="1"/>
+          <p:nvPr/>
+        </p:nvSpPr>
+        <p:spPr>
+          <a:xfrm>
+            <a:off x="4572000" y="2670048"/>
+            <a:ext cx="3291840" cy="868680"/>
+          </a:xfrm>
+          <a:prstGeom prst="rect">
+            <a:avLst/>
+          </a:prstGeom>
+          <a:noFill/>
+        </p:spPr>
+        <p:txBody>
+          <a:bodyPr wrap="square" lIns="0" rIns="0" tIns="0" bIns="0" anchor="t">
+            <a:spAutoFit/>
+          </a:bodyPr>
+          <a:lstStyle/>
+          <a:p>
+            <a:pPr algn="l"/>
+            <a:r>
               <a:rPr sz="1100" b="0" i="0">
-                <a:solidFill>
-                  <a:srgbClr val="F2C55C"/>
-                </a:solidFill>
-                <a:latin typeface="Consolas"/>
-              </a:rPr>
-              <a:t>T2 / H2 · H6</a:t>
-            </a:r>
-          </a:p>
-        </p:txBody>
-      </p:sp>
-      <p:sp>
-        <p:nvSpPr>
-          <p:cNvPr id="19" name="TextBox 18"/>
-          <p:cNvSpPr txBox="1"/>
-          <p:nvPr/>
-        </p:nvSpPr>
-        <p:spPr>
-          <a:xfrm>
-            <a:off x="4572000" y="2743200"/>
-            <a:ext cx="3291840" cy="1143000"/>
-          </a:xfrm>
-          <a:prstGeom prst="rect">
-            <a:avLst/>
-          </a:prstGeom>
-          <a:noFill/>
-        </p:spPr>
-        <p:txBody>
-          <a:bodyPr wrap="square" lIns="0" rIns="0" tIns="0" bIns="0" anchor="t">
-            <a:spAutoFit/>
-          </a:bodyPr>
-          <a:lstStyle/>
-          <a:p>
-            <a:pPr algn="l"/>
-            <a:r>
-              <a:rPr sz="1150" b="0" i="0">
                 <a:solidFill>
                   <a:srgbClr val="9FB5C9"/>
                 </a:solidFill>
@@ -31663,7 +31663,7 @@
         <p:spPr>
           <a:xfrm>
             <a:off x="8046720" y="1828800"/>
-            <a:ext cx="3657600" cy="2103120"/>
+            <a:ext cx="3657600" cy="1783080"/>
           </a:xfrm>
           <a:prstGeom prst="roundRect">
             <a:avLst>
@@ -31708,7 +31708,7 @@
         <p:spPr>
           <a:xfrm>
             <a:off x="8046720" y="1828800"/>
-            <a:ext cx="128016" cy="2103120"/>
+            <a:ext cx="128016" cy="1783080"/>
           </a:xfrm>
           <a:prstGeom prst="rect">
             <a:avLst/>
@@ -31750,8 +31750,8 @@
         </p:nvSpPr>
         <p:spPr>
           <a:xfrm>
-            <a:off x="8321040" y="1938528"/>
-            <a:ext cx="777240" cy="365760"/>
+            <a:off x="8321040" y="1920240"/>
+            <a:ext cx="777240" cy="329184"/>
           </a:xfrm>
           <a:prstGeom prst="rect">
             <a:avLst/>
@@ -31785,8 +31785,8 @@
         </p:nvSpPr>
         <p:spPr>
           <a:xfrm>
-            <a:off x="9052560" y="1947672"/>
-            <a:ext cx="2560320" cy="365760"/>
+            <a:off x="9052560" y="1929384"/>
+            <a:ext cx="2560320" cy="329184"/>
           </a:xfrm>
           <a:prstGeom prst="rect">
             <a:avLst/>
@@ -31820,8 +31820,8 @@
         </p:nvSpPr>
         <p:spPr>
           <a:xfrm>
-            <a:off x="8321040" y="2377440"/>
-            <a:ext cx="3291840" cy="365760"/>
+            <a:off x="8321040" y="2331720"/>
+            <a:ext cx="3291840" cy="292608"/>
           </a:xfrm>
           <a:prstGeom prst="rect">
             <a:avLst/>
@@ -31836,42 +31836,42 @@
           <a:p>
             <a:pPr algn="l"/>
             <a:r>
+              <a:rPr sz="1050" b="0" i="0">
+                <a:solidFill>
+                  <a:srgbClr val="F2C55C"/>
+                </a:solidFill>
+                <a:latin typeface="Consolas"/>
+              </a:rPr>
+              <a:t>T2 · T4 / H2 · H7</a:t>
+            </a:r>
+          </a:p>
+        </p:txBody>
+      </p:sp>
+      <p:sp>
+        <p:nvSpPr>
+          <p:cNvPr id="25" name="TextBox 24"/>
+          <p:cNvSpPr txBox="1"/>
+          <p:nvPr/>
+        </p:nvSpPr>
+        <p:spPr>
+          <a:xfrm>
+            <a:off x="8321040" y="2670048"/>
+            <a:ext cx="3291840" cy="868680"/>
+          </a:xfrm>
+          <a:prstGeom prst="rect">
+            <a:avLst/>
+          </a:prstGeom>
+          <a:noFill/>
+        </p:spPr>
+        <p:txBody>
+          <a:bodyPr wrap="square" lIns="0" rIns="0" tIns="0" bIns="0" anchor="t">
+            <a:spAutoFit/>
+          </a:bodyPr>
+          <a:lstStyle/>
+          <a:p>
+            <a:pPr algn="l"/>
+            <a:r>
               <a:rPr sz="1100" b="0" i="0">
-                <a:solidFill>
-                  <a:srgbClr val="F2C55C"/>
-                </a:solidFill>
-                <a:latin typeface="Consolas"/>
-              </a:rPr>
-              <a:t>T2 · T4 / H2 · H7</a:t>
-            </a:r>
-          </a:p>
-        </p:txBody>
-      </p:sp>
-      <p:sp>
-        <p:nvSpPr>
-          <p:cNvPr id="25" name="TextBox 24"/>
-          <p:cNvSpPr txBox="1"/>
-          <p:nvPr/>
-        </p:nvSpPr>
-        <p:spPr>
-          <a:xfrm>
-            <a:off x="8321040" y="2743200"/>
-            <a:ext cx="3291840" cy="1143000"/>
-          </a:xfrm>
-          <a:prstGeom prst="rect">
-            <a:avLst/>
-          </a:prstGeom>
-          <a:noFill/>
-        </p:spPr>
-        <p:txBody>
-          <a:bodyPr wrap="square" lIns="0" rIns="0" tIns="0" bIns="0" anchor="t">
-            <a:spAutoFit/>
-          </a:bodyPr>
-          <a:lstStyle/>
-          <a:p>
-            <a:pPr algn="l"/>
-            <a:r>
-              <a:rPr sz="1150" b="0" i="0">
                 <a:solidFill>
                   <a:srgbClr val="9FB5C9"/>
                 </a:solidFill>
@@ -31890,8 +31890,8 @@
         </p:nvSpPr>
         <p:spPr>
           <a:xfrm>
-            <a:off x="548640" y="4078224"/>
-            <a:ext cx="3657600" cy="2103120"/>
+            <a:off x="548640" y="3730752"/>
+            <a:ext cx="3657600" cy="1783080"/>
           </a:xfrm>
           <a:prstGeom prst="roundRect">
             <a:avLst>
@@ -31935,8 +31935,8 @@
         </p:nvSpPr>
         <p:spPr>
           <a:xfrm>
-            <a:off x="548640" y="4078224"/>
-            <a:ext cx="128016" cy="2103120"/>
+            <a:off x="548640" y="3730752"/>
+            <a:ext cx="128016" cy="1783080"/>
           </a:xfrm>
           <a:prstGeom prst="rect">
             <a:avLst/>
@@ -31978,8 +31978,8 @@
         </p:nvSpPr>
         <p:spPr>
           <a:xfrm>
-            <a:off x="822960" y="4187952"/>
-            <a:ext cx="777240" cy="365760"/>
+            <a:off x="822960" y="3822192"/>
+            <a:ext cx="777240" cy="329184"/>
           </a:xfrm>
           <a:prstGeom prst="rect">
             <a:avLst/>
@@ -32013,8 +32013,8 @@
         </p:nvSpPr>
         <p:spPr>
           <a:xfrm>
-            <a:off x="1554480" y="4197096"/>
-            <a:ext cx="2560320" cy="365760"/>
+            <a:off x="1554480" y="3831336"/>
+            <a:ext cx="2560320" cy="329184"/>
           </a:xfrm>
           <a:prstGeom prst="rect">
             <a:avLst/>
@@ -32048,8 +32048,8 @@
         </p:nvSpPr>
         <p:spPr>
           <a:xfrm>
-            <a:off x="822960" y="4626864"/>
-            <a:ext cx="3291840" cy="365760"/>
+            <a:off x="822960" y="4233672"/>
+            <a:ext cx="3291840" cy="292608"/>
           </a:xfrm>
           <a:prstGeom prst="rect">
             <a:avLst/>
@@ -32064,42 +32064,42 @@
           <a:p>
             <a:pPr algn="l"/>
             <a:r>
+              <a:rPr sz="1050" b="0" i="0">
+                <a:solidFill>
+                  <a:srgbClr val="F2C55C"/>
+                </a:solidFill>
+                <a:latin typeface="Consolas"/>
+              </a:rPr>
+              <a:t>T3 / H3 · H4</a:t>
+            </a:r>
+          </a:p>
+        </p:txBody>
+      </p:sp>
+      <p:sp>
+        <p:nvSpPr>
+          <p:cNvPr id="31" name="TextBox 30"/>
+          <p:cNvSpPr txBox="1"/>
+          <p:nvPr/>
+        </p:nvSpPr>
+        <p:spPr>
+          <a:xfrm>
+            <a:off x="822960" y="4572000"/>
+            <a:ext cx="3291840" cy="868680"/>
+          </a:xfrm>
+          <a:prstGeom prst="rect">
+            <a:avLst/>
+          </a:prstGeom>
+          <a:noFill/>
+        </p:spPr>
+        <p:txBody>
+          <a:bodyPr wrap="square" lIns="0" rIns="0" tIns="0" bIns="0" anchor="t">
+            <a:spAutoFit/>
+          </a:bodyPr>
+          <a:lstStyle/>
+          <a:p>
+            <a:pPr algn="l"/>
+            <a:r>
               <a:rPr sz="1100" b="0" i="0">
-                <a:solidFill>
-                  <a:srgbClr val="F2C55C"/>
-                </a:solidFill>
-                <a:latin typeface="Consolas"/>
-              </a:rPr>
-              <a:t>T3 / H3 · H4</a:t>
-            </a:r>
-          </a:p>
-        </p:txBody>
-      </p:sp>
-      <p:sp>
-        <p:nvSpPr>
-          <p:cNvPr id="31" name="TextBox 30"/>
-          <p:cNvSpPr txBox="1"/>
-          <p:nvPr/>
-        </p:nvSpPr>
-        <p:spPr>
-          <a:xfrm>
-            <a:off x="822960" y="4992624"/>
-            <a:ext cx="3291840" cy="1143000"/>
-          </a:xfrm>
-          <a:prstGeom prst="rect">
-            <a:avLst/>
-          </a:prstGeom>
-          <a:noFill/>
-        </p:spPr>
-        <p:txBody>
-          <a:bodyPr wrap="square" lIns="0" rIns="0" tIns="0" bIns="0" anchor="t">
-            <a:spAutoFit/>
-          </a:bodyPr>
-          <a:lstStyle/>
-          <a:p>
-            <a:pPr algn="l"/>
-            <a:r>
-              <a:rPr sz="1150" b="0" i="0">
                 <a:solidFill>
                   <a:srgbClr val="9FB5C9"/>
                 </a:solidFill>
@@ -32118,8 +32118,8 @@
         </p:nvSpPr>
         <p:spPr>
           <a:xfrm>
-            <a:off x="4297680" y="4078224"/>
-            <a:ext cx="3657600" cy="2103120"/>
+            <a:off x="4297680" y="3730752"/>
+            <a:ext cx="3657600" cy="1783080"/>
           </a:xfrm>
           <a:prstGeom prst="roundRect">
             <a:avLst>
@@ -32163,8 +32163,8 @@
         </p:nvSpPr>
         <p:spPr>
           <a:xfrm>
-            <a:off x="4297680" y="4078224"/>
-            <a:ext cx="128016" cy="2103120"/>
+            <a:off x="4297680" y="3730752"/>
+            <a:ext cx="128016" cy="1783080"/>
           </a:xfrm>
           <a:prstGeom prst="rect">
             <a:avLst/>
@@ -32206,8 +32206,8 @@
         </p:nvSpPr>
         <p:spPr>
           <a:xfrm>
-            <a:off x="4572000" y="4187952"/>
-            <a:ext cx="777240" cy="365760"/>
+            <a:off x="4572000" y="3822192"/>
+            <a:ext cx="777240" cy="329184"/>
           </a:xfrm>
           <a:prstGeom prst="rect">
             <a:avLst/>
@@ -32241,8 +32241,8 @@
         </p:nvSpPr>
         <p:spPr>
           <a:xfrm>
-            <a:off x="5303520" y="4197096"/>
-            <a:ext cx="2560320" cy="365760"/>
+            <a:off x="5303520" y="3831336"/>
+            <a:ext cx="2560320" cy="329184"/>
           </a:xfrm>
           <a:prstGeom prst="rect">
             <a:avLst/>
@@ -32276,8 +32276,8 @@
         </p:nvSpPr>
         <p:spPr>
           <a:xfrm>
-            <a:off x="4572000" y="4626864"/>
-            <a:ext cx="3291840" cy="365760"/>
+            <a:off x="4572000" y="4233672"/>
+            <a:ext cx="3291840" cy="292608"/>
           </a:xfrm>
           <a:prstGeom prst="rect">
             <a:avLst/>
@@ -32292,42 +32292,42 @@
           <a:p>
             <a:pPr algn="l"/>
             <a:r>
+              <a:rPr sz="1050" b="0" i="0">
+                <a:solidFill>
+                  <a:srgbClr val="F2C55C"/>
+                </a:solidFill>
+                <a:latin typeface="Consolas"/>
+              </a:rPr>
+              <a:t>T5 / H1 · H8</a:t>
+            </a:r>
+          </a:p>
+        </p:txBody>
+      </p:sp>
+      <p:sp>
+        <p:nvSpPr>
+          <p:cNvPr id="37" name="TextBox 36"/>
+          <p:cNvSpPr txBox="1"/>
+          <p:nvPr/>
+        </p:nvSpPr>
+        <p:spPr>
+          <a:xfrm>
+            <a:off x="4572000" y="4572000"/>
+            <a:ext cx="3291840" cy="868680"/>
+          </a:xfrm>
+          <a:prstGeom prst="rect">
+            <a:avLst/>
+          </a:prstGeom>
+          <a:noFill/>
+        </p:spPr>
+        <p:txBody>
+          <a:bodyPr wrap="square" lIns="0" rIns="0" tIns="0" bIns="0" anchor="t">
+            <a:spAutoFit/>
+          </a:bodyPr>
+          <a:lstStyle/>
+          <a:p>
+            <a:pPr algn="l"/>
+            <a:r>
               <a:rPr sz="1100" b="0" i="0">
-                <a:solidFill>
-                  <a:srgbClr val="F2C55C"/>
-                </a:solidFill>
-                <a:latin typeface="Consolas"/>
-              </a:rPr>
-              <a:t>T5 / H1 · H8</a:t>
-            </a:r>
-          </a:p>
-        </p:txBody>
-      </p:sp>
-      <p:sp>
-        <p:nvSpPr>
-          <p:cNvPr id="37" name="TextBox 36"/>
-          <p:cNvSpPr txBox="1"/>
-          <p:nvPr/>
-        </p:nvSpPr>
-        <p:spPr>
-          <a:xfrm>
-            <a:off x="4572000" y="4992624"/>
-            <a:ext cx="3291840" cy="1143000"/>
-          </a:xfrm>
-          <a:prstGeom prst="rect">
-            <a:avLst/>
-          </a:prstGeom>
-          <a:noFill/>
-        </p:spPr>
-        <p:txBody>
-          <a:bodyPr wrap="square" lIns="0" rIns="0" tIns="0" bIns="0" anchor="t">
-            <a:spAutoFit/>
-          </a:bodyPr>
-          <a:lstStyle/>
-          <a:p>
-            <a:pPr algn="l"/>
-            <a:r>
-              <a:rPr sz="1150" b="0" i="0">
                 <a:solidFill>
                   <a:srgbClr val="9FB5C9"/>
                 </a:solidFill>
@@ -32346,8 +32346,8 @@
         </p:nvSpPr>
         <p:spPr>
           <a:xfrm>
-            <a:off x="8046720" y="4078224"/>
-            <a:ext cx="3657600" cy="2103120"/>
+            <a:off x="8046720" y="3730752"/>
+            <a:ext cx="3657600" cy="1783080"/>
           </a:xfrm>
           <a:prstGeom prst="roundRect">
             <a:avLst>
@@ -32391,8 +32391,8 @@
         </p:nvSpPr>
         <p:spPr>
           <a:xfrm>
-            <a:off x="8046720" y="4078224"/>
-            <a:ext cx="128016" cy="2103120"/>
+            <a:off x="8046720" y="3730752"/>
+            <a:ext cx="128016" cy="1783080"/>
           </a:xfrm>
           <a:prstGeom prst="rect">
             <a:avLst/>
@@ -32434,8 +32434,8 @@
         </p:nvSpPr>
         <p:spPr>
           <a:xfrm>
-            <a:off x="8321040" y="4187952"/>
-            <a:ext cx="777240" cy="365760"/>
+            <a:off x="8321040" y="3822192"/>
+            <a:ext cx="777240" cy="329184"/>
           </a:xfrm>
           <a:prstGeom prst="rect">
             <a:avLst/>
@@ -32469,8 +32469,8 @@
         </p:nvSpPr>
         <p:spPr>
           <a:xfrm>
-            <a:off x="9052560" y="4197096"/>
-            <a:ext cx="2560320" cy="365760"/>
+            <a:off x="9052560" y="3831336"/>
+            <a:ext cx="2560320" cy="329184"/>
           </a:xfrm>
           <a:prstGeom prst="rect">
             <a:avLst/>
@@ -32504,8 +32504,8 @@
         </p:nvSpPr>
         <p:spPr>
           <a:xfrm>
-            <a:off x="8321040" y="4626864"/>
-            <a:ext cx="3291840" cy="365760"/>
+            <a:off x="8321040" y="4233672"/>
+            <a:ext cx="3291840" cy="292608"/>
           </a:xfrm>
           <a:prstGeom prst="rect">
             <a:avLst/>
@@ -32520,42 +32520,42 @@
           <a:p>
             <a:pPr algn="l"/>
             <a:r>
+              <a:rPr sz="1050" b="0" i="0">
+                <a:solidFill>
+                  <a:srgbClr val="F2C55C"/>
+                </a:solidFill>
+                <a:latin typeface="Consolas"/>
+              </a:rPr>
+              <a:t>T4 / H4</a:t>
+            </a:r>
+          </a:p>
+        </p:txBody>
+      </p:sp>
+      <p:sp>
+        <p:nvSpPr>
+          <p:cNvPr id="43" name="TextBox 42"/>
+          <p:cNvSpPr txBox="1"/>
+          <p:nvPr/>
+        </p:nvSpPr>
+        <p:spPr>
+          <a:xfrm>
+            <a:off x="8321040" y="4572000"/>
+            <a:ext cx="3291840" cy="868680"/>
+          </a:xfrm>
+          <a:prstGeom prst="rect">
+            <a:avLst/>
+          </a:prstGeom>
+          <a:noFill/>
+        </p:spPr>
+        <p:txBody>
+          <a:bodyPr wrap="square" lIns="0" rIns="0" tIns="0" bIns="0" anchor="t">
+            <a:spAutoFit/>
+          </a:bodyPr>
+          <a:lstStyle/>
+          <a:p>
+            <a:pPr algn="l"/>
+            <a:r>
               <a:rPr sz="1100" b="0" i="0">
-                <a:solidFill>
-                  <a:srgbClr val="F2C55C"/>
-                </a:solidFill>
-                <a:latin typeface="Consolas"/>
-              </a:rPr>
-              <a:t>T4 / H4</a:t>
-            </a:r>
-          </a:p>
-        </p:txBody>
-      </p:sp>
-      <p:sp>
-        <p:nvSpPr>
-          <p:cNvPr id="43" name="TextBox 42"/>
-          <p:cNvSpPr txBox="1"/>
-          <p:nvPr/>
-        </p:nvSpPr>
-        <p:spPr>
-          <a:xfrm>
-            <a:off x="8321040" y="4992624"/>
-            <a:ext cx="3291840" cy="1143000"/>
-          </a:xfrm>
-          <a:prstGeom prst="rect">
-            <a:avLst/>
-          </a:prstGeom>
-          <a:noFill/>
-        </p:spPr>
-        <p:txBody>
-          <a:bodyPr wrap="square" lIns="0" rIns="0" tIns="0" bIns="0" anchor="t">
-            <a:spAutoFit/>
-          </a:bodyPr>
-          <a:lstStyle/>
-          <a:p>
-            <a:pPr algn="l"/>
-            <a:r>
-              <a:rPr sz="1150" b="0" i="0">
                 <a:solidFill>
                   <a:srgbClr val="9FB5C9"/>
                 </a:solidFill>
@@ -32574,8 +32574,8 @@
         </p:nvSpPr>
         <p:spPr>
           <a:xfrm>
-            <a:off x="4297680" y="6327648"/>
-            <a:ext cx="3657600" cy="2103120"/>
+            <a:off x="548640" y="5632704"/>
+            <a:ext cx="11109960" cy="868680"/>
           </a:xfrm>
           <a:prstGeom prst="roundRect">
             <a:avLst>
@@ -32583,7 +32583,7 @@
             </a:avLst>
           </a:prstGeom>
           <a:solidFill>
-            <a:srgbClr val="122A43"/>
+            <a:srgbClr val="183553"/>
           </a:solidFill>
           <a:ln>
             <a:noFill/>
@@ -32619,8 +32619,8 @@
         </p:nvSpPr>
         <p:spPr>
           <a:xfrm>
-            <a:off x="4297680" y="6327648"/>
-            <a:ext cx="128016" cy="2103120"/>
+            <a:off x="548640" y="5632704"/>
+            <a:ext cx="128016" cy="868680"/>
           </a:xfrm>
           <a:prstGeom prst="rect">
             <a:avLst/>
@@ -32662,7 +32662,7 @@
         </p:nvSpPr>
         <p:spPr>
           <a:xfrm>
-            <a:off x="4572000" y="6437376"/>
+            <a:off x="822960" y="5751576"/>
             <a:ext cx="777240" cy="365760"/>
           </a:xfrm>
           <a:prstGeom prst="rect">
@@ -32678,7 +32678,7 @@
           <a:p>
             <a:pPr algn="l"/>
             <a:r>
-              <a:rPr sz="1600" b="1" i="0">
+              <a:rPr sz="1800" b="1" i="0">
                 <a:solidFill>
                   <a:srgbClr val="F2C55C"/>
                 </a:solidFill>
@@ -32697,8 +32697,8 @@
         </p:nvSpPr>
         <p:spPr>
           <a:xfrm>
-            <a:off x="5303520" y="6446520"/>
-            <a:ext cx="2560320" cy="365760"/>
+            <a:off x="1554480" y="5751576"/>
+            <a:ext cx="3291840" cy="365760"/>
           </a:xfrm>
           <a:prstGeom prst="rect">
             <a:avLst/>
@@ -32713,7 +32713,7 @@
           <a:p>
             <a:pPr algn="l"/>
             <a:r>
-              <a:rPr sz="1400" b="1" i="0">
+              <a:rPr sz="1500" b="1" i="0">
                 <a:solidFill>
                   <a:srgbClr val="EAF2FA"/>
                 </a:solidFill>
@@ -32732,8 +32732,43 @@
         </p:nvSpPr>
         <p:spPr>
           <a:xfrm>
-            <a:off x="4572000" y="6876288"/>
-            <a:ext cx="3291840" cy="365760"/>
+            <a:off x="4983480" y="5779008"/>
+            <a:ext cx="2103120" cy="365760"/>
+          </a:xfrm>
+          <a:prstGeom prst="rect">
+            <a:avLst/>
+          </a:prstGeom>
+          <a:noFill/>
+        </p:spPr>
+        <p:txBody>
+          <a:bodyPr wrap="square" lIns="0" rIns="0" tIns="0" bIns="0" anchor="ctr">
+            <a:spAutoFit/>
+          </a:bodyPr>
+          <a:lstStyle/>
+          <a:p>
+            <a:pPr algn="l"/>
+            <a:r>
+              <a:rPr sz="1100" b="0" i="0">
+                <a:solidFill>
+                  <a:srgbClr val="F2C55C"/>
+                </a:solidFill>
+                <a:latin typeface="Consolas"/>
+              </a:rPr>
+              <a:t>T1 · T2 / H9</a:t>
+            </a:r>
+          </a:p>
+        </p:txBody>
+      </p:sp>
+      <p:sp>
+        <p:nvSpPr>
+          <p:cNvPr id="49" name="TextBox 48"/>
+          <p:cNvSpPr txBox="1"/>
+          <p:nvPr/>
+        </p:nvSpPr>
+        <p:spPr>
+          <a:xfrm>
+            <a:off x="7223760" y="5751576"/>
+            <a:ext cx="4297680" cy="365760"/>
           </a:xfrm>
           <a:prstGeom prst="rect">
             <a:avLst/>
@@ -32748,55 +32783,55 @@
           <a:p>
             <a:pPr algn="l"/>
             <a:r>
+              <a:rPr sz="1200" b="1" i="0">
+                <a:solidFill>
+                  <a:srgbClr val="F2C55C"/>
+                </a:solidFill>
+                <a:latin typeface="Microsoft YaHei"/>
+              </a:rPr>
+              <a:t>横切的「度量层」</a:t>
+            </a:r>
+          </a:p>
+        </p:txBody>
+      </p:sp>
+      <p:sp>
+        <p:nvSpPr>
+          <p:cNvPr id="50" name="TextBox 49"/>
+          <p:cNvSpPr txBox="1"/>
+          <p:nvPr/>
+        </p:nvSpPr>
+        <p:spPr>
+          <a:xfrm>
+            <a:off x="822960" y="6135624"/>
+            <a:ext cx="10744200" cy="329184"/>
+          </a:xfrm>
+          <a:prstGeom prst="rect">
+            <a:avLst/>
+          </a:prstGeom>
+          <a:noFill/>
+        </p:spPr>
+        <p:txBody>
+          <a:bodyPr wrap="square" lIns="0" rIns="0" tIns="0" bIns="0" anchor="t">
+            <a:spAutoFit/>
+          </a:bodyPr>
+          <a:lstStyle/>
+          <a:p>
+            <a:pPr algn="l"/>
+            <a:r>
               <a:rPr sz="1100" b="0" i="0">
                 <a:solidFill>
-                  <a:srgbClr val="F2C55C"/>
-                </a:solidFill>
-                <a:latin typeface="Consolas"/>
-              </a:rPr>
-              <a:t>T1 · T2 / H9</a:t>
-            </a:r>
-          </a:p>
-        </p:txBody>
-      </p:sp>
-      <p:sp>
-        <p:nvSpPr>
-          <p:cNvPr id="49" name="TextBox 48"/>
-          <p:cNvSpPr txBox="1"/>
-          <p:nvPr/>
-        </p:nvSpPr>
-        <p:spPr>
-          <a:xfrm>
-            <a:off x="4572000" y="7242048"/>
-            <a:ext cx="3291840" cy="1143000"/>
-          </a:xfrm>
-          <a:prstGeom prst="rect">
-            <a:avLst/>
-          </a:prstGeom>
-          <a:noFill/>
-        </p:spPr>
-        <p:txBody>
-          <a:bodyPr wrap="square" lIns="0" rIns="0" tIns="0" bIns="0" anchor="t">
-            <a:spAutoFit/>
-          </a:bodyPr>
-          <a:lstStyle/>
-          <a:p>
-            <a:pPr algn="l"/>
-            <a:r>
-              <a:rPr sz="1150" b="0" i="0">
-                <a:solidFill>
                   <a:srgbClr val="9FB5C9"/>
                 </a:solidFill>
                 <a:latin typeface="Microsoft YaHei"/>
               </a:rPr>
-              <a:t>统一形状层级 / baseline / 报表 schema，跨工作可比。</a:t>
-            </a:r>
-          </a:p>
-        </p:txBody>
-      </p:sp>
-      <p:sp>
-        <p:nvSpPr>
-          <p:cNvPr id="50" name="TextBox 49"/>
+              <a:t>统一形状层级 / baseline / 报表 schema → 跨工作 / 跨硬件 / 跨版本可横向对比；是把前 6 个特征「真正落到工程」的前提。</a:t>
+            </a:r>
+          </a:p>
+        </p:txBody>
+      </p:sp>
+      <p:sp>
+        <p:nvSpPr>
+          <p:cNvPr id="51" name="TextBox 50"/>
           <p:cNvSpPr txBox="1"/>
           <p:nvPr/>
         </p:nvSpPr>
@@ -32831,7 +32866,7 @@
       </p:sp>
       <p:sp>
         <p:nvSpPr>
-          <p:cNvPr id="51" name="TextBox 50"/>
+          <p:cNvPr id="52" name="TextBox 51"/>
           <p:cNvSpPr txBox="1"/>
           <p:nvPr/>
         </p:nvSpPr>
